--- a/Presentations/HRE culvert scale model.pptx
+++ b/Presentations/HRE culvert scale model.pptx
@@ -4,6 +4,9 @@
   <p:sldMasterIdLst>
     <p:sldMasterId id="2147483648" r:id="rId1"/>
   </p:sldMasterIdLst>
+  <p:notesMasterIdLst>
+    <p:notesMasterId r:id="rId12"/>
+  </p:notesMasterIdLst>
   <p:sldIdLst>
     <p:sldId id="256" r:id="rId2"/>
     <p:sldId id="261" r:id="rId3"/>
@@ -11,7 +14,10 @@
     <p:sldId id="263" r:id="rId5"/>
     <p:sldId id="264" r:id="rId6"/>
     <p:sldId id="266" r:id="rId7"/>
-    <p:sldId id="265" r:id="rId8"/>
+    <p:sldId id="267" r:id="rId8"/>
+    <p:sldId id="269" r:id="rId9"/>
+    <p:sldId id="265" r:id="rId10"/>
+    <p:sldId id="268" r:id="rId11"/>
   </p:sldIdLst>
   <p:sldSz cx="12192000" cy="6858000"/>
   <p:notesSz cx="6858000" cy="9144000"/>
@@ -111,6 +117,547 @@
     </a:lvl9pPr>
   </p:defaultTextStyle>
 </p:presentation>
+</file>
+
+<file path=ppt/notesMasters/notesMaster1.xml><?xml version="1.0" encoding="utf-8"?>
+<p:notesMaster xmlns:a="http://schemas.openxmlformats.org/drawingml/2006/main" xmlns:r="http://schemas.openxmlformats.org/officeDocument/2006/relationships" xmlns:p="http://schemas.openxmlformats.org/presentationml/2006/main">
+  <p:cSld>
+    <p:bg>
+      <p:bgRef idx="1001">
+        <a:schemeClr val="bg1"/>
+      </p:bgRef>
+    </p:bg>
+    <p:spTree>
+      <p:nvGrpSpPr>
+        <p:cNvPr id="1" name=""/>
+        <p:cNvGrpSpPr/>
+        <p:nvPr/>
+      </p:nvGrpSpPr>
+      <p:grpSpPr>
+        <a:xfrm>
+          <a:off x="0" y="0"/>
+          <a:ext cx="0" cy="0"/>
+          <a:chOff x="0" y="0"/>
+          <a:chExt cx="0" cy="0"/>
+        </a:xfrm>
+      </p:grpSpPr>
+      <p:sp>
+        <p:nvSpPr>
+          <p:cNvPr id="2" name="Header Placeholder 1"/>
+          <p:cNvSpPr>
+            <a:spLocks noGrp="1"/>
+          </p:cNvSpPr>
+          <p:nvPr>
+            <p:ph type="hdr" sz="quarter"/>
+          </p:nvPr>
+        </p:nvSpPr>
+        <p:spPr>
+          <a:xfrm>
+            <a:off x="0" y="0"/>
+            <a:ext cx="2971800" cy="458788"/>
+          </a:xfrm>
+          <a:prstGeom prst="rect">
+            <a:avLst/>
+          </a:prstGeom>
+        </p:spPr>
+        <p:txBody>
+          <a:bodyPr vert="horz" lIns="91440" tIns="45720" rIns="91440" bIns="45720" rtlCol="0"/>
+          <a:lstStyle>
+            <a:lvl1pPr algn="l">
+              <a:defRPr sz="1200"/>
+            </a:lvl1pPr>
+          </a:lstStyle>
+          <a:p>
+            <a:endParaRPr lang="en-US"/>
+          </a:p>
+        </p:txBody>
+      </p:sp>
+      <p:sp>
+        <p:nvSpPr>
+          <p:cNvPr id="3" name="Date Placeholder 2"/>
+          <p:cNvSpPr>
+            <a:spLocks noGrp="1"/>
+          </p:cNvSpPr>
+          <p:nvPr>
+            <p:ph type="dt" idx="1"/>
+          </p:nvPr>
+        </p:nvSpPr>
+        <p:spPr>
+          <a:xfrm>
+            <a:off x="3884613" y="0"/>
+            <a:ext cx="2971800" cy="458788"/>
+          </a:xfrm>
+          <a:prstGeom prst="rect">
+            <a:avLst/>
+          </a:prstGeom>
+        </p:spPr>
+        <p:txBody>
+          <a:bodyPr vert="horz" lIns="91440" tIns="45720" rIns="91440" bIns="45720" rtlCol="0"/>
+          <a:lstStyle>
+            <a:lvl1pPr algn="r">
+              <a:defRPr sz="1200"/>
+            </a:lvl1pPr>
+          </a:lstStyle>
+          <a:p>
+            <a:fld id="{EA2A6E2A-80F9-CE4D-9755-0080938B0910}" type="datetimeFigureOut">
+              <a:rPr lang="en-US" smtClean="0"/>
+              <a:t>11/18/25</a:t>
+            </a:fld>
+            <a:endParaRPr lang="en-US"/>
+          </a:p>
+        </p:txBody>
+      </p:sp>
+      <p:sp>
+        <p:nvSpPr>
+          <p:cNvPr id="4" name="Slide Image Placeholder 3"/>
+          <p:cNvSpPr>
+            <a:spLocks noGrp="1" noRot="1" noChangeAspect="1"/>
+          </p:cNvSpPr>
+          <p:nvPr>
+            <p:ph type="sldImg" idx="2"/>
+          </p:nvPr>
+        </p:nvSpPr>
+        <p:spPr>
+          <a:xfrm>
+            <a:off x="685800" y="1143000"/>
+            <a:ext cx="5486400" cy="3086100"/>
+          </a:xfrm>
+          <a:prstGeom prst="rect">
+            <a:avLst/>
+          </a:prstGeom>
+          <a:noFill/>
+          <a:ln w="12700">
+            <a:solidFill>
+              <a:prstClr val="black"/>
+            </a:solidFill>
+          </a:ln>
+        </p:spPr>
+        <p:txBody>
+          <a:bodyPr vert="horz" lIns="91440" tIns="45720" rIns="91440" bIns="45720" rtlCol="0" anchor="ctr"/>
+          <a:lstStyle/>
+          <a:p>
+            <a:endParaRPr lang="en-US"/>
+          </a:p>
+        </p:txBody>
+      </p:sp>
+      <p:sp>
+        <p:nvSpPr>
+          <p:cNvPr id="5" name="Notes Placeholder 4"/>
+          <p:cNvSpPr>
+            <a:spLocks noGrp="1"/>
+          </p:cNvSpPr>
+          <p:nvPr>
+            <p:ph type="body" sz="quarter" idx="3"/>
+          </p:nvPr>
+        </p:nvSpPr>
+        <p:spPr>
+          <a:xfrm>
+            <a:off x="685800" y="4400550"/>
+            <a:ext cx="5486400" cy="3600450"/>
+          </a:xfrm>
+          <a:prstGeom prst="rect">
+            <a:avLst/>
+          </a:prstGeom>
+        </p:spPr>
+        <p:txBody>
+          <a:bodyPr vert="horz" lIns="91440" tIns="45720" rIns="91440" bIns="45720" rtlCol="0"/>
+          <a:lstStyle/>
+          <a:p>
+            <a:pPr lvl="0"/>
+            <a:r>
+              <a:rPr lang="en-US"/>
+              <a:t>Click to edit Master text styles</a:t>
+            </a:r>
+          </a:p>
+          <a:p>
+            <a:pPr lvl="1"/>
+            <a:r>
+              <a:rPr lang="en-US"/>
+              <a:t>Second level</a:t>
+            </a:r>
+          </a:p>
+          <a:p>
+            <a:pPr lvl="2"/>
+            <a:r>
+              <a:rPr lang="en-US"/>
+              <a:t>Third level</a:t>
+            </a:r>
+          </a:p>
+          <a:p>
+            <a:pPr lvl="3"/>
+            <a:r>
+              <a:rPr lang="en-US"/>
+              <a:t>Fourth level</a:t>
+            </a:r>
+          </a:p>
+          <a:p>
+            <a:pPr lvl="4"/>
+            <a:r>
+              <a:rPr lang="en-US"/>
+              <a:t>Fifth level</a:t>
+            </a:r>
+          </a:p>
+        </p:txBody>
+      </p:sp>
+      <p:sp>
+        <p:nvSpPr>
+          <p:cNvPr id="6" name="Footer Placeholder 5"/>
+          <p:cNvSpPr>
+            <a:spLocks noGrp="1"/>
+          </p:cNvSpPr>
+          <p:nvPr>
+            <p:ph type="ftr" sz="quarter" idx="4"/>
+          </p:nvPr>
+        </p:nvSpPr>
+        <p:spPr>
+          <a:xfrm>
+            <a:off x="0" y="8685213"/>
+            <a:ext cx="2971800" cy="458787"/>
+          </a:xfrm>
+          <a:prstGeom prst="rect">
+            <a:avLst/>
+          </a:prstGeom>
+        </p:spPr>
+        <p:txBody>
+          <a:bodyPr vert="horz" lIns="91440" tIns="45720" rIns="91440" bIns="45720" rtlCol="0" anchor="b"/>
+          <a:lstStyle>
+            <a:lvl1pPr algn="l">
+              <a:defRPr sz="1200"/>
+            </a:lvl1pPr>
+          </a:lstStyle>
+          <a:p>
+            <a:endParaRPr lang="en-US"/>
+          </a:p>
+        </p:txBody>
+      </p:sp>
+      <p:sp>
+        <p:nvSpPr>
+          <p:cNvPr id="7" name="Slide Number Placeholder 6"/>
+          <p:cNvSpPr>
+            <a:spLocks noGrp="1"/>
+          </p:cNvSpPr>
+          <p:nvPr>
+            <p:ph type="sldNum" sz="quarter" idx="5"/>
+          </p:nvPr>
+        </p:nvSpPr>
+        <p:spPr>
+          <a:xfrm>
+            <a:off x="3884613" y="8685213"/>
+            <a:ext cx="2971800" cy="458787"/>
+          </a:xfrm>
+          <a:prstGeom prst="rect">
+            <a:avLst/>
+          </a:prstGeom>
+        </p:spPr>
+        <p:txBody>
+          <a:bodyPr vert="horz" lIns="91440" tIns="45720" rIns="91440" bIns="45720" rtlCol="0" anchor="b"/>
+          <a:lstStyle>
+            <a:lvl1pPr algn="r">
+              <a:defRPr sz="1200"/>
+            </a:lvl1pPr>
+          </a:lstStyle>
+          <a:p>
+            <a:fld id="{88860AA5-7C4E-5445-8505-2C34659F936B}" type="slidenum">
+              <a:rPr lang="en-US" smtClean="0"/>
+              <a:t>‹#›</a:t>
+            </a:fld>
+            <a:endParaRPr lang="en-US"/>
+          </a:p>
+        </p:txBody>
+      </p:sp>
+    </p:spTree>
+    <p:extLst>
+      <p:ext uri="{BB962C8B-B14F-4D97-AF65-F5344CB8AC3E}">
+        <p14:creationId xmlns:p14="http://schemas.microsoft.com/office/powerpoint/2010/main" val="1324503334"/>
+      </p:ext>
+    </p:extLst>
+  </p:cSld>
+  <p:clrMap bg1="lt1" tx1="dk1" bg2="lt2" tx2="dk2" accent1="accent1" accent2="accent2" accent3="accent3" accent4="accent4" accent5="accent5" accent6="accent6" hlink="hlink" folHlink="folHlink"/>
+  <p:notesStyle>
+    <a:lvl1pPr marL="0" algn="l" defTabSz="914400" rtl="0" eaLnBrk="1" latinLnBrk="0" hangingPunct="1">
+      <a:defRPr sz="1200" kern="1200">
+        <a:solidFill>
+          <a:schemeClr val="tx1"/>
+        </a:solidFill>
+        <a:latin typeface="+mn-lt"/>
+        <a:ea typeface="+mn-ea"/>
+        <a:cs typeface="+mn-cs"/>
+      </a:defRPr>
+    </a:lvl1pPr>
+    <a:lvl2pPr marL="457200" algn="l" defTabSz="914400" rtl="0" eaLnBrk="1" latinLnBrk="0" hangingPunct="1">
+      <a:defRPr sz="1200" kern="1200">
+        <a:solidFill>
+          <a:schemeClr val="tx1"/>
+        </a:solidFill>
+        <a:latin typeface="+mn-lt"/>
+        <a:ea typeface="+mn-ea"/>
+        <a:cs typeface="+mn-cs"/>
+      </a:defRPr>
+    </a:lvl2pPr>
+    <a:lvl3pPr marL="914400" algn="l" defTabSz="914400" rtl="0" eaLnBrk="1" latinLnBrk="0" hangingPunct="1">
+      <a:defRPr sz="1200" kern="1200">
+        <a:solidFill>
+          <a:schemeClr val="tx1"/>
+        </a:solidFill>
+        <a:latin typeface="+mn-lt"/>
+        <a:ea typeface="+mn-ea"/>
+        <a:cs typeface="+mn-cs"/>
+      </a:defRPr>
+    </a:lvl3pPr>
+    <a:lvl4pPr marL="1371600" algn="l" defTabSz="914400" rtl="0" eaLnBrk="1" latinLnBrk="0" hangingPunct="1">
+      <a:defRPr sz="1200" kern="1200">
+        <a:solidFill>
+          <a:schemeClr val="tx1"/>
+        </a:solidFill>
+        <a:latin typeface="+mn-lt"/>
+        <a:ea typeface="+mn-ea"/>
+        <a:cs typeface="+mn-cs"/>
+      </a:defRPr>
+    </a:lvl4pPr>
+    <a:lvl5pPr marL="1828800" algn="l" defTabSz="914400" rtl="0" eaLnBrk="1" latinLnBrk="0" hangingPunct="1">
+      <a:defRPr sz="1200" kern="1200">
+        <a:solidFill>
+          <a:schemeClr val="tx1"/>
+        </a:solidFill>
+        <a:latin typeface="+mn-lt"/>
+        <a:ea typeface="+mn-ea"/>
+        <a:cs typeface="+mn-cs"/>
+      </a:defRPr>
+    </a:lvl5pPr>
+    <a:lvl6pPr marL="2286000" algn="l" defTabSz="914400" rtl="0" eaLnBrk="1" latinLnBrk="0" hangingPunct="1">
+      <a:defRPr sz="1200" kern="1200">
+        <a:solidFill>
+          <a:schemeClr val="tx1"/>
+        </a:solidFill>
+        <a:latin typeface="+mn-lt"/>
+        <a:ea typeface="+mn-ea"/>
+        <a:cs typeface="+mn-cs"/>
+      </a:defRPr>
+    </a:lvl6pPr>
+    <a:lvl7pPr marL="2743200" algn="l" defTabSz="914400" rtl="0" eaLnBrk="1" latinLnBrk="0" hangingPunct="1">
+      <a:defRPr sz="1200" kern="1200">
+        <a:solidFill>
+          <a:schemeClr val="tx1"/>
+        </a:solidFill>
+        <a:latin typeface="+mn-lt"/>
+        <a:ea typeface="+mn-ea"/>
+        <a:cs typeface="+mn-cs"/>
+      </a:defRPr>
+    </a:lvl7pPr>
+    <a:lvl8pPr marL="3200400" algn="l" defTabSz="914400" rtl="0" eaLnBrk="1" latinLnBrk="0" hangingPunct="1">
+      <a:defRPr sz="1200" kern="1200">
+        <a:solidFill>
+          <a:schemeClr val="tx1"/>
+        </a:solidFill>
+        <a:latin typeface="+mn-lt"/>
+        <a:ea typeface="+mn-ea"/>
+        <a:cs typeface="+mn-cs"/>
+      </a:defRPr>
+    </a:lvl8pPr>
+    <a:lvl9pPr marL="3657600" algn="l" defTabSz="914400" rtl="0" eaLnBrk="1" latinLnBrk="0" hangingPunct="1">
+      <a:defRPr sz="1200" kern="1200">
+        <a:solidFill>
+          <a:schemeClr val="tx1"/>
+        </a:solidFill>
+        <a:latin typeface="+mn-lt"/>
+        <a:ea typeface="+mn-ea"/>
+        <a:cs typeface="+mn-cs"/>
+      </a:defRPr>
+    </a:lvl9pPr>
+  </p:notesStyle>
+</p:notesMaster>
+</file>
+
+<file path=ppt/notesSlides/notesSlide1.xml><?xml version="1.0" encoding="utf-8"?>
+<p:notes xmlns:a="http://schemas.openxmlformats.org/drawingml/2006/main" xmlns:r="http://schemas.openxmlformats.org/officeDocument/2006/relationships" xmlns:p="http://schemas.openxmlformats.org/presentationml/2006/main">
+  <p:cSld>
+    <p:spTree>
+      <p:nvGrpSpPr>
+        <p:cNvPr id="1" name=""/>
+        <p:cNvGrpSpPr/>
+        <p:nvPr/>
+      </p:nvGrpSpPr>
+      <p:grpSpPr>
+        <a:xfrm>
+          <a:off x="0" y="0"/>
+          <a:ext cx="0" cy="0"/>
+          <a:chOff x="0" y="0"/>
+          <a:chExt cx="0" cy="0"/>
+        </a:xfrm>
+      </p:grpSpPr>
+      <p:sp>
+        <p:nvSpPr>
+          <p:cNvPr id="2" name="Slide Image Placeholder 1"/>
+          <p:cNvSpPr>
+            <a:spLocks noGrp="1" noRot="1" noChangeAspect="1"/>
+          </p:cNvSpPr>
+          <p:nvPr>
+            <p:ph type="sldImg"/>
+          </p:nvPr>
+        </p:nvSpPr>
+        <p:spPr/>
+      </p:sp>
+      <p:sp>
+        <p:nvSpPr>
+          <p:cNvPr id="3" name="Notes Placeholder 2"/>
+          <p:cNvSpPr>
+            <a:spLocks noGrp="1"/>
+          </p:cNvSpPr>
+          <p:nvPr>
+            <p:ph type="body" idx="1"/>
+          </p:nvPr>
+        </p:nvSpPr>
+        <p:spPr/>
+        <p:txBody>
+          <a:bodyPr/>
+          <a:lstStyle/>
+          <a:p>
+            <a:endParaRPr lang="en-US" dirty="0"/>
+          </a:p>
+        </p:txBody>
+      </p:sp>
+      <p:sp>
+        <p:nvSpPr>
+          <p:cNvPr id="4" name="Slide Number Placeholder 3"/>
+          <p:cNvSpPr>
+            <a:spLocks noGrp="1"/>
+          </p:cNvSpPr>
+          <p:nvPr>
+            <p:ph type="sldNum" sz="quarter" idx="5"/>
+          </p:nvPr>
+        </p:nvSpPr>
+        <p:spPr/>
+        <p:txBody>
+          <a:bodyPr/>
+          <a:lstStyle/>
+          <a:p>
+            <a:fld id="{88860AA5-7C4E-5445-8505-2C34659F936B}" type="slidenum">
+              <a:rPr lang="en-US" smtClean="0"/>
+              <a:t>7</a:t>
+            </a:fld>
+            <a:endParaRPr lang="en-US"/>
+          </a:p>
+        </p:txBody>
+      </p:sp>
+    </p:spTree>
+    <p:extLst>
+      <p:ext uri="{BB962C8B-B14F-4D97-AF65-F5344CB8AC3E}">
+        <p14:creationId xmlns:p14="http://schemas.microsoft.com/office/powerpoint/2010/main" val="2630342225"/>
+      </p:ext>
+    </p:extLst>
+  </p:cSld>
+  <p:clrMapOvr>
+    <a:masterClrMapping/>
+  </p:clrMapOvr>
+</p:notes>
+</file>
+
+<file path=ppt/notesSlides/notesSlide2.xml><?xml version="1.0" encoding="utf-8"?>
+<p:notes xmlns:a="http://schemas.openxmlformats.org/drawingml/2006/main" xmlns:r="http://schemas.openxmlformats.org/officeDocument/2006/relationships" xmlns:p="http://schemas.openxmlformats.org/presentationml/2006/main">
+  <p:cSld>
+    <p:spTree>
+      <p:nvGrpSpPr>
+        <p:cNvPr id="1" name="">
+          <a:extLst>
+            <a:ext uri="{FF2B5EF4-FFF2-40B4-BE49-F238E27FC236}">
+              <a16:creationId xmlns:a16="http://schemas.microsoft.com/office/drawing/2014/main" id="{AC64D081-40B3-CFF5-D416-CA3B752FA6BD}"/>
+            </a:ext>
+          </a:extLst>
+        </p:cNvPr>
+        <p:cNvGrpSpPr/>
+        <p:nvPr/>
+      </p:nvGrpSpPr>
+      <p:grpSpPr>
+        <a:xfrm>
+          <a:off x="0" y="0"/>
+          <a:ext cx="0" cy="0"/>
+          <a:chOff x="0" y="0"/>
+          <a:chExt cx="0" cy="0"/>
+        </a:xfrm>
+      </p:grpSpPr>
+      <p:sp>
+        <p:nvSpPr>
+          <p:cNvPr id="2" name="Slide Image Placeholder 1">
+            <a:extLst>
+              <a:ext uri="{FF2B5EF4-FFF2-40B4-BE49-F238E27FC236}">
+                <a16:creationId xmlns:a16="http://schemas.microsoft.com/office/drawing/2014/main" id="{70B1B58C-064D-256F-6B45-251501E2391D}"/>
+              </a:ext>
+            </a:extLst>
+          </p:cNvPr>
+          <p:cNvSpPr>
+            <a:spLocks noGrp="1" noRot="1" noChangeAspect="1"/>
+          </p:cNvSpPr>
+          <p:nvPr>
+            <p:ph type="sldImg"/>
+          </p:nvPr>
+        </p:nvSpPr>
+        <p:spPr/>
+      </p:sp>
+      <p:sp>
+        <p:nvSpPr>
+          <p:cNvPr id="3" name="Notes Placeholder 2">
+            <a:extLst>
+              <a:ext uri="{FF2B5EF4-FFF2-40B4-BE49-F238E27FC236}">
+                <a16:creationId xmlns:a16="http://schemas.microsoft.com/office/drawing/2014/main" id="{90159682-705C-3092-C707-59EDC349554E}"/>
+              </a:ext>
+            </a:extLst>
+          </p:cNvPr>
+          <p:cNvSpPr>
+            <a:spLocks noGrp="1"/>
+          </p:cNvSpPr>
+          <p:nvPr>
+            <p:ph type="body" idx="1"/>
+          </p:nvPr>
+        </p:nvSpPr>
+        <p:spPr/>
+        <p:txBody>
+          <a:bodyPr/>
+          <a:lstStyle/>
+          <a:p>
+            <a:endParaRPr lang="en-US" dirty="0"/>
+          </a:p>
+        </p:txBody>
+      </p:sp>
+      <p:sp>
+        <p:nvSpPr>
+          <p:cNvPr id="4" name="Slide Number Placeholder 3">
+            <a:extLst>
+              <a:ext uri="{FF2B5EF4-FFF2-40B4-BE49-F238E27FC236}">
+                <a16:creationId xmlns:a16="http://schemas.microsoft.com/office/drawing/2014/main" id="{5AE8FDDF-6E9D-A7B6-1D78-2E0281AF18B1}"/>
+              </a:ext>
+            </a:extLst>
+          </p:cNvPr>
+          <p:cNvSpPr>
+            <a:spLocks noGrp="1"/>
+          </p:cNvSpPr>
+          <p:nvPr>
+            <p:ph type="sldNum" sz="quarter" idx="5"/>
+          </p:nvPr>
+        </p:nvSpPr>
+        <p:spPr/>
+        <p:txBody>
+          <a:bodyPr/>
+          <a:lstStyle/>
+          <a:p>
+            <a:fld id="{88860AA5-7C4E-5445-8505-2C34659F936B}" type="slidenum">
+              <a:rPr lang="en-US" smtClean="0"/>
+              <a:t>8</a:t>
+            </a:fld>
+            <a:endParaRPr lang="en-US"/>
+          </a:p>
+        </p:txBody>
+      </p:sp>
+    </p:spTree>
+    <p:extLst>
+      <p:ext uri="{BB962C8B-B14F-4D97-AF65-F5344CB8AC3E}">
+        <p14:creationId xmlns:p14="http://schemas.microsoft.com/office/powerpoint/2010/main" val="4263678726"/>
+      </p:ext>
+    </p:extLst>
+  </p:cSld>
+  <p:clrMapOvr>
+    <a:masterClrMapping/>
+  </p:clrMapOvr>
+</p:notes>
 </file>
 
 <file path=ppt/slideLayouts/slideLayout1.xml><?xml version="1.0" encoding="utf-8"?>
@@ -3931,7 +4478,7 @@
         </p:nvSpPr>
         <p:spPr>
           <a:xfrm>
-            <a:off x="1320784" y="4979608"/>
+            <a:off x="768037" y="5063418"/>
             <a:ext cx="10005951" cy="1035354"/>
           </a:xfrm>
         </p:spPr>
@@ -3946,7 +4493,7 @@
               <a:rPr lang="en-US" dirty="0">
                 <a:latin typeface="Avenir Next" panose="020B0503020202020204" pitchFamily="34" charset="0"/>
               </a:rPr>
-              <a:t>Claire Wang, Environmental Engineering Undergraduate ’27</a:t>
+              <a:t>Claire Wang</a:t>
             </a:r>
           </a:p>
           <a:p>
@@ -3955,7 +4502,7 @@
               <a:rPr lang="en-US" dirty="0">
                 <a:latin typeface="Avenir Next" panose="020B0503020202020204" pitchFamily="34" charset="0"/>
               </a:rPr>
-              <a:t>DeFrees Hydraulics Laboratory, Cornell University</a:t>
+              <a:t>Environmental Engineering Undergraduate ’27</a:t>
             </a:r>
           </a:p>
         </p:txBody>
@@ -4077,26 +4624,8 @@
                                   </p:childTnLst>
                                 </p:cTn>
                               </p:par>
-                            </p:childTnLst>
-                          </p:cTn>
-                        </p:par>
-                      </p:childTnLst>
-                    </p:cTn>
-                  </p:par>
-                  <p:par>
-                    <p:cTn id="11" fill="hold">
-                      <p:stCondLst>
-                        <p:cond delay="indefinite"/>
-                      </p:stCondLst>
-                      <p:childTnLst>
-                        <p:par>
-                          <p:cTn id="12" fill="hold">
-                            <p:stCondLst>
-                              <p:cond delay="0"/>
-                            </p:stCondLst>
-                            <p:childTnLst>
                               <p:par>
-                                <p:cTn id="13" presetID="10" presetClass="entr" presetSubtype="0" fill="hold" grpId="0" nodeType="clickEffect">
+                                <p:cTn id="11" presetID="10" presetClass="entr" presetSubtype="0" fill="hold" grpId="0" nodeType="withEffect">
                                   <p:stCondLst>
                                     <p:cond delay="1000"/>
                                   </p:stCondLst>
@@ -4106,7 +4635,7 @@
                                   <p:childTnLst>
                                     <p:set>
                                       <p:cBhvr>
-                                        <p:cTn id="14" dur="1" fill="hold">
+                                        <p:cTn id="12" dur="1" fill="hold">
                                           <p:stCondLst>
                                             <p:cond delay="0"/>
                                           </p:stCondLst>
@@ -4128,7 +4657,7 @@
                                     </p:set>
                                     <p:animEffect transition="in" filter="fade">
                                       <p:cBhvr>
-                                        <p:cTn id="15" dur="1000"/>
+                                        <p:cTn id="13" dur="1000"/>
                                         <p:tgtEl>
                                           <p:spTgt spid="5">
                                             <p:txEl>
@@ -4176,7 +4705,7 @@
 </p:sld>
 </file>
 
-<file path=ppt/slides/slide2.xml><?xml version="1.0" encoding="utf-8"?>
+<file path=ppt/slides/slide10.xml><?xml version="1.0" encoding="utf-8"?>
 <p:sld xmlns:a="http://schemas.openxmlformats.org/drawingml/2006/main" xmlns:r="http://schemas.openxmlformats.org/officeDocument/2006/relationships" xmlns:p="http://schemas.openxmlformats.org/presentationml/2006/main">
   <p:cSld>
     <p:bg>
@@ -4192,7 +4721,7 @@
         <p:cNvPr id="1" name="">
           <a:extLst>
             <a:ext uri="{FF2B5EF4-FFF2-40B4-BE49-F238E27FC236}">
-              <a16:creationId xmlns:a16="http://schemas.microsoft.com/office/drawing/2014/main" id="{3A60E458-A3DF-7A87-0632-22CC27E297AC}"/>
+              <a16:creationId xmlns:a16="http://schemas.microsoft.com/office/drawing/2014/main" id="{F17CB075-3778-BC6D-FC2F-2F1D9B3413D1}"/>
             </a:ext>
           </a:extLst>
         </p:cNvPr>
@@ -4212,7 +4741,7 @@
           <p:cNvPr id="8" name="Rectangle 7">
             <a:extLst>
               <a:ext uri="{FF2B5EF4-FFF2-40B4-BE49-F238E27FC236}">
-                <a16:creationId xmlns:a16="http://schemas.microsoft.com/office/drawing/2014/main" id="{1B15ED52-F352-441B-82BF-E0EA34836D08}"/>
+                <a16:creationId xmlns:a16="http://schemas.microsoft.com/office/drawing/2014/main" id="{75FF503D-5BEF-DBE0-B444-1ACF35649D69}"/>
               </a:ext>
               <a:ext uri="{C183D7F6-B498-43B3-948B-1728B52AA6E4}">
                 <adec:decorative xmlns:adec="http://schemas.microsoft.com/office/drawing/2017/decorative" val="1"/>
@@ -4288,7 +4817,7 @@
           <p:cNvPr id="10" name="Rectangle 9">
             <a:extLst>
               <a:ext uri="{FF2B5EF4-FFF2-40B4-BE49-F238E27FC236}">
-                <a16:creationId xmlns:a16="http://schemas.microsoft.com/office/drawing/2014/main" id="{3B2E3793-BFE6-45A2-9B7B-E18844431C99}"/>
+                <a16:creationId xmlns:a16="http://schemas.microsoft.com/office/drawing/2014/main" id="{61AA09E3-B86F-CCD7-C381-BD2A5DB7127B}"/>
               </a:ext>
               <a:ext uri="{C183D7F6-B498-43B3-948B-1728B52AA6E4}">
                 <adec:decorative xmlns:adec="http://schemas.microsoft.com/office/drawing/2017/decorative" val="1"/>
@@ -4361,7 +4890,7 @@
           <p:cNvPr id="12" name="Rectangle 11">
             <a:extLst>
               <a:ext uri="{FF2B5EF4-FFF2-40B4-BE49-F238E27FC236}">
-                <a16:creationId xmlns:a16="http://schemas.microsoft.com/office/drawing/2014/main" id="{BC4C4868-CB8F-4AF9-9CDB-8108F2C19B67}"/>
+                <a16:creationId xmlns:a16="http://schemas.microsoft.com/office/drawing/2014/main" id="{DD0429B8-2F96-F2B9-36FD-E81315654344}"/>
               </a:ext>
               <a:ext uri="{C183D7F6-B498-43B3-948B-1728B52AA6E4}">
                 <adec:decorative xmlns:adec="http://schemas.microsoft.com/office/drawing/2017/decorative" val="1"/>
@@ -4437,7 +4966,7 @@
           <p:cNvPr id="14" name="Rectangle 13">
             <a:extLst>
               <a:ext uri="{FF2B5EF4-FFF2-40B4-BE49-F238E27FC236}">
-                <a16:creationId xmlns:a16="http://schemas.microsoft.com/office/drawing/2014/main" id="{375E0459-6403-40CD-989D-56A4407CA12E}"/>
+                <a16:creationId xmlns:a16="http://schemas.microsoft.com/office/drawing/2014/main" id="{F5622F5B-9999-E91E-C156-4E689ED50724}"/>
               </a:ext>
               <a:ext uri="{C183D7F6-B498-43B3-948B-1728B52AA6E4}">
                 <adec:decorative xmlns:adec="http://schemas.microsoft.com/office/drawing/2017/decorative" val="1"/>
@@ -4512,7 +5041,7 @@
           <p:cNvPr id="16" name="Rectangle 15">
             <a:extLst>
               <a:ext uri="{FF2B5EF4-FFF2-40B4-BE49-F238E27FC236}">
-                <a16:creationId xmlns:a16="http://schemas.microsoft.com/office/drawing/2014/main" id="{53E5B1A8-3AC9-4BD1-9BBC-78CA94F2D1BA}"/>
+                <a16:creationId xmlns:a16="http://schemas.microsoft.com/office/drawing/2014/main" id="{FDE4C7EB-84E3-ACBA-A730-74ACD439EDF6}"/>
               </a:ext>
               <a:ext uri="{C183D7F6-B498-43B3-948B-1728B52AA6E4}">
                 <adec:decorative xmlns:adec="http://schemas.microsoft.com/office/drawing/2017/decorative" val="1"/>
@@ -4588,7 +5117,7 @@
           <p:cNvPr id="2" name="Title 1">
             <a:extLst>
               <a:ext uri="{FF2B5EF4-FFF2-40B4-BE49-F238E27FC236}">
-                <a16:creationId xmlns:a16="http://schemas.microsoft.com/office/drawing/2014/main" id="{0F575255-F191-EDA0-4C44-9E6FC5BD5623}"/>
+                <a16:creationId xmlns:a16="http://schemas.microsoft.com/office/drawing/2014/main" id="{A7776394-8AB3-18D9-104B-8C03047EB336}"/>
               </a:ext>
             </a:extLst>
           </p:cNvPr>
@@ -4601,7 +5130,642 @@
         </p:nvSpPr>
         <p:spPr>
           <a:xfrm>
-            <a:off x="1371599" y="348968"/>
+            <a:off x="459346" y="278535"/>
+            <a:ext cx="9895951" cy="1033669"/>
+          </a:xfrm>
+        </p:spPr>
+        <p:txBody>
+          <a:bodyPr>
+            <a:noAutofit/>
+          </a:bodyPr>
+          <a:lstStyle/>
+          <a:p>
+            <a:r>
+              <a:rPr lang="en-US" sz="4500" dirty="0">
+                <a:solidFill>
+                  <a:srgbClr val="FFFFFF"/>
+                </a:solidFill>
+              </a:rPr>
+              <a:t>In progress: matching gage hydrograph</a:t>
+            </a:r>
+          </a:p>
+        </p:txBody>
+      </p:sp>
+      <p:pic>
+        <p:nvPicPr>
+          <p:cNvPr id="3" name="Picture 2">
+            <a:extLst>
+              <a:ext uri="{FF2B5EF4-FFF2-40B4-BE49-F238E27FC236}">
+                <a16:creationId xmlns:a16="http://schemas.microsoft.com/office/drawing/2014/main" id="{69A48BEF-FAC5-C1B0-F3AF-8815E6B260B1}"/>
+              </a:ext>
+            </a:extLst>
+          </p:cNvPr>
+          <p:cNvPicPr>
+            <a:picLocks noChangeAspect="1"/>
+          </p:cNvPicPr>
+          <p:nvPr/>
+        </p:nvPicPr>
+        <p:blipFill>
+          <a:blip r:embed="rId2"/>
+          <a:stretch>
+            <a:fillRect/>
+          </a:stretch>
+        </p:blipFill>
+        <p:spPr>
+          <a:xfrm>
+            <a:off x="119268" y="1676944"/>
+            <a:ext cx="3627783" cy="5129447"/>
+          </a:xfrm>
+          <a:prstGeom prst="rect">
+            <a:avLst/>
+          </a:prstGeom>
+        </p:spPr>
+      </p:pic>
+      <p:sp>
+        <p:nvSpPr>
+          <p:cNvPr id="5" name="TextBox 4">
+            <a:extLst>
+              <a:ext uri="{FF2B5EF4-FFF2-40B4-BE49-F238E27FC236}">
+                <a16:creationId xmlns:a16="http://schemas.microsoft.com/office/drawing/2014/main" id="{EC8FE6C5-4C8C-0D65-42D0-2AD39710831C}"/>
+              </a:ext>
+            </a:extLst>
+          </p:cNvPr>
+          <p:cNvSpPr txBox="1"/>
+          <p:nvPr/>
+        </p:nvSpPr>
+        <p:spPr>
+          <a:xfrm>
+            <a:off x="3866319" y="1736699"/>
+            <a:ext cx="6096000" cy="861774"/>
+          </a:xfrm>
+          <a:prstGeom prst="rect">
+            <a:avLst/>
+          </a:prstGeom>
+          <a:noFill/>
+        </p:spPr>
+        <p:txBody>
+          <a:bodyPr wrap="square">
+            <a:spAutoFit/>
+          </a:bodyPr>
+          <a:lstStyle/>
+          <a:p>
+            <a:r>
+              <a:rPr lang="en-US" sz="2500" dirty="0">
+                <a:latin typeface="Avenir Next" panose="020B0503020202020204" pitchFamily="34" charset="0"/>
+              </a:rPr>
+              <a:t>Res</a:t>
+            </a:r>
+            <a:r>
+              <a:rPr lang="en-US" sz="2500" b="0" i="0" dirty="0">
+                <a:effectLst/>
+                <a:latin typeface="Avenir Next" panose="020B0503020202020204" pitchFamily="34" charset="0"/>
+              </a:rPr>
+              <a:t>caled discharge: 4.17 m</a:t>
+            </a:r>
+            <a:r>
+              <a:rPr lang="en-US" sz="2500" b="0" i="0" baseline="30000" dirty="0">
+                <a:effectLst/>
+                <a:latin typeface="Avenir Next" panose="020B0503020202020204" pitchFamily="34" charset="0"/>
+              </a:rPr>
+              <a:t>3</a:t>
+            </a:r>
+            <a:r>
+              <a:rPr lang="en-US" sz="2500" b="0" i="0" dirty="0">
+                <a:effectLst/>
+                <a:latin typeface="Avenir Next" panose="020B0503020202020204" pitchFamily="34" charset="0"/>
+              </a:rPr>
+              <a:t>/s</a:t>
+            </a:r>
+          </a:p>
+          <a:p>
+            <a:r>
+              <a:rPr lang="en-US" sz="2500" dirty="0">
+                <a:latin typeface="Avenir Next" panose="020B0503020202020204" pitchFamily="34" charset="0"/>
+              </a:rPr>
+              <a:t>Res</a:t>
+            </a:r>
+            <a:r>
+              <a:rPr lang="en-US" sz="2500" b="0" i="0" dirty="0">
+                <a:effectLst/>
+                <a:latin typeface="Avenir Next" panose="020B0503020202020204" pitchFamily="34" charset="0"/>
+              </a:rPr>
+              <a:t>caled head difference: 0.56 m</a:t>
+            </a:r>
+            <a:endParaRPr lang="en-US" sz="2500" dirty="0">
+              <a:latin typeface="Avenir Next" panose="020B0503020202020204" pitchFamily="34" charset="0"/>
+            </a:endParaRPr>
+          </a:p>
+        </p:txBody>
+      </p:sp>
+      <p:pic>
+        <p:nvPicPr>
+          <p:cNvPr id="6" name="Picture 5">
+            <a:extLst>
+              <a:ext uri="{FF2B5EF4-FFF2-40B4-BE49-F238E27FC236}">
+                <a16:creationId xmlns:a16="http://schemas.microsoft.com/office/drawing/2014/main" id="{7E0071E4-77F9-E7D7-7CED-A038135397EF}"/>
+              </a:ext>
+            </a:extLst>
+          </p:cNvPr>
+          <p:cNvPicPr>
+            <a:picLocks noChangeAspect="1"/>
+          </p:cNvPicPr>
+          <p:nvPr/>
+        </p:nvPicPr>
+        <p:blipFill>
+          <a:blip r:embed="rId3"/>
+          <a:srcRect t="2252" b="12295"/>
+          <a:stretch>
+            <a:fillRect/>
+          </a:stretch>
+        </p:blipFill>
+        <p:spPr>
+          <a:xfrm>
+            <a:off x="6449252" y="2737741"/>
+            <a:ext cx="5742744" cy="4124544"/>
+          </a:xfrm>
+          <a:prstGeom prst="rect">
+            <a:avLst/>
+          </a:prstGeom>
+        </p:spPr>
+      </p:pic>
+      <p:sp>
+        <p:nvSpPr>
+          <p:cNvPr id="7" name="TextBox 6">
+            <a:extLst>
+              <a:ext uri="{FF2B5EF4-FFF2-40B4-BE49-F238E27FC236}">
+                <a16:creationId xmlns:a16="http://schemas.microsoft.com/office/drawing/2014/main" id="{58A04418-D3F8-C626-D05C-434307A303A9}"/>
+              </a:ext>
+            </a:extLst>
+          </p:cNvPr>
+          <p:cNvSpPr txBox="1"/>
+          <p:nvPr/>
+        </p:nvSpPr>
+        <p:spPr>
+          <a:xfrm>
+            <a:off x="4303570" y="3271194"/>
+            <a:ext cx="2443970" cy="1200329"/>
+          </a:xfrm>
+          <a:prstGeom prst="rect">
+            <a:avLst/>
+          </a:prstGeom>
+          <a:noFill/>
+        </p:spPr>
+        <p:txBody>
+          <a:bodyPr wrap="square" rtlCol="0">
+            <a:spAutoFit/>
+          </a:bodyPr>
+          <a:lstStyle/>
+          <a:p>
+            <a:r>
+              <a:rPr lang="en-US" dirty="0">
+                <a:solidFill>
+                  <a:srgbClr val="FF0000"/>
+                </a:solidFill>
+              </a:rPr>
+              <a:t>How does this compare with the field measurements and model predictions?</a:t>
+            </a:r>
+          </a:p>
+        </p:txBody>
+      </p:sp>
+    </p:spTree>
+    <p:extLst>
+      <p:ext uri="{BB962C8B-B14F-4D97-AF65-F5344CB8AC3E}">
+        <p14:creationId xmlns:p14="http://schemas.microsoft.com/office/powerpoint/2010/main" val="1931674502"/>
+      </p:ext>
+    </p:extLst>
+  </p:cSld>
+  <p:clrMapOvr>
+    <a:masterClrMapping/>
+  </p:clrMapOvr>
+</p:sld>
+</file>
+
+<file path=ppt/slides/slide2.xml><?xml version="1.0" encoding="utf-8"?>
+<p:sld xmlns:a="http://schemas.openxmlformats.org/drawingml/2006/main" xmlns:r="http://schemas.openxmlformats.org/officeDocument/2006/relationships" xmlns:p="http://schemas.openxmlformats.org/presentationml/2006/main">
+  <p:cSld>
+    <p:bg>
+      <p:bgPr>
+        <a:solidFill>
+          <a:schemeClr val="bg1"/>
+        </a:solidFill>
+        <a:effectLst/>
+      </p:bgPr>
+    </p:bg>
+    <p:spTree>
+      <p:nvGrpSpPr>
+        <p:cNvPr id="1" name="">
+          <a:extLst>
+            <a:ext uri="{FF2B5EF4-FFF2-40B4-BE49-F238E27FC236}">
+              <a16:creationId xmlns:a16="http://schemas.microsoft.com/office/drawing/2014/main" id="{3A60E458-A3DF-7A87-0632-22CC27E297AC}"/>
+            </a:ext>
+          </a:extLst>
+        </p:cNvPr>
+        <p:cNvGrpSpPr/>
+        <p:nvPr/>
+      </p:nvGrpSpPr>
+      <p:grpSpPr>
+        <a:xfrm>
+          <a:off x="0" y="0"/>
+          <a:ext cx="0" cy="0"/>
+          <a:chOff x="0" y="0"/>
+          <a:chExt cx="0" cy="0"/>
+        </a:xfrm>
+      </p:grpSpPr>
+      <p:sp useBgFill="1">
+        <p:nvSpPr>
+          <p:cNvPr id="8" name="Rectangle 7">
+            <a:extLst>
+              <a:ext uri="{FF2B5EF4-FFF2-40B4-BE49-F238E27FC236}">
+                <a16:creationId xmlns:a16="http://schemas.microsoft.com/office/drawing/2014/main" id="{1B15ED52-F352-441B-82BF-E0EA34836D08}"/>
+              </a:ext>
+              <a:ext uri="{C183D7F6-B498-43B3-948B-1728B52AA6E4}">
+                <adec:decorative xmlns:adec="http://schemas.microsoft.com/office/drawing/2017/decorative" val="1"/>
+              </a:ext>
+            </a:extLst>
+          </p:cNvPr>
+          <p:cNvSpPr>
+            <a:spLocks noGrp="1" noRot="1" noChangeAspect="1" noMove="1" noResize="1" noEditPoints="1" noAdjustHandles="1" noChangeArrowheads="1" noChangeShapeType="1" noTextEdit="1"/>
+          </p:cNvSpPr>
+          <p:nvPr>
+            <p:extLst>
+              <p:ext uri="{386F3935-93C4-4BCD-93E2-E3B085C9AB24}">
+                <p16:designElem xmlns:p16="http://schemas.microsoft.com/office/powerpoint/2015/main" val="1"/>
+              </p:ext>
+            </p:extLst>
+          </p:nvPr>
+        </p:nvSpPr>
+        <p:spPr>
+          <a:xfrm>
+            <a:off x="0" y="0"/>
+            <a:ext cx="12192000" cy="6858000"/>
+          </a:xfrm>
+          <a:prstGeom prst="rect">
+            <a:avLst/>
+          </a:prstGeom>
+          <a:ln w="12700" cap="flat" cmpd="sng" algn="ctr">
+            <a:noFill/>
+            <a:prstDash val="solid"/>
+            <a:miter lim="800000"/>
+          </a:ln>
+          <a:effectLst/>
+          <a:extLst>
+            <a:ext uri="{91240B29-F687-4F45-9708-019B960494DF}">
+              <a14:hiddenLine xmlns:a14="http://schemas.microsoft.com/office/drawing/2010/main" w="12700" cap="flat" cmpd="sng" algn="ctr">
+                <a:solidFill>
+                  <a:schemeClr val="accent1">
+                    <a:shade val="50000"/>
+                  </a:schemeClr>
+                </a:solidFill>
+                <a:prstDash val="solid"/>
+                <a:miter lim="800000"/>
+              </a14:hiddenLine>
+            </a:ext>
+          </a:extLst>
+        </p:spPr>
+        <p:style>
+          <a:lnRef idx="2">
+            <a:schemeClr val="accent1">
+              <a:shade val="50000"/>
+            </a:schemeClr>
+          </a:lnRef>
+          <a:fillRef idx="1">
+            <a:schemeClr val="accent1"/>
+          </a:fillRef>
+          <a:effectRef idx="0">
+            <a:schemeClr val="accent1"/>
+          </a:effectRef>
+          <a:fontRef idx="minor">
+            <a:schemeClr val="lt1"/>
+          </a:fontRef>
+        </p:style>
+        <p:txBody>
+          <a:bodyPr rtlCol="0" anchor="ctr"/>
+          <a:lstStyle/>
+          <a:p>
+            <a:pPr algn="ctr"/>
+            <a:endParaRPr lang="en-US"/>
+          </a:p>
+        </p:txBody>
+      </p:sp>
+      <p:sp>
+        <p:nvSpPr>
+          <p:cNvPr id="10" name="Rectangle 9">
+            <a:extLst>
+              <a:ext uri="{FF2B5EF4-FFF2-40B4-BE49-F238E27FC236}">
+                <a16:creationId xmlns:a16="http://schemas.microsoft.com/office/drawing/2014/main" id="{3B2E3793-BFE6-45A2-9B7B-E18844431C99}"/>
+              </a:ext>
+              <a:ext uri="{C183D7F6-B498-43B3-948B-1728B52AA6E4}">
+                <adec:decorative xmlns:adec="http://schemas.microsoft.com/office/drawing/2017/decorative" val="1"/>
+              </a:ext>
+            </a:extLst>
+          </p:cNvPr>
+          <p:cNvSpPr>
+            <a:spLocks noGrp="1" noRot="1" noChangeAspect="1" noMove="1" noResize="1" noEditPoints="1" noAdjustHandles="1" noChangeArrowheads="1" noChangeShapeType="1" noTextEdit="1"/>
+          </p:cNvSpPr>
+          <p:nvPr>
+            <p:extLst>
+              <p:ext uri="{386F3935-93C4-4BCD-93E2-E3B085C9AB24}">
+                <p16:designElem xmlns:p16="http://schemas.microsoft.com/office/powerpoint/2015/main" val="1"/>
+              </p:ext>
+            </p:extLst>
+          </p:nvPr>
+        </p:nvSpPr>
+        <p:spPr>
+          <a:xfrm flipH="1">
+            <a:off x="-1" y="-1"/>
+            <a:ext cx="12191998" cy="1590742"/>
+          </a:xfrm>
+          <a:prstGeom prst="rect">
+            <a:avLst/>
+          </a:prstGeom>
+          <a:gradFill>
+            <a:gsLst>
+              <a:gs pos="0">
+                <a:srgbClr val="000000"/>
+              </a:gs>
+              <a:gs pos="100000">
+                <a:schemeClr val="accent1">
+                  <a:lumMod val="75000"/>
+                </a:schemeClr>
+              </a:gs>
+            </a:gsLst>
+            <a:lin ang="8400000" scaled="0"/>
+          </a:gradFill>
+          <a:ln>
+            <a:noFill/>
+          </a:ln>
+        </p:spPr>
+        <p:style>
+          <a:lnRef idx="2">
+            <a:schemeClr val="accent1">
+              <a:shade val="50000"/>
+            </a:schemeClr>
+          </a:lnRef>
+          <a:fillRef idx="1">
+            <a:schemeClr val="accent1"/>
+          </a:fillRef>
+          <a:effectRef idx="0">
+            <a:schemeClr val="accent1"/>
+          </a:effectRef>
+          <a:fontRef idx="minor">
+            <a:schemeClr val="lt1"/>
+          </a:fontRef>
+        </p:style>
+        <p:txBody>
+          <a:bodyPr rtlCol="0" anchor="ctr"/>
+          <a:lstStyle/>
+          <a:p>
+            <a:pPr algn="ctr"/>
+            <a:endParaRPr lang="en-US"/>
+          </a:p>
+        </p:txBody>
+      </p:sp>
+      <p:sp>
+        <p:nvSpPr>
+          <p:cNvPr id="12" name="Rectangle 11">
+            <a:extLst>
+              <a:ext uri="{FF2B5EF4-FFF2-40B4-BE49-F238E27FC236}">
+                <a16:creationId xmlns:a16="http://schemas.microsoft.com/office/drawing/2014/main" id="{BC4C4868-CB8F-4AF9-9CDB-8108F2C19B67}"/>
+              </a:ext>
+              <a:ext uri="{C183D7F6-B498-43B3-948B-1728B52AA6E4}">
+                <adec:decorative xmlns:adec="http://schemas.microsoft.com/office/drawing/2017/decorative" val="1"/>
+              </a:ext>
+            </a:extLst>
+          </p:cNvPr>
+          <p:cNvSpPr>
+            <a:spLocks noGrp="1" noRot="1" noChangeAspect="1" noMove="1" noResize="1" noEditPoints="1" noAdjustHandles="1" noChangeArrowheads="1" noChangeShapeType="1" noTextEdit="1"/>
+          </p:cNvSpPr>
+          <p:nvPr>
+            <p:extLst>
+              <p:ext uri="{386F3935-93C4-4BCD-93E2-E3B085C9AB24}">
+                <p16:designElem xmlns:p16="http://schemas.microsoft.com/office/powerpoint/2015/main" val="1"/>
+              </p:ext>
+            </p:extLst>
+          </p:nvPr>
+        </p:nvSpPr>
+        <p:spPr>
+          <a:xfrm rot="10800000" flipH="1">
+            <a:off x="-3" y="0"/>
+            <a:ext cx="8115306" cy="1590742"/>
+          </a:xfrm>
+          <a:prstGeom prst="rect">
+            <a:avLst/>
+          </a:prstGeom>
+          <a:gradFill>
+            <a:gsLst>
+              <a:gs pos="20000">
+                <a:schemeClr val="accent1">
+                  <a:alpha val="0"/>
+                </a:schemeClr>
+              </a:gs>
+              <a:gs pos="100000">
+                <a:schemeClr val="accent1">
+                  <a:lumMod val="50000"/>
+                  <a:alpha val="55000"/>
+                </a:schemeClr>
+              </a:gs>
+            </a:gsLst>
+            <a:lin ang="13800000" scaled="0"/>
+          </a:gradFill>
+          <a:ln>
+            <a:noFill/>
+          </a:ln>
+        </p:spPr>
+        <p:style>
+          <a:lnRef idx="2">
+            <a:schemeClr val="accent1">
+              <a:shade val="50000"/>
+            </a:schemeClr>
+          </a:lnRef>
+          <a:fillRef idx="1">
+            <a:schemeClr val="accent1"/>
+          </a:fillRef>
+          <a:effectRef idx="0">
+            <a:schemeClr val="accent1"/>
+          </a:effectRef>
+          <a:fontRef idx="minor">
+            <a:schemeClr val="lt1"/>
+          </a:fontRef>
+        </p:style>
+        <p:txBody>
+          <a:bodyPr rtlCol="0" anchor="ctr"/>
+          <a:lstStyle/>
+          <a:p>
+            <a:pPr algn="ctr"/>
+            <a:endParaRPr lang="en-US"/>
+          </a:p>
+        </p:txBody>
+      </p:sp>
+      <p:sp>
+        <p:nvSpPr>
+          <p:cNvPr id="14" name="Rectangle 13">
+            <a:extLst>
+              <a:ext uri="{FF2B5EF4-FFF2-40B4-BE49-F238E27FC236}">
+                <a16:creationId xmlns:a16="http://schemas.microsoft.com/office/drawing/2014/main" id="{375E0459-6403-40CD-989D-56A4407CA12E}"/>
+              </a:ext>
+              <a:ext uri="{C183D7F6-B498-43B3-948B-1728B52AA6E4}">
+                <adec:decorative xmlns:adec="http://schemas.microsoft.com/office/drawing/2017/decorative" val="1"/>
+              </a:ext>
+            </a:extLst>
+          </p:cNvPr>
+          <p:cNvSpPr>
+            <a:spLocks noGrp="1" noRot="1" noChangeAspect="1" noMove="1" noResize="1" noEditPoints="1" noAdjustHandles="1" noChangeArrowheads="1" noChangeShapeType="1" noTextEdit="1"/>
+          </p:cNvSpPr>
+          <p:nvPr>
+            <p:extLst>
+              <p:ext uri="{386F3935-93C4-4BCD-93E2-E3B085C9AB24}">
+                <p16:designElem xmlns:p16="http://schemas.microsoft.com/office/powerpoint/2015/main" val="1"/>
+              </p:ext>
+            </p:extLst>
+          </p:nvPr>
+        </p:nvSpPr>
+        <p:spPr>
+          <a:xfrm flipH="1">
+            <a:off x="8115299" y="-1"/>
+            <a:ext cx="4076698" cy="1590742"/>
+          </a:xfrm>
+          <a:prstGeom prst="rect">
+            <a:avLst/>
+          </a:prstGeom>
+          <a:gradFill>
+            <a:gsLst>
+              <a:gs pos="0">
+                <a:schemeClr val="accent1">
+                  <a:alpha val="66000"/>
+                </a:schemeClr>
+              </a:gs>
+              <a:gs pos="100000">
+                <a:srgbClr val="000000">
+                  <a:alpha val="30000"/>
+                </a:srgbClr>
+              </a:gs>
+            </a:gsLst>
+            <a:lin ang="13200000" scaled="0"/>
+          </a:gradFill>
+          <a:ln>
+            <a:noFill/>
+          </a:ln>
+        </p:spPr>
+        <p:style>
+          <a:lnRef idx="2">
+            <a:schemeClr val="accent1">
+              <a:shade val="50000"/>
+            </a:schemeClr>
+          </a:lnRef>
+          <a:fillRef idx="1">
+            <a:schemeClr val="accent1"/>
+          </a:fillRef>
+          <a:effectRef idx="0">
+            <a:schemeClr val="accent1"/>
+          </a:effectRef>
+          <a:fontRef idx="minor">
+            <a:schemeClr val="lt1"/>
+          </a:fontRef>
+        </p:style>
+        <p:txBody>
+          <a:bodyPr rtlCol="0" anchor="ctr"/>
+          <a:lstStyle/>
+          <a:p>
+            <a:pPr algn="ctr"/>
+            <a:endParaRPr lang="en-US"/>
+          </a:p>
+        </p:txBody>
+      </p:sp>
+      <p:sp>
+        <p:nvSpPr>
+          <p:cNvPr id="16" name="Rectangle 15">
+            <a:extLst>
+              <a:ext uri="{FF2B5EF4-FFF2-40B4-BE49-F238E27FC236}">
+                <a16:creationId xmlns:a16="http://schemas.microsoft.com/office/drawing/2014/main" id="{53E5B1A8-3AC9-4BD1-9BBC-78CA94F2D1BA}"/>
+              </a:ext>
+              <a:ext uri="{C183D7F6-B498-43B3-948B-1728B52AA6E4}">
+                <adec:decorative xmlns:adec="http://schemas.microsoft.com/office/drawing/2017/decorative" val="1"/>
+              </a:ext>
+            </a:extLst>
+          </p:cNvPr>
+          <p:cNvSpPr>
+            <a:spLocks noGrp="1" noRot="1" noChangeAspect="1" noMove="1" noResize="1" noEditPoints="1" noAdjustHandles="1" noChangeArrowheads="1" noChangeShapeType="1" noTextEdit="1"/>
+          </p:cNvSpPr>
+          <p:nvPr>
+            <p:extLst>
+              <p:ext uri="{386F3935-93C4-4BCD-93E2-E3B085C9AB24}">
+                <p16:designElem xmlns:p16="http://schemas.microsoft.com/office/powerpoint/2015/main" val="1"/>
+              </p:ext>
+            </p:extLst>
+          </p:nvPr>
+        </p:nvSpPr>
+        <p:spPr>
+          <a:xfrm>
+            <a:off x="459350" y="-1"/>
+            <a:ext cx="11732646" cy="1597433"/>
+          </a:xfrm>
+          <a:prstGeom prst="rect">
+            <a:avLst/>
+          </a:prstGeom>
+          <a:gradFill>
+            <a:gsLst>
+              <a:gs pos="50000">
+                <a:srgbClr val="000000">
+                  <a:alpha val="0"/>
+                </a:srgbClr>
+              </a:gs>
+              <a:gs pos="99000">
+                <a:schemeClr val="accent1">
+                  <a:lumMod val="50000"/>
+                  <a:alpha val="52000"/>
+                </a:schemeClr>
+              </a:gs>
+            </a:gsLst>
+            <a:lin ang="16800000" scaled="0"/>
+          </a:gradFill>
+          <a:ln>
+            <a:noFill/>
+          </a:ln>
+        </p:spPr>
+        <p:style>
+          <a:lnRef idx="2">
+            <a:schemeClr val="accent1">
+              <a:shade val="50000"/>
+            </a:schemeClr>
+          </a:lnRef>
+          <a:fillRef idx="1">
+            <a:schemeClr val="accent1"/>
+          </a:fillRef>
+          <a:effectRef idx="0">
+            <a:schemeClr val="accent1"/>
+          </a:effectRef>
+          <a:fontRef idx="minor">
+            <a:schemeClr val="lt1"/>
+          </a:fontRef>
+        </p:style>
+        <p:txBody>
+          <a:bodyPr rtlCol="0" anchor="ctr"/>
+          <a:lstStyle/>
+          <a:p>
+            <a:pPr algn="ctr"/>
+            <a:endParaRPr lang="en-US"/>
+          </a:p>
+        </p:txBody>
+      </p:sp>
+      <p:sp>
+        <p:nvSpPr>
+          <p:cNvPr id="2" name="Title 1">
+            <a:extLst>
+              <a:ext uri="{FF2B5EF4-FFF2-40B4-BE49-F238E27FC236}">
+                <a16:creationId xmlns:a16="http://schemas.microsoft.com/office/drawing/2014/main" id="{0F575255-F191-EDA0-4C44-9E6FC5BD5623}"/>
+              </a:ext>
+            </a:extLst>
+          </p:cNvPr>
+          <p:cNvSpPr>
+            <a:spLocks noGrp="1"/>
+          </p:cNvSpPr>
+          <p:nvPr>
+            <p:ph type="title"/>
+          </p:nvPr>
+        </p:nvSpPr>
+        <p:spPr>
+          <a:xfrm>
+            <a:off x="459346" y="348967"/>
             <a:ext cx="9895951" cy="1033669"/>
           </a:xfrm>
         </p:spPr>
@@ -4612,7 +5776,7 @@
           <a:lstStyle/>
           <a:p>
             <a:r>
-              <a:rPr lang="en-US" sz="5000">
+              <a:rPr lang="en-US" sz="5000" dirty="0">
                 <a:solidFill>
                   <a:srgbClr val="FFFFFF"/>
                 </a:solidFill>
@@ -4620,12 +5784,6 @@
               </a:rPr>
               <a:t>Background and motivation</a:t>
             </a:r>
-            <a:endParaRPr lang="en-US" sz="5000" dirty="0">
-              <a:solidFill>
-                <a:srgbClr val="FFFFFF"/>
-              </a:solidFill>
-              <a:latin typeface="Avenir Next" panose="020B0503020202020204" pitchFamily="34" charset="0"/>
-            </a:endParaRPr>
           </a:p>
         </p:txBody>
       </p:sp>
@@ -5126,7 +6284,7 @@
         </p:nvSpPr>
         <p:spPr>
           <a:xfrm>
-            <a:off x="1371599" y="339610"/>
+            <a:off x="459346" y="278535"/>
             <a:ext cx="9895951" cy="1033669"/>
           </a:xfrm>
         </p:spPr>
@@ -5177,8 +6335,8 @@
         </p:blipFill>
         <p:spPr bwMode="auto">
           <a:xfrm>
-            <a:off x="2122712" y="2226501"/>
-            <a:ext cx="7946572" cy="3599635"/>
+            <a:off x="1500508" y="2139362"/>
+            <a:ext cx="9190979" cy="4163326"/>
           </a:xfrm>
           <a:prstGeom prst="rect">
             <a:avLst/>
@@ -5633,7 +6791,7 @@
         </p:nvSpPr>
         <p:spPr>
           <a:xfrm>
-            <a:off x="1371599" y="339610"/>
+            <a:off x="459346" y="338293"/>
             <a:ext cx="9895951" cy="1033669"/>
           </a:xfrm>
         </p:spPr>
@@ -5673,8 +6831,8 @@
         </p:nvSpPr>
         <p:spPr>
           <a:xfrm>
-            <a:off x="336330" y="2066522"/>
-            <a:ext cx="6608756" cy="3713792"/>
+            <a:off x="336330" y="2010249"/>
+            <a:ext cx="11550870" cy="4179533"/>
           </a:xfrm>
         </p:spPr>
         <p:txBody>
@@ -5706,55 +6864,21 @@
               <a:t>What is the head loss generated by the hydraulic jump in the culvert?</a:t>
             </a:r>
           </a:p>
-        </p:txBody>
-      </p:sp>
-      <p:pic>
-        <p:nvPicPr>
-          <p:cNvPr id="5122" name="Picture 2">
-            <a:extLst>
-              <a:ext uri="{FF2B5EF4-FFF2-40B4-BE49-F238E27FC236}">
-                <a16:creationId xmlns:a16="http://schemas.microsoft.com/office/drawing/2014/main" id="{428EDDF8-7D3D-692A-E735-756B6A8F0E0C}"/>
-              </a:ext>
-            </a:extLst>
-          </p:cNvPr>
-          <p:cNvPicPr>
-            <a:picLocks noChangeAspect="1" noChangeArrowheads="1"/>
-          </p:cNvPicPr>
-          <p:nvPr/>
-        </p:nvPicPr>
-        <p:blipFill>
-          <a:blip r:embed="rId2">
-            <a:extLst>
-              <a:ext uri="{28A0092B-C50C-407E-A947-70E740481C1C}">
-                <a14:useLocalDpi xmlns:a14="http://schemas.microsoft.com/office/drawing/2010/main" val="0"/>
-              </a:ext>
-            </a:extLst>
-          </a:blip>
-          <a:srcRect/>
-          <a:stretch>
-            <a:fillRect/>
-          </a:stretch>
-        </p:blipFill>
-        <p:spPr bwMode="auto">
-          <a:xfrm>
-            <a:off x="6819194" y="1837922"/>
-            <a:ext cx="5036476" cy="4538502"/>
-          </a:xfrm>
-          <a:prstGeom prst="rect">
-            <a:avLst/>
-          </a:prstGeom>
-          <a:noFill/>
-          <a:extLst>
-            <a:ext uri="{909E8E84-426E-40DD-AFC4-6F175D3DCCD1}">
-              <a14:hiddenFill xmlns:a14="http://schemas.microsoft.com/office/drawing/2010/main">
-                <a:solidFill>
-                  <a:srgbClr val="FFFFFF"/>
-                </a:solidFill>
-              </a14:hiddenFill>
-            </a:ext>
-          </a:extLst>
-        </p:spPr>
-      </p:pic>
+          <a:p>
+            <a:endParaRPr lang="en-US" sz="3000" dirty="0">
+              <a:latin typeface="Avenir Next" panose="020B0503020202020204" pitchFamily="34" charset="0"/>
+            </a:endParaRPr>
+          </a:p>
+          <a:p>
+            <a:r>
+              <a:rPr lang="en-US" sz="3000" dirty="0">
+                <a:latin typeface="Avenir Next" panose="020B0503020202020204" pitchFamily="34" charset="0"/>
+              </a:rPr>
+              <a:t>What is causing the hysteresis seen in the experimental stage-velocity curves?</a:t>
+            </a:r>
+          </a:p>
+        </p:txBody>
+      </p:sp>
     </p:spTree>
     <p:extLst>
       <p:ext uri="{BB962C8B-B14F-4D97-AF65-F5344CB8AC3E}">
@@ -6193,7 +7317,7 @@
         </p:nvSpPr>
         <p:spPr>
           <a:xfrm>
-            <a:off x="1371599" y="339610"/>
+            <a:off x="314410" y="303698"/>
             <a:ext cx="9895951" cy="1033669"/>
           </a:xfrm>
         </p:spPr>
@@ -6232,7 +7356,7 @@
         </p:nvSpPr>
         <p:spPr>
           <a:xfrm>
-            <a:off x="838199" y="1825624"/>
+            <a:off x="459350" y="1740644"/>
             <a:ext cx="9992358" cy="952655"/>
           </a:xfrm>
         </p:spPr>
@@ -6242,13 +7366,18 @@
           </a:bodyPr>
           <a:lstStyle/>
           <a:p>
+            <a:pPr marL="0" indent="0">
+              <a:buNone/>
+            </a:pPr>
             <a:r>
               <a:rPr lang="en-US" dirty="0"/>
               <a:t>Using open channel flow flume as a scale model</a:t>
             </a:r>
           </a:p>
           <a:p>
-            <a:pPr lvl="1"/>
+            <a:pPr marL="457200" lvl="1" indent="0">
+              <a:buNone/>
+            </a:pPr>
             <a:r>
               <a:rPr lang="en-US" dirty="0"/>
               <a:t>Scale factor - </a:t>
@@ -6264,2716 +7393,3092 @@
           </a:p>
         </p:txBody>
       </p:sp>
-      <p:cxnSp>
-        <p:nvCxnSpPr>
-          <p:cNvPr id="11" name="Straight Connector 10">
-            <a:extLst>
-              <a:ext uri="{FF2B5EF4-FFF2-40B4-BE49-F238E27FC236}">
-                <a16:creationId xmlns:a16="http://schemas.microsoft.com/office/drawing/2014/main" id="{EC86636D-C963-2A31-F870-672805F02DC4}"/>
-              </a:ext>
-            </a:extLst>
-          </p:cNvPr>
-          <p:cNvCxnSpPr>
-            <a:cxnSpLocks/>
-          </p:cNvCxnSpPr>
+      <p:grpSp>
+        <p:nvGrpSpPr>
+          <p:cNvPr id="132" name="Group 131">
+            <a:extLst>
+              <a:ext uri="{FF2B5EF4-FFF2-40B4-BE49-F238E27FC236}">
+                <a16:creationId xmlns:a16="http://schemas.microsoft.com/office/drawing/2014/main" id="{7B628E22-36A4-218F-8DDF-02C0D604B725}"/>
+              </a:ext>
+            </a:extLst>
+          </p:cNvPr>
+          <p:cNvGrpSpPr/>
           <p:nvPr/>
-        </p:nvCxnSpPr>
-        <p:spPr>
+        </p:nvGrpSpPr>
+        <p:grpSpPr>
           <a:xfrm>
-            <a:off x="2254769" y="6162347"/>
-            <a:ext cx="8279119" cy="0"/>
+            <a:off x="306749" y="2753597"/>
+            <a:ext cx="11312805" cy="4020660"/>
+            <a:chOff x="753010" y="2721388"/>
+            <a:chExt cx="11312805" cy="4020660"/>
           </a:xfrm>
-          <a:prstGeom prst="line">
-            <a:avLst/>
-          </a:prstGeom>
-          <a:ln w="28575"/>
-        </p:spPr>
-        <p:style>
-          <a:lnRef idx="2">
-            <a:schemeClr val="accent1"/>
-          </a:lnRef>
-          <a:fillRef idx="0">
-            <a:schemeClr val="accent1"/>
-          </a:fillRef>
-          <a:effectRef idx="1">
-            <a:schemeClr val="accent1"/>
-          </a:effectRef>
-          <a:fontRef idx="minor">
-            <a:schemeClr val="tx1"/>
-          </a:fontRef>
-        </p:style>
-      </p:cxnSp>
-      <p:cxnSp>
-        <p:nvCxnSpPr>
-          <p:cNvPr id="15" name="Straight Connector 14">
-            <a:extLst>
-              <a:ext uri="{FF2B5EF4-FFF2-40B4-BE49-F238E27FC236}">
-                <a16:creationId xmlns:a16="http://schemas.microsoft.com/office/drawing/2014/main" id="{1D8D95BB-0D12-BC78-56E8-3621D428902A}"/>
-              </a:ext>
-            </a:extLst>
-          </p:cNvPr>
-          <p:cNvCxnSpPr>
-            <a:cxnSpLocks/>
-          </p:cNvCxnSpPr>
-          <p:nvPr/>
-        </p:nvCxnSpPr>
-        <p:spPr>
-          <a:xfrm>
-            <a:off x="3367498" y="4736467"/>
-            <a:ext cx="7166390" cy="0"/>
-          </a:xfrm>
-          <a:prstGeom prst="line">
-            <a:avLst/>
-          </a:prstGeom>
-          <a:ln w="28575"/>
-        </p:spPr>
-        <p:style>
-          <a:lnRef idx="2">
-            <a:schemeClr val="accent1"/>
-          </a:lnRef>
-          <a:fillRef idx="0">
-            <a:schemeClr val="accent1"/>
-          </a:fillRef>
-          <a:effectRef idx="1">
-            <a:schemeClr val="accent1"/>
-          </a:effectRef>
-          <a:fontRef idx="minor">
-            <a:schemeClr val="tx1"/>
-          </a:fontRef>
-        </p:style>
-      </p:cxnSp>
-      <p:cxnSp>
-        <p:nvCxnSpPr>
-          <p:cNvPr id="17" name="Straight Connector 16">
-            <a:extLst>
-              <a:ext uri="{FF2B5EF4-FFF2-40B4-BE49-F238E27FC236}">
-                <a16:creationId xmlns:a16="http://schemas.microsoft.com/office/drawing/2014/main" id="{7D829F71-2D81-068C-6E79-55DD035F363D}"/>
-              </a:ext>
-            </a:extLst>
-          </p:cNvPr>
-          <p:cNvCxnSpPr>
-            <a:cxnSpLocks/>
-          </p:cNvCxnSpPr>
-          <p:nvPr/>
-        </p:nvCxnSpPr>
-        <p:spPr>
-          <a:xfrm flipV="1">
-            <a:off x="3367498" y="3331464"/>
-            <a:ext cx="0" cy="1405003"/>
-          </a:xfrm>
-          <a:prstGeom prst="line">
-            <a:avLst/>
-          </a:prstGeom>
-          <a:ln w="28575"/>
-        </p:spPr>
-        <p:style>
-          <a:lnRef idx="2">
-            <a:schemeClr val="accent1"/>
-          </a:lnRef>
-          <a:fillRef idx="0">
-            <a:schemeClr val="accent1"/>
-          </a:fillRef>
-          <a:effectRef idx="1">
-            <a:schemeClr val="accent1"/>
-          </a:effectRef>
-          <a:fontRef idx="minor">
-            <a:schemeClr val="tx1"/>
-          </a:fontRef>
-        </p:style>
-      </p:cxnSp>
-      <p:cxnSp>
-        <p:nvCxnSpPr>
-          <p:cNvPr id="22" name="Straight Connector 21">
-            <a:extLst>
-              <a:ext uri="{FF2B5EF4-FFF2-40B4-BE49-F238E27FC236}">
-                <a16:creationId xmlns:a16="http://schemas.microsoft.com/office/drawing/2014/main" id="{9FDA412C-A9D3-25A2-29F3-F9D6F846233C}"/>
-              </a:ext>
-            </a:extLst>
-          </p:cNvPr>
-          <p:cNvCxnSpPr>
-            <a:cxnSpLocks/>
-          </p:cNvCxnSpPr>
-          <p:nvPr/>
-        </p:nvCxnSpPr>
-        <p:spPr>
-          <a:xfrm flipV="1">
-            <a:off x="2254769" y="3331464"/>
-            <a:ext cx="0" cy="2233781"/>
-          </a:xfrm>
-          <a:prstGeom prst="line">
-            <a:avLst/>
-          </a:prstGeom>
-          <a:ln w="28575"/>
-        </p:spPr>
-        <p:style>
-          <a:lnRef idx="2">
-            <a:schemeClr val="accent1"/>
-          </a:lnRef>
-          <a:fillRef idx="0">
-            <a:schemeClr val="accent1"/>
-          </a:fillRef>
-          <a:effectRef idx="1">
-            <a:schemeClr val="accent1"/>
-          </a:effectRef>
-          <a:fontRef idx="minor">
-            <a:schemeClr val="tx1"/>
-          </a:fontRef>
-        </p:style>
-      </p:cxnSp>
-      <p:cxnSp>
-        <p:nvCxnSpPr>
-          <p:cNvPr id="25" name="Straight Connector 24">
-            <a:extLst>
-              <a:ext uri="{FF2B5EF4-FFF2-40B4-BE49-F238E27FC236}">
-                <a16:creationId xmlns:a16="http://schemas.microsoft.com/office/drawing/2014/main" id="{C8898917-3A79-A31A-2D97-54599BBFD57B}"/>
-              </a:ext>
-            </a:extLst>
-          </p:cNvPr>
-          <p:cNvCxnSpPr>
-            <a:cxnSpLocks/>
-          </p:cNvCxnSpPr>
-          <p:nvPr/>
-        </p:nvCxnSpPr>
-        <p:spPr>
-          <a:xfrm flipH="1">
-            <a:off x="2254769" y="3344129"/>
-            <a:ext cx="1112729" cy="0"/>
-          </a:xfrm>
-          <a:prstGeom prst="line">
-            <a:avLst/>
-          </a:prstGeom>
-          <a:ln w="28575"/>
-        </p:spPr>
-        <p:style>
-          <a:lnRef idx="2">
-            <a:schemeClr val="accent1"/>
-          </a:lnRef>
-          <a:fillRef idx="0">
-            <a:schemeClr val="accent1"/>
-          </a:fillRef>
-          <a:effectRef idx="1">
-            <a:schemeClr val="accent1"/>
-          </a:effectRef>
-          <a:fontRef idx="minor">
-            <a:schemeClr val="tx1"/>
-          </a:fontRef>
-        </p:style>
-      </p:cxnSp>
-      <p:cxnSp>
-        <p:nvCxnSpPr>
-          <p:cNvPr id="28" name="Straight Connector 27">
-            <a:extLst>
-              <a:ext uri="{FF2B5EF4-FFF2-40B4-BE49-F238E27FC236}">
-                <a16:creationId xmlns:a16="http://schemas.microsoft.com/office/drawing/2014/main" id="{F1EA0D6C-B223-83AB-F599-03824B3271D9}"/>
-              </a:ext>
-            </a:extLst>
-          </p:cNvPr>
-          <p:cNvCxnSpPr>
-            <a:cxnSpLocks/>
-          </p:cNvCxnSpPr>
-          <p:nvPr/>
-        </p:nvCxnSpPr>
-        <p:spPr>
-          <a:xfrm flipV="1">
-            <a:off x="3367498" y="4736467"/>
-            <a:ext cx="0" cy="1012692"/>
-          </a:xfrm>
-          <a:prstGeom prst="line">
-            <a:avLst/>
-          </a:prstGeom>
-          <a:ln w="57150"/>
-        </p:spPr>
-        <p:style>
-          <a:lnRef idx="2">
-            <a:schemeClr val="accent1"/>
-          </a:lnRef>
-          <a:fillRef idx="0">
-            <a:schemeClr val="accent1"/>
-          </a:fillRef>
-          <a:effectRef idx="1">
-            <a:schemeClr val="accent1"/>
-          </a:effectRef>
-          <a:fontRef idx="minor">
-            <a:schemeClr val="tx1"/>
-          </a:fontRef>
-        </p:style>
-      </p:cxnSp>
-      <p:cxnSp>
-        <p:nvCxnSpPr>
-          <p:cNvPr id="33" name="Straight Connector 32">
-            <a:extLst>
-              <a:ext uri="{FF2B5EF4-FFF2-40B4-BE49-F238E27FC236}">
-                <a16:creationId xmlns:a16="http://schemas.microsoft.com/office/drawing/2014/main" id="{962C1AF6-F84D-C49D-4232-E2ECC3E5738E}"/>
-              </a:ext>
-            </a:extLst>
-          </p:cNvPr>
-          <p:cNvCxnSpPr>
-            <a:cxnSpLocks/>
-          </p:cNvCxnSpPr>
-          <p:nvPr/>
-        </p:nvCxnSpPr>
-        <p:spPr>
-          <a:xfrm flipV="1">
-            <a:off x="9479539" y="5749159"/>
-            <a:ext cx="0" cy="413188"/>
-          </a:xfrm>
-          <a:prstGeom prst="line">
-            <a:avLst/>
-          </a:prstGeom>
-          <a:ln w="57150"/>
-        </p:spPr>
-        <p:style>
-          <a:lnRef idx="2">
-            <a:schemeClr val="accent1"/>
-          </a:lnRef>
-          <a:fillRef idx="0">
-            <a:schemeClr val="accent1"/>
-          </a:fillRef>
-          <a:effectRef idx="1">
-            <a:schemeClr val="accent1"/>
-          </a:effectRef>
-          <a:fontRef idx="minor">
-            <a:schemeClr val="tx1"/>
-          </a:fontRef>
-        </p:style>
-      </p:cxnSp>
-      <p:cxnSp>
-        <p:nvCxnSpPr>
-          <p:cNvPr id="35" name="Straight Connector 34">
-            <a:extLst>
-              <a:ext uri="{FF2B5EF4-FFF2-40B4-BE49-F238E27FC236}">
-                <a16:creationId xmlns:a16="http://schemas.microsoft.com/office/drawing/2014/main" id="{25D3F024-081E-841E-D675-4361FFAD1012}"/>
-              </a:ext>
-            </a:extLst>
-          </p:cNvPr>
-          <p:cNvCxnSpPr>
-            <a:cxnSpLocks/>
-          </p:cNvCxnSpPr>
-          <p:nvPr/>
-        </p:nvCxnSpPr>
-        <p:spPr>
-          <a:xfrm flipV="1">
-            <a:off x="10533888" y="4736467"/>
-            <a:ext cx="0" cy="931610"/>
-          </a:xfrm>
-          <a:prstGeom prst="line">
-            <a:avLst/>
-          </a:prstGeom>
-          <a:ln w="28575"/>
-        </p:spPr>
-        <p:style>
-          <a:lnRef idx="2">
-            <a:schemeClr val="accent1"/>
-          </a:lnRef>
-          <a:fillRef idx="0">
-            <a:schemeClr val="accent1"/>
-          </a:fillRef>
-          <a:effectRef idx="1">
-            <a:schemeClr val="accent1"/>
-          </a:effectRef>
-          <a:fontRef idx="minor">
-            <a:schemeClr val="tx1"/>
-          </a:fontRef>
-        </p:style>
-      </p:cxnSp>
-      <p:cxnSp>
-        <p:nvCxnSpPr>
-          <p:cNvPr id="39" name="Straight Connector 38">
-            <a:extLst>
-              <a:ext uri="{FF2B5EF4-FFF2-40B4-BE49-F238E27FC236}">
-                <a16:creationId xmlns:a16="http://schemas.microsoft.com/office/drawing/2014/main" id="{C01799CD-9C8A-5252-315D-8D21F832857D}"/>
-              </a:ext>
-            </a:extLst>
-          </p:cNvPr>
-          <p:cNvCxnSpPr>
-            <a:cxnSpLocks/>
-          </p:cNvCxnSpPr>
-          <p:nvPr/>
-        </p:nvCxnSpPr>
-        <p:spPr>
-          <a:xfrm>
-            <a:off x="2254769" y="4129741"/>
-            <a:ext cx="1112729" cy="0"/>
-          </a:xfrm>
-          <a:prstGeom prst="line">
-            <a:avLst/>
-          </a:prstGeom>
-          <a:ln w="28575">
+        </p:grpSpPr>
+        <p:cxnSp>
+          <p:nvCxnSpPr>
+            <p:cNvPr id="11" name="Straight Connector 10">
+              <a:extLst>
+                <a:ext uri="{FF2B5EF4-FFF2-40B4-BE49-F238E27FC236}">
+                  <a16:creationId xmlns:a16="http://schemas.microsoft.com/office/drawing/2014/main" id="{EC86636D-C963-2A31-F870-672805F02DC4}"/>
+                </a:ext>
+              </a:extLst>
+            </p:cNvPr>
+            <p:cNvCxnSpPr>
+              <a:cxnSpLocks/>
+            </p:cNvCxnSpPr>
+            <p:nvPr/>
+          </p:nvCxnSpPr>
+          <p:spPr>
+            <a:xfrm>
+              <a:off x="2254769" y="6162347"/>
+              <a:ext cx="8279119" cy="0"/>
+            </a:xfrm>
+            <a:prstGeom prst="line">
+              <a:avLst/>
+            </a:prstGeom>
+            <a:ln w="28575"/>
+          </p:spPr>
+          <p:style>
+            <a:lnRef idx="2">
+              <a:schemeClr val="accent1"/>
+            </a:lnRef>
+            <a:fillRef idx="0">
+              <a:schemeClr val="accent1"/>
+            </a:fillRef>
+            <a:effectRef idx="1">
+              <a:schemeClr val="accent1"/>
+            </a:effectRef>
+            <a:fontRef idx="minor">
+              <a:schemeClr val="tx1"/>
+            </a:fontRef>
+          </p:style>
+        </p:cxnSp>
+        <p:cxnSp>
+          <p:nvCxnSpPr>
+            <p:cNvPr id="15" name="Straight Connector 14">
+              <a:extLst>
+                <a:ext uri="{FF2B5EF4-FFF2-40B4-BE49-F238E27FC236}">
+                  <a16:creationId xmlns:a16="http://schemas.microsoft.com/office/drawing/2014/main" id="{1D8D95BB-0D12-BC78-56E8-3621D428902A}"/>
+                </a:ext>
+              </a:extLst>
+            </p:cNvPr>
+            <p:cNvCxnSpPr>
+              <a:cxnSpLocks/>
+            </p:cNvCxnSpPr>
+            <p:nvPr/>
+          </p:nvCxnSpPr>
+          <p:spPr>
+            <a:xfrm>
+              <a:off x="3367498" y="4736467"/>
+              <a:ext cx="7166390" cy="0"/>
+            </a:xfrm>
+            <a:prstGeom prst="line">
+              <a:avLst/>
+            </a:prstGeom>
+            <a:ln w="28575"/>
+          </p:spPr>
+          <p:style>
+            <a:lnRef idx="2">
+              <a:schemeClr val="accent1"/>
+            </a:lnRef>
+            <a:fillRef idx="0">
+              <a:schemeClr val="accent1"/>
+            </a:fillRef>
+            <a:effectRef idx="1">
+              <a:schemeClr val="accent1"/>
+            </a:effectRef>
+            <a:fontRef idx="minor">
+              <a:schemeClr val="tx1"/>
+            </a:fontRef>
+          </p:style>
+        </p:cxnSp>
+        <p:cxnSp>
+          <p:nvCxnSpPr>
+            <p:cNvPr id="17" name="Straight Connector 16">
+              <a:extLst>
+                <a:ext uri="{FF2B5EF4-FFF2-40B4-BE49-F238E27FC236}">
+                  <a16:creationId xmlns:a16="http://schemas.microsoft.com/office/drawing/2014/main" id="{7D829F71-2D81-068C-6E79-55DD035F363D}"/>
+                </a:ext>
+              </a:extLst>
+            </p:cNvPr>
+            <p:cNvCxnSpPr>
+              <a:cxnSpLocks/>
+            </p:cNvCxnSpPr>
+            <p:nvPr/>
+          </p:nvCxnSpPr>
+          <p:spPr>
+            <a:xfrm flipV="1">
+              <a:off x="3367498" y="3331464"/>
+              <a:ext cx="0" cy="1405003"/>
+            </a:xfrm>
+            <a:prstGeom prst="line">
+              <a:avLst/>
+            </a:prstGeom>
+            <a:ln w="28575"/>
+          </p:spPr>
+          <p:style>
+            <a:lnRef idx="2">
+              <a:schemeClr val="accent1"/>
+            </a:lnRef>
+            <a:fillRef idx="0">
+              <a:schemeClr val="accent1"/>
+            </a:fillRef>
+            <a:effectRef idx="1">
+              <a:schemeClr val="accent1"/>
+            </a:effectRef>
+            <a:fontRef idx="minor">
+              <a:schemeClr val="tx1"/>
+            </a:fontRef>
+          </p:style>
+        </p:cxnSp>
+        <p:cxnSp>
+          <p:nvCxnSpPr>
+            <p:cNvPr id="22" name="Straight Connector 21">
+              <a:extLst>
+                <a:ext uri="{FF2B5EF4-FFF2-40B4-BE49-F238E27FC236}">
+                  <a16:creationId xmlns:a16="http://schemas.microsoft.com/office/drawing/2014/main" id="{9FDA412C-A9D3-25A2-29F3-F9D6F846233C}"/>
+                </a:ext>
+              </a:extLst>
+            </p:cNvPr>
+            <p:cNvCxnSpPr>
+              <a:cxnSpLocks/>
+            </p:cNvCxnSpPr>
+            <p:nvPr/>
+          </p:nvCxnSpPr>
+          <p:spPr>
+            <a:xfrm flipV="1">
+              <a:off x="2254769" y="3331464"/>
+              <a:ext cx="0" cy="2233781"/>
+            </a:xfrm>
+            <a:prstGeom prst="line">
+              <a:avLst/>
+            </a:prstGeom>
+            <a:ln w="28575"/>
+          </p:spPr>
+          <p:style>
+            <a:lnRef idx="2">
+              <a:schemeClr val="accent1"/>
+            </a:lnRef>
+            <a:fillRef idx="0">
+              <a:schemeClr val="accent1"/>
+            </a:fillRef>
+            <a:effectRef idx="1">
+              <a:schemeClr val="accent1"/>
+            </a:effectRef>
+            <a:fontRef idx="minor">
+              <a:schemeClr val="tx1"/>
+            </a:fontRef>
+          </p:style>
+        </p:cxnSp>
+        <p:cxnSp>
+          <p:nvCxnSpPr>
+            <p:cNvPr id="25" name="Straight Connector 24">
+              <a:extLst>
+                <a:ext uri="{FF2B5EF4-FFF2-40B4-BE49-F238E27FC236}">
+                  <a16:creationId xmlns:a16="http://schemas.microsoft.com/office/drawing/2014/main" id="{C8898917-3A79-A31A-2D97-54599BBFD57B}"/>
+                </a:ext>
+              </a:extLst>
+            </p:cNvPr>
+            <p:cNvCxnSpPr>
+              <a:cxnSpLocks/>
+            </p:cNvCxnSpPr>
+            <p:nvPr/>
+          </p:nvCxnSpPr>
+          <p:spPr>
+            <a:xfrm flipH="1">
+              <a:off x="2254769" y="3344129"/>
+              <a:ext cx="1112729" cy="0"/>
+            </a:xfrm>
+            <a:prstGeom prst="line">
+              <a:avLst/>
+            </a:prstGeom>
+            <a:ln w="28575"/>
+          </p:spPr>
+          <p:style>
+            <a:lnRef idx="2">
+              <a:schemeClr val="accent1"/>
+            </a:lnRef>
+            <a:fillRef idx="0">
+              <a:schemeClr val="accent1"/>
+            </a:fillRef>
+            <a:effectRef idx="1">
+              <a:schemeClr val="accent1"/>
+            </a:effectRef>
+            <a:fontRef idx="minor">
+              <a:schemeClr val="tx1"/>
+            </a:fontRef>
+          </p:style>
+        </p:cxnSp>
+        <p:cxnSp>
+          <p:nvCxnSpPr>
+            <p:cNvPr id="28" name="Straight Connector 27">
+              <a:extLst>
+                <a:ext uri="{FF2B5EF4-FFF2-40B4-BE49-F238E27FC236}">
+                  <a16:creationId xmlns:a16="http://schemas.microsoft.com/office/drawing/2014/main" id="{F1EA0D6C-B223-83AB-F599-03824B3271D9}"/>
+                </a:ext>
+              </a:extLst>
+            </p:cNvPr>
+            <p:cNvCxnSpPr>
+              <a:cxnSpLocks/>
+            </p:cNvCxnSpPr>
+            <p:nvPr/>
+          </p:nvCxnSpPr>
+          <p:spPr>
+            <a:xfrm flipV="1">
+              <a:off x="3367498" y="4736467"/>
+              <a:ext cx="0" cy="1012692"/>
+            </a:xfrm>
+            <a:prstGeom prst="line">
+              <a:avLst/>
+            </a:prstGeom>
+            <a:ln w="57150"/>
+          </p:spPr>
+          <p:style>
+            <a:lnRef idx="2">
+              <a:schemeClr val="accent1"/>
+            </a:lnRef>
+            <a:fillRef idx="0">
+              <a:schemeClr val="accent1"/>
+            </a:fillRef>
+            <a:effectRef idx="1">
+              <a:schemeClr val="accent1"/>
+            </a:effectRef>
+            <a:fontRef idx="minor">
+              <a:schemeClr val="tx1"/>
+            </a:fontRef>
+          </p:style>
+        </p:cxnSp>
+        <p:cxnSp>
+          <p:nvCxnSpPr>
+            <p:cNvPr id="33" name="Straight Connector 32">
+              <a:extLst>
+                <a:ext uri="{FF2B5EF4-FFF2-40B4-BE49-F238E27FC236}">
+                  <a16:creationId xmlns:a16="http://schemas.microsoft.com/office/drawing/2014/main" id="{962C1AF6-F84D-C49D-4232-E2ECC3E5738E}"/>
+                </a:ext>
+              </a:extLst>
+            </p:cNvPr>
+            <p:cNvCxnSpPr>
+              <a:cxnSpLocks/>
+            </p:cNvCxnSpPr>
+            <p:nvPr/>
+          </p:nvCxnSpPr>
+          <p:spPr>
+            <a:xfrm flipV="1">
+              <a:off x="9479539" y="5749159"/>
+              <a:ext cx="0" cy="413188"/>
+            </a:xfrm>
+            <a:prstGeom prst="line">
+              <a:avLst/>
+            </a:prstGeom>
+            <a:ln w="57150"/>
+          </p:spPr>
+          <p:style>
+            <a:lnRef idx="2">
+              <a:schemeClr val="accent1"/>
+            </a:lnRef>
+            <a:fillRef idx="0">
+              <a:schemeClr val="accent1"/>
+            </a:fillRef>
+            <a:effectRef idx="1">
+              <a:schemeClr val="accent1"/>
+            </a:effectRef>
+            <a:fontRef idx="minor">
+              <a:schemeClr val="tx1"/>
+            </a:fontRef>
+          </p:style>
+        </p:cxnSp>
+        <p:cxnSp>
+          <p:nvCxnSpPr>
+            <p:cNvPr id="35" name="Straight Connector 34">
+              <a:extLst>
+                <a:ext uri="{FF2B5EF4-FFF2-40B4-BE49-F238E27FC236}">
+                  <a16:creationId xmlns:a16="http://schemas.microsoft.com/office/drawing/2014/main" id="{25D3F024-081E-841E-D675-4361FFAD1012}"/>
+                </a:ext>
+              </a:extLst>
+            </p:cNvPr>
+            <p:cNvCxnSpPr>
+              <a:cxnSpLocks/>
+            </p:cNvCxnSpPr>
+            <p:nvPr/>
+          </p:nvCxnSpPr>
+          <p:spPr>
+            <a:xfrm flipV="1">
+              <a:off x="10533888" y="4736467"/>
+              <a:ext cx="0" cy="931610"/>
+            </a:xfrm>
+            <a:prstGeom prst="line">
+              <a:avLst/>
+            </a:prstGeom>
+            <a:ln w="28575"/>
+          </p:spPr>
+          <p:style>
+            <a:lnRef idx="2">
+              <a:schemeClr val="accent1"/>
+            </a:lnRef>
+            <a:fillRef idx="0">
+              <a:schemeClr val="accent1"/>
+            </a:fillRef>
+            <a:effectRef idx="1">
+              <a:schemeClr val="accent1"/>
+            </a:effectRef>
+            <a:fontRef idx="minor">
+              <a:schemeClr val="tx1"/>
+            </a:fontRef>
+          </p:style>
+        </p:cxnSp>
+        <p:cxnSp>
+          <p:nvCxnSpPr>
+            <p:cNvPr id="39" name="Straight Connector 38">
+              <a:extLst>
+                <a:ext uri="{FF2B5EF4-FFF2-40B4-BE49-F238E27FC236}">
+                  <a16:creationId xmlns:a16="http://schemas.microsoft.com/office/drawing/2014/main" id="{C01799CD-9C8A-5252-315D-8D21F832857D}"/>
+                </a:ext>
+              </a:extLst>
+            </p:cNvPr>
+            <p:cNvCxnSpPr>
+              <a:cxnSpLocks/>
+            </p:cNvCxnSpPr>
+            <p:nvPr/>
+          </p:nvCxnSpPr>
+          <p:spPr>
+            <a:xfrm>
+              <a:off x="2254769" y="4129741"/>
+              <a:ext cx="1112729" cy="0"/>
+            </a:xfrm>
+            <a:prstGeom prst="line">
+              <a:avLst/>
+            </a:prstGeom>
+            <a:ln w="28575">
+              <a:solidFill>
+                <a:srgbClr val="00B0F0"/>
+              </a:solidFill>
+            </a:ln>
+          </p:spPr>
+          <p:style>
+            <a:lnRef idx="2">
+              <a:schemeClr val="accent1"/>
+            </a:lnRef>
+            <a:fillRef idx="0">
+              <a:schemeClr val="accent1"/>
+            </a:fillRef>
+            <a:effectRef idx="1">
+              <a:schemeClr val="accent1"/>
+            </a:effectRef>
+            <a:fontRef idx="minor">
+              <a:schemeClr val="tx1"/>
+            </a:fontRef>
+          </p:style>
+        </p:cxnSp>
+        <p:cxnSp>
+          <p:nvCxnSpPr>
+            <p:cNvPr id="43" name="Straight Connector 42">
+              <a:extLst>
+                <a:ext uri="{FF2B5EF4-FFF2-40B4-BE49-F238E27FC236}">
+                  <a16:creationId xmlns:a16="http://schemas.microsoft.com/office/drawing/2014/main" id="{DDF95888-5E5B-428B-A3D5-D5D08EEA9C79}"/>
+                </a:ext>
+              </a:extLst>
+            </p:cNvPr>
+            <p:cNvCxnSpPr>
+              <a:cxnSpLocks/>
+            </p:cNvCxnSpPr>
+            <p:nvPr/>
+          </p:nvCxnSpPr>
+          <p:spPr>
+            <a:xfrm>
+              <a:off x="4649670" y="5887570"/>
+              <a:ext cx="1860332" cy="0"/>
+            </a:xfrm>
+            <a:prstGeom prst="line">
+              <a:avLst/>
+            </a:prstGeom>
+            <a:ln w="28575">
+              <a:solidFill>
+                <a:srgbClr val="00B0F0"/>
+              </a:solidFill>
+            </a:ln>
+          </p:spPr>
+          <p:style>
+            <a:lnRef idx="2">
+              <a:schemeClr val="accent1"/>
+            </a:lnRef>
+            <a:fillRef idx="0">
+              <a:schemeClr val="accent1"/>
+            </a:fillRef>
+            <a:effectRef idx="1">
+              <a:schemeClr val="accent1"/>
+            </a:effectRef>
+            <a:fontRef idx="minor">
+              <a:schemeClr val="tx1"/>
+            </a:fontRef>
+          </p:style>
+        </p:cxnSp>
+        <p:sp>
+          <p:nvSpPr>
+            <p:cNvPr id="51" name="Freeform 50">
+              <a:extLst>
+                <a:ext uri="{FF2B5EF4-FFF2-40B4-BE49-F238E27FC236}">
+                  <a16:creationId xmlns:a16="http://schemas.microsoft.com/office/drawing/2014/main" id="{F1865E88-425B-AEBB-B19C-CA6F9DA095E1}"/>
+                </a:ext>
+              </a:extLst>
+            </p:cNvPr>
+            <p:cNvSpPr/>
+            <p:nvPr/>
+          </p:nvSpPr>
+          <p:spPr>
+            <a:xfrm>
+              <a:off x="3351460" y="5749159"/>
+              <a:ext cx="1325680" cy="147261"/>
+            </a:xfrm>
+            <a:custGeom>
+              <a:avLst/>
+              <a:gdLst>
+                <a:gd name="connsiteX0" fmla="*/ 0 w 1325680"/>
+                <a:gd name="connsiteY0" fmla="*/ 0 h 147261"/>
+                <a:gd name="connsiteX1" fmla="*/ 367357 w 1325680"/>
+                <a:gd name="connsiteY1" fmla="*/ 135762 h 147261"/>
+                <a:gd name="connsiteX2" fmla="*/ 1325680 w 1325680"/>
+                <a:gd name="connsiteY2" fmla="*/ 139755 h 147261"/>
+              </a:gdLst>
+              <a:ahLst/>
+              <a:cxnLst>
+                <a:cxn ang="0">
+                  <a:pos x="connsiteX0" y="connsiteY0"/>
+                </a:cxn>
+                <a:cxn ang="0">
+                  <a:pos x="connsiteX1" y="connsiteY1"/>
+                </a:cxn>
+                <a:cxn ang="0">
+                  <a:pos x="connsiteX2" y="connsiteY2"/>
+                </a:cxn>
+              </a:cxnLst>
+              <a:rect l="l" t="t" r="r" b="b"/>
+              <a:pathLst>
+                <a:path w="1325680" h="147261">
+                  <a:moveTo>
+                    <a:pt x="0" y="0"/>
+                  </a:moveTo>
+                  <a:cubicBezTo>
+                    <a:pt x="73205" y="56234"/>
+                    <a:pt x="146410" y="112469"/>
+                    <a:pt x="367357" y="135762"/>
+                  </a:cubicBezTo>
+                  <a:cubicBezTo>
+                    <a:pt x="588304" y="159055"/>
+                    <a:pt x="1325680" y="139755"/>
+                    <a:pt x="1325680" y="139755"/>
+                  </a:cubicBezTo>
+                </a:path>
+              </a:pathLst>
+            </a:custGeom>
+            <a:noFill/>
+            <a:ln w="28575">
+              <a:solidFill>
+                <a:srgbClr val="00B0F0"/>
+              </a:solidFill>
+            </a:ln>
+          </p:spPr>
+          <p:style>
+            <a:lnRef idx="2">
+              <a:schemeClr val="accent1">
+                <a:shade val="15000"/>
+              </a:schemeClr>
+            </a:lnRef>
+            <a:fillRef idx="1">
+              <a:schemeClr val="accent1"/>
+            </a:fillRef>
+            <a:effectRef idx="0">
+              <a:schemeClr val="accent1"/>
+            </a:effectRef>
+            <a:fontRef idx="minor">
+              <a:schemeClr val="lt1"/>
+            </a:fontRef>
+          </p:style>
+          <p:txBody>
+            <a:bodyPr rtlCol="0" anchor="ctr"/>
+            <a:lstStyle/>
+            <a:p>
+              <a:pPr algn="ctr"/>
+              <a:endParaRPr lang="en-US"/>
+            </a:p>
+          </p:txBody>
+        </p:sp>
+        <p:cxnSp>
+          <p:nvCxnSpPr>
+            <p:cNvPr id="53" name="Straight Connector 52">
+              <a:extLst>
+                <a:ext uri="{FF2B5EF4-FFF2-40B4-BE49-F238E27FC236}">
+                  <a16:creationId xmlns:a16="http://schemas.microsoft.com/office/drawing/2014/main" id="{FCDBE607-937A-B94C-4EAC-3D85578D3299}"/>
+                </a:ext>
+              </a:extLst>
+            </p:cNvPr>
+            <p:cNvCxnSpPr>
+              <a:cxnSpLocks/>
+              <a:stCxn id="56" idx="4"/>
+            </p:cNvCxnSpPr>
+            <p:nvPr/>
+          </p:nvCxnSpPr>
+          <p:spPr>
+            <a:xfrm flipV="1">
+              <a:off x="7704766" y="5242813"/>
+              <a:ext cx="1774773" cy="108"/>
+            </a:xfrm>
+            <a:prstGeom prst="line">
+              <a:avLst/>
+            </a:prstGeom>
+            <a:ln w="28575">
+              <a:solidFill>
+                <a:srgbClr val="00B0F0"/>
+              </a:solidFill>
+            </a:ln>
+          </p:spPr>
+          <p:style>
+            <a:lnRef idx="2">
+              <a:schemeClr val="accent1"/>
+            </a:lnRef>
+            <a:fillRef idx="0">
+              <a:schemeClr val="accent1"/>
+            </a:fillRef>
+            <a:effectRef idx="1">
+              <a:schemeClr val="accent1"/>
+            </a:effectRef>
+            <a:fontRef idx="minor">
+              <a:schemeClr val="tx1"/>
+            </a:fontRef>
+          </p:style>
+        </p:cxnSp>
+        <p:sp>
+          <p:nvSpPr>
+            <p:cNvPr id="56" name="Freeform 55">
+              <a:extLst>
+                <a:ext uri="{FF2B5EF4-FFF2-40B4-BE49-F238E27FC236}">
+                  <a16:creationId xmlns:a16="http://schemas.microsoft.com/office/drawing/2014/main" id="{D5CF0242-BC71-129E-36A8-7398B22B18C2}"/>
+                </a:ext>
+              </a:extLst>
+            </p:cNvPr>
+            <p:cNvSpPr/>
+            <p:nvPr/>
+          </p:nvSpPr>
+          <p:spPr>
+            <a:xfrm>
+              <a:off x="6510001" y="5242921"/>
+              <a:ext cx="1194765" cy="644649"/>
+            </a:xfrm>
+            <a:custGeom>
+              <a:avLst/>
+              <a:gdLst>
+                <a:gd name="connsiteX0" fmla="*/ 0 w 1195754"/>
+                <a:gd name="connsiteY0" fmla="*/ 638457 h 638457"/>
+                <a:gd name="connsiteX1" fmla="*/ 292175 w 1195754"/>
+                <a:gd name="connsiteY1" fmla="*/ 568118 h 638457"/>
+                <a:gd name="connsiteX2" fmla="*/ 611404 w 1195754"/>
+                <a:gd name="connsiteY2" fmla="*/ 221836 h 638457"/>
+                <a:gd name="connsiteX3" fmla="*/ 941453 w 1195754"/>
+                <a:gd name="connsiteY3" fmla="*/ 32464 h 638457"/>
+                <a:gd name="connsiteX4" fmla="*/ 1195754 w 1195754"/>
+                <a:gd name="connsiteY4" fmla="*/ 0 h 638457"/>
+              </a:gdLst>
+              <a:ahLst/>
+              <a:cxnLst>
+                <a:cxn ang="0">
+                  <a:pos x="connsiteX0" y="connsiteY0"/>
+                </a:cxn>
+                <a:cxn ang="0">
+                  <a:pos x="connsiteX1" y="connsiteY1"/>
+                </a:cxn>
+                <a:cxn ang="0">
+                  <a:pos x="connsiteX2" y="connsiteY2"/>
+                </a:cxn>
+                <a:cxn ang="0">
+                  <a:pos x="connsiteX3" y="connsiteY3"/>
+                </a:cxn>
+                <a:cxn ang="0">
+                  <a:pos x="connsiteX4" y="connsiteY4"/>
+                </a:cxn>
+              </a:cxnLst>
+              <a:rect l="l" t="t" r="r" b="b"/>
+              <a:pathLst>
+                <a:path w="1195754" h="638457">
+                  <a:moveTo>
+                    <a:pt x="0" y="638457"/>
+                  </a:moveTo>
+                  <a:cubicBezTo>
+                    <a:pt x="95137" y="638006"/>
+                    <a:pt x="190274" y="637555"/>
+                    <a:pt x="292175" y="568118"/>
+                  </a:cubicBezTo>
+                  <a:cubicBezTo>
+                    <a:pt x="394076" y="498681"/>
+                    <a:pt x="503191" y="311112"/>
+                    <a:pt x="611404" y="221836"/>
+                  </a:cubicBezTo>
+                  <a:cubicBezTo>
+                    <a:pt x="719617" y="132560"/>
+                    <a:pt x="844061" y="69437"/>
+                    <a:pt x="941453" y="32464"/>
+                  </a:cubicBezTo>
+                  <a:cubicBezTo>
+                    <a:pt x="1038845" y="-4509"/>
+                    <a:pt x="1091148" y="5411"/>
+                    <a:pt x="1195754" y="0"/>
+                  </a:cubicBezTo>
+                </a:path>
+              </a:pathLst>
+            </a:custGeom>
+            <a:noFill/>
+            <a:ln w="28575">
+              <a:solidFill>
+                <a:srgbClr val="00B0F0"/>
+              </a:solidFill>
+            </a:ln>
+          </p:spPr>
+          <p:style>
+            <a:lnRef idx="2">
+              <a:schemeClr val="accent1">
+                <a:shade val="15000"/>
+              </a:schemeClr>
+            </a:lnRef>
+            <a:fillRef idx="1">
+              <a:schemeClr val="accent1"/>
+            </a:fillRef>
+            <a:effectRef idx="0">
+              <a:schemeClr val="accent1"/>
+            </a:effectRef>
+            <a:fontRef idx="minor">
+              <a:schemeClr val="lt1"/>
+            </a:fontRef>
+          </p:style>
+          <p:txBody>
+            <a:bodyPr rtlCol="0" anchor="ctr"/>
+            <a:lstStyle/>
+            <a:p>
+              <a:pPr algn="ctr"/>
+              <a:endParaRPr lang="en-US"/>
+            </a:p>
+          </p:txBody>
+        </p:sp>
+        <p:cxnSp>
+          <p:nvCxnSpPr>
+            <p:cNvPr id="59" name="Straight Connector 58">
+              <a:extLst>
+                <a:ext uri="{FF2B5EF4-FFF2-40B4-BE49-F238E27FC236}">
+                  <a16:creationId xmlns:a16="http://schemas.microsoft.com/office/drawing/2014/main" id="{37F42143-E5F4-E111-3AF1-C60F050F004E}"/>
+                </a:ext>
+              </a:extLst>
+            </p:cNvPr>
+            <p:cNvCxnSpPr>
+              <a:cxnSpLocks/>
+              <a:stCxn id="63" idx="3"/>
+            </p:cNvCxnSpPr>
+            <p:nvPr/>
+          </p:nvCxnSpPr>
+          <p:spPr>
+            <a:xfrm>
+              <a:off x="9764341" y="5419841"/>
+              <a:ext cx="769547" cy="2440"/>
+            </a:xfrm>
+            <a:prstGeom prst="line">
+              <a:avLst/>
+            </a:prstGeom>
+            <a:ln w="28575">
+              <a:solidFill>
+                <a:srgbClr val="00B0F0"/>
+              </a:solidFill>
+            </a:ln>
+          </p:spPr>
+          <p:style>
+            <a:lnRef idx="2">
+              <a:schemeClr val="accent1"/>
+            </a:lnRef>
+            <a:fillRef idx="0">
+              <a:schemeClr val="accent1"/>
+            </a:fillRef>
+            <a:effectRef idx="1">
+              <a:schemeClr val="accent1"/>
+            </a:effectRef>
+            <a:fontRef idx="minor">
+              <a:schemeClr val="tx1"/>
+            </a:fontRef>
+          </p:style>
+        </p:cxnSp>
+        <p:sp>
+          <p:nvSpPr>
+            <p:cNvPr id="63" name="Freeform 62">
+              <a:extLst>
+                <a:ext uri="{FF2B5EF4-FFF2-40B4-BE49-F238E27FC236}">
+                  <a16:creationId xmlns:a16="http://schemas.microsoft.com/office/drawing/2014/main" id="{46D3AF2C-9B2C-408F-591A-BA40C87B00EA}"/>
+                </a:ext>
+              </a:extLst>
+            </p:cNvPr>
+            <p:cNvSpPr/>
+            <p:nvPr/>
+          </p:nvSpPr>
+          <p:spPr>
+            <a:xfrm>
+              <a:off x="9462733" y="5242706"/>
+              <a:ext cx="301608" cy="179575"/>
+            </a:xfrm>
+            <a:custGeom>
+              <a:avLst/>
+              <a:gdLst>
+                <a:gd name="connsiteX0" fmla="*/ 0 w 301608"/>
+                <a:gd name="connsiteY0" fmla="*/ 0 h 179575"/>
+                <a:gd name="connsiteX1" fmla="*/ 119686 w 301608"/>
+                <a:gd name="connsiteY1" fmla="*/ 52662 h 179575"/>
+                <a:gd name="connsiteX2" fmla="*/ 210647 w 301608"/>
+                <a:gd name="connsiteY2" fmla="*/ 167560 h 179575"/>
+                <a:gd name="connsiteX3" fmla="*/ 301608 w 301608"/>
+                <a:gd name="connsiteY3" fmla="*/ 177135 h 179575"/>
+              </a:gdLst>
+              <a:ahLst/>
+              <a:cxnLst>
+                <a:cxn ang="0">
+                  <a:pos x="connsiteX0" y="connsiteY0"/>
+                </a:cxn>
+                <a:cxn ang="0">
+                  <a:pos x="connsiteX1" y="connsiteY1"/>
+                </a:cxn>
+                <a:cxn ang="0">
+                  <a:pos x="connsiteX2" y="connsiteY2"/>
+                </a:cxn>
+                <a:cxn ang="0">
+                  <a:pos x="connsiteX3" y="connsiteY3"/>
+                </a:cxn>
+              </a:cxnLst>
+              <a:rect l="l" t="t" r="r" b="b"/>
+              <a:pathLst>
+                <a:path w="301608" h="179575">
+                  <a:moveTo>
+                    <a:pt x="0" y="0"/>
+                  </a:moveTo>
+                  <a:cubicBezTo>
+                    <a:pt x="42289" y="12367"/>
+                    <a:pt x="84578" y="24735"/>
+                    <a:pt x="119686" y="52662"/>
+                  </a:cubicBezTo>
+                  <a:cubicBezTo>
+                    <a:pt x="154794" y="80589"/>
+                    <a:pt x="180327" y="146815"/>
+                    <a:pt x="210647" y="167560"/>
+                  </a:cubicBezTo>
+                  <a:cubicBezTo>
+                    <a:pt x="240967" y="188305"/>
+                    <a:pt x="179529" y="175539"/>
+                    <a:pt x="301608" y="177135"/>
+                  </a:cubicBezTo>
+                </a:path>
+              </a:pathLst>
+            </a:custGeom>
+            <a:noFill/>
+            <a:ln w="28575">
+              <a:solidFill>
+                <a:srgbClr val="00B0F0"/>
+              </a:solidFill>
+            </a:ln>
+          </p:spPr>
+          <p:style>
+            <a:lnRef idx="2">
+              <a:schemeClr val="accent1">
+                <a:shade val="15000"/>
+              </a:schemeClr>
+            </a:lnRef>
+            <a:fillRef idx="1">
+              <a:schemeClr val="accent1"/>
+            </a:fillRef>
+            <a:effectRef idx="0">
+              <a:schemeClr val="accent1"/>
+            </a:effectRef>
+            <a:fontRef idx="minor">
+              <a:schemeClr val="lt1"/>
+            </a:fontRef>
+          </p:style>
+          <p:txBody>
+            <a:bodyPr rtlCol="0" anchor="ctr"/>
+            <a:lstStyle/>
+            <a:p>
+              <a:pPr algn="ctr"/>
+              <a:endParaRPr lang="en-US"/>
+            </a:p>
+          </p:txBody>
+        </p:sp>
+        <p:sp>
+          <p:nvSpPr>
+            <p:cNvPr id="65" name="Triangle 64">
+              <a:extLst>
+                <a:ext uri="{FF2B5EF4-FFF2-40B4-BE49-F238E27FC236}">
+                  <a16:creationId xmlns:a16="http://schemas.microsoft.com/office/drawing/2014/main" id="{BDB81825-146D-00A3-8447-7D7AABD99B7A}"/>
+                </a:ext>
+              </a:extLst>
+            </p:cNvPr>
+            <p:cNvSpPr/>
+            <p:nvPr/>
+          </p:nvSpPr>
+          <p:spPr>
+            <a:xfrm rot="10800000">
+              <a:off x="2459755" y="4015407"/>
+              <a:ext cx="149301" cy="103627"/>
+            </a:xfrm>
+            <a:prstGeom prst="triangle">
+              <a:avLst/>
+            </a:prstGeom>
+            <a:noFill/>
+            <a:ln>
+              <a:solidFill>
+                <a:srgbClr val="00B0F0"/>
+              </a:solidFill>
+            </a:ln>
+          </p:spPr>
+          <p:style>
+            <a:lnRef idx="2">
+              <a:schemeClr val="accent1">
+                <a:shade val="15000"/>
+              </a:schemeClr>
+            </a:lnRef>
+            <a:fillRef idx="1">
+              <a:schemeClr val="accent1"/>
+            </a:fillRef>
+            <a:effectRef idx="0">
+              <a:schemeClr val="accent1"/>
+            </a:effectRef>
+            <a:fontRef idx="minor">
+              <a:schemeClr val="lt1"/>
+            </a:fontRef>
+          </p:style>
+          <p:txBody>
+            <a:bodyPr rtlCol="0" anchor="ctr"/>
+            <a:lstStyle/>
+            <a:p>
+              <a:pPr algn="ctr"/>
+              <a:endParaRPr lang="en-US"/>
+            </a:p>
+          </p:txBody>
+        </p:sp>
+        <p:sp>
+          <p:nvSpPr>
+            <p:cNvPr id="66" name="Triangle 65">
+              <a:extLst>
+                <a:ext uri="{FF2B5EF4-FFF2-40B4-BE49-F238E27FC236}">
+                  <a16:creationId xmlns:a16="http://schemas.microsoft.com/office/drawing/2014/main" id="{CA9207D7-4EBA-92F1-413D-424A6DE6CB24}"/>
+                </a:ext>
+              </a:extLst>
+            </p:cNvPr>
+            <p:cNvSpPr/>
+            <p:nvPr/>
+          </p:nvSpPr>
+          <p:spPr>
+            <a:xfrm rot="10800000">
+              <a:off x="3959499" y="5780597"/>
+              <a:ext cx="149301" cy="103343"/>
+            </a:xfrm>
+            <a:prstGeom prst="triangle">
+              <a:avLst/>
+            </a:prstGeom>
+            <a:noFill/>
+            <a:ln>
+              <a:solidFill>
+                <a:srgbClr val="00B0F0"/>
+              </a:solidFill>
+            </a:ln>
+          </p:spPr>
+          <p:style>
+            <a:lnRef idx="2">
+              <a:schemeClr val="accent1">
+                <a:shade val="15000"/>
+              </a:schemeClr>
+            </a:lnRef>
+            <a:fillRef idx="1">
+              <a:schemeClr val="accent1"/>
+            </a:fillRef>
+            <a:effectRef idx="0">
+              <a:schemeClr val="accent1"/>
+            </a:effectRef>
+            <a:fontRef idx="minor">
+              <a:schemeClr val="lt1"/>
+            </a:fontRef>
+          </p:style>
+          <p:txBody>
+            <a:bodyPr rtlCol="0" anchor="ctr"/>
+            <a:lstStyle/>
+            <a:p>
+              <a:pPr algn="ctr"/>
+              <a:endParaRPr lang="en-US"/>
+            </a:p>
+          </p:txBody>
+        </p:sp>
+        <p:sp>
+          <p:nvSpPr>
+            <p:cNvPr id="67" name="Triangle 66">
+              <a:extLst>
+                <a:ext uri="{FF2B5EF4-FFF2-40B4-BE49-F238E27FC236}">
+                  <a16:creationId xmlns:a16="http://schemas.microsoft.com/office/drawing/2014/main" id="{AF13D2B3-E59B-97E5-0CAD-7F4DB4DD63B6}"/>
+                </a:ext>
+              </a:extLst>
+            </p:cNvPr>
+            <p:cNvSpPr/>
+            <p:nvPr/>
+          </p:nvSpPr>
+          <p:spPr>
+            <a:xfrm rot="10800000">
+              <a:off x="7835413" y="5136437"/>
+              <a:ext cx="149301" cy="93157"/>
+            </a:xfrm>
+            <a:prstGeom prst="triangle">
+              <a:avLst/>
+            </a:prstGeom>
+            <a:noFill/>
+            <a:ln>
+              <a:solidFill>
+                <a:srgbClr val="00B0F0"/>
+              </a:solidFill>
+            </a:ln>
+          </p:spPr>
+          <p:style>
+            <a:lnRef idx="2">
+              <a:schemeClr val="accent1">
+                <a:shade val="15000"/>
+              </a:schemeClr>
+            </a:lnRef>
+            <a:fillRef idx="1">
+              <a:schemeClr val="accent1"/>
+            </a:fillRef>
+            <a:effectRef idx="0">
+              <a:schemeClr val="accent1"/>
+            </a:effectRef>
+            <a:fontRef idx="minor">
+              <a:schemeClr val="lt1"/>
+            </a:fontRef>
+          </p:style>
+          <p:txBody>
+            <a:bodyPr rtlCol="0" anchor="ctr"/>
+            <a:lstStyle/>
+            <a:p>
+              <a:pPr algn="ctr"/>
+              <a:endParaRPr lang="en-US"/>
+            </a:p>
+          </p:txBody>
+        </p:sp>
+        <p:sp>
+          <p:nvSpPr>
+            <p:cNvPr id="68" name="Regular Pentagon 67">
+              <a:extLst>
+                <a:ext uri="{FF2B5EF4-FFF2-40B4-BE49-F238E27FC236}">
+                  <a16:creationId xmlns:a16="http://schemas.microsoft.com/office/drawing/2014/main" id="{4F00517E-AEAC-6C96-0C77-14555F2193B4}"/>
+                </a:ext>
+              </a:extLst>
+            </p:cNvPr>
+            <p:cNvSpPr/>
+            <p:nvPr/>
+          </p:nvSpPr>
+          <p:spPr>
+            <a:xfrm rot="2125004">
+              <a:off x="2659972" y="3238178"/>
+              <a:ext cx="302322" cy="272245"/>
+            </a:xfrm>
+            <a:prstGeom prst="pentagon">
+              <a:avLst/>
+            </a:prstGeom>
+            <a:solidFill>
+              <a:srgbClr val="FF0000"/>
+            </a:solidFill>
+            <a:ln>
+              <a:solidFill>
+                <a:srgbClr val="C00000"/>
+              </a:solidFill>
+            </a:ln>
+          </p:spPr>
+          <p:style>
+            <a:lnRef idx="2">
+              <a:schemeClr val="accent1">
+                <a:shade val="15000"/>
+              </a:schemeClr>
+            </a:lnRef>
+            <a:fillRef idx="1">
+              <a:schemeClr val="accent1"/>
+            </a:fillRef>
+            <a:effectRef idx="0">
+              <a:schemeClr val="accent1"/>
+            </a:effectRef>
+            <a:fontRef idx="minor">
+              <a:schemeClr val="lt1"/>
+            </a:fontRef>
+          </p:style>
+          <p:txBody>
+            <a:bodyPr rtlCol="0" anchor="ctr"/>
+            <a:lstStyle/>
+            <a:p>
+              <a:pPr algn="ctr"/>
+              <a:endParaRPr lang="en-US"/>
+            </a:p>
+          </p:txBody>
+        </p:sp>
+        <p:sp>
+          <p:nvSpPr>
+            <p:cNvPr id="69" name="Regular Pentagon 68">
+              <a:extLst>
+                <a:ext uri="{FF2B5EF4-FFF2-40B4-BE49-F238E27FC236}">
+                  <a16:creationId xmlns:a16="http://schemas.microsoft.com/office/drawing/2014/main" id="{28DAA753-79AA-E8F9-9919-8F4998F7A2F0}"/>
+                </a:ext>
+              </a:extLst>
+            </p:cNvPr>
+            <p:cNvSpPr/>
+            <p:nvPr/>
+          </p:nvSpPr>
+          <p:spPr>
+            <a:xfrm rot="2125004">
+              <a:off x="4643664" y="4536610"/>
+              <a:ext cx="302322" cy="272245"/>
+            </a:xfrm>
+            <a:prstGeom prst="pentagon">
+              <a:avLst/>
+            </a:prstGeom>
+            <a:solidFill>
+              <a:srgbClr val="FF0000"/>
+            </a:solidFill>
+            <a:ln>
+              <a:solidFill>
+                <a:srgbClr val="C00000"/>
+              </a:solidFill>
+            </a:ln>
+          </p:spPr>
+          <p:style>
+            <a:lnRef idx="2">
+              <a:schemeClr val="accent1">
+                <a:shade val="15000"/>
+              </a:schemeClr>
+            </a:lnRef>
+            <a:fillRef idx="1">
+              <a:schemeClr val="accent1"/>
+            </a:fillRef>
+            <a:effectRef idx="0">
+              <a:schemeClr val="accent1"/>
+            </a:effectRef>
+            <a:fontRef idx="minor">
+              <a:schemeClr val="lt1"/>
+            </a:fontRef>
+          </p:style>
+          <p:txBody>
+            <a:bodyPr rtlCol="0" anchor="ctr"/>
+            <a:lstStyle/>
+            <a:p>
+              <a:pPr algn="ctr"/>
+              <a:endParaRPr lang="en-US"/>
+            </a:p>
+          </p:txBody>
+        </p:sp>
+        <p:sp>
+          <p:nvSpPr>
+            <p:cNvPr id="70" name="Regular Pentagon 69">
+              <a:extLst>
+                <a:ext uri="{FF2B5EF4-FFF2-40B4-BE49-F238E27FC236}">
+                  <a16:creationId xmlns:a16="http://schemas.microsoft.com/office/drawing/2014/main" id="{17B8F875-2560-3235-BFDF-1E16AFA8C840}"/>
+                </a:ext>
+              </a:extLst>
+            </p:cNvPr>
+            <p:cNvSpPr/>
+            <p:nvPr/>
+          </p:nvSpPr>
+          <p:spPr>
+            <a:xfrm rot="2125004">
+              <a:off x="8340337" y="4536612"/>
+              <a:ext cx="302322" cy="272245"/>
+            </a:xfrm>
+            <a:prstGeom prst="pentagon">
+              <a:avLst/>
+            </a:prstGeom>
+            <a:solidFill>
+              <a:srgbClr val="FF0000"/>
+            </a:solidFill>
+            <a:ln>
+              <a:solidFill>
+                <a:srgbClr val="C00000"/>
+              </a:solidFill>
+            </a:ln>
+          </p:spPr>
+          <p:style>
+            <a:lnRef idx="2">
+              <a:schemeClr val="accent1">
+                <a:shade val="15000"/>
+              </a:schemeClr>
+            </a:lnRef>
+            <a:fillRef idx="1">
+              <a:schemeClr val="accent1"/>
+            </a:fillRef>
+            <a:effectRef idx="0">
+              <a:schemeClr val="accent1"/>
+            </a:effectRef>
+            <a:fontRef idx="minor">
+              <a:schemeClr val="lt1"/>
+            </a:fontRef>
+          </p:style>
+          <p:txBody>
+            <a:bodyPr rtlCol="0" anchor="ctr"/>
+            <a:lstStyle/>
+            <a:p>
+              <a:pPr algn="ctr"/>
+              <a:endParaRPr lang="en-US"/>
+            </a:p>
+          </p:txBody>
+        </p:sp>
+        <p:cxnSp>
+          <p:nvCxnSpPr>
+            <p:cNvPr id="72" name="Straight Connector 71">
+              <a:extLst>
+                <a:ext uri="{FF2B5EF4-FFF2-40B4-BE49-F238E27FC236}">
+                  <a16:creationId xmlns:a16="http://schemas.microsoft.com/office/drawing/2014/main" id="{9ED195A9-8FFF-6D68-35CE-8F18D6E1C89F}"/>
+                </a:ext>
+              </a:extLst>
+            </p:cNvPr>
+            <p:cNvCxnSpPr>
+              <a:cxnSpLocks/>
+              <a:stCxn id="68" idx="4"/>
+            </p:cNvCxnSpPr>
+            <p:nvPr/>
+          </p:nvCxnSpPr>
+          <p:spPr>
+            <a:xfrm>
+              <a:off x="2808383" y="3539374"/>
+              <a:ext cx="2063" cy="590367"/>
+            </a:xfrm>
+            <a:prstGeom prst="line">
+              <a:avLst/>
+            </a:prstGeom>
+            <a:ln w="38100">
+              <a:solidFill>
+                <a:srgbClr val="C00000">
+                  <a:alpha val="48565"/>
+                </a:srgbClr>
+              </a:solidFill>
+              <a:prstDash val="sysDot"/>
+            </a:ln>
+          </p:spPr>
+          <p:style>
+            <a:lnRef idx="2">
+              <a:schemeClr val="accent1"/>
+            </a:lnRef>
+            <a:fillRef idx="0">
+              <a:schemeClr val="accent1"/>
+            </a:fillRef>
+            <a:effectRef idx="1">
+              <a:schemeClr val="accent1"/>
+            </a:effectRef>
+            <a:fontRef idx="minor">
+              <a:schemeClr val="tx1"/>
+            </a:fontRef>
+          </p:style>
+        </p:cxnSp>
+        <p:cxnSp>
+          <p:nvCxnSpPr>
+            <p:cNvPr id="77" name="Straight Connector 76">
+              <a:extLst>
+                <a:ext uri="{FF2B5EF4-FFF2-40B4-BE49-F238E27FC236}">
+                  <a16:creationId xmlns:a16="http://schemas.microsoft.com/office/drawing/2014/main" id="{13C478A8-68D4-40A9-946E-A6DAA721F357}"/>
+                </a:ext>
+              </a:extLst>
+            </p:cNvPr>
+            <p:cNvCxnSpPr>
+              <a:cxnSpLocks/>
+            </p:cNvCxnSpPr>
+            <p:nvPr/>
+          </p:nvCxnSpPr>
+          <p:spPr>
+            <a:xfrm>
+              <a:off x="4789964" y="4859040"/>
+              <a:ext cx="1032" cy="1008123"/>
+            </a:xfrm>
+            <a:prstGeom prst="line">
+              <a:avLst/>
+            </a:prstGeom>
+            <a:ln w="38100">
+              <a:solidFill>
+                <a:srgbClr val="C00000">
+                  <a:alpha val="48565"/>
+                </a:srgbClr>
+              </a:solidFill>
+              <a:prstDash val="sysDot"/>
+            </a:ln>
+          </p:spPr>
+          <p:style>
+            <a:lnRef idx="2">
+              <a:schemeClr val="accent1"/>
+            </a:lnRef>
+            <a:fillRef idx="0">
+              <a:schemeClr val="accent1"/>
+            </a:fillRef>
+            <a:effectRef idx="1">
+              <a:schemeClr val="accent1"/>
+            </a:effectRef>
+            <a:fontRef idx="minor">
+              <a:schemeClr val="tx1"/>
+            </a:fontRef>
+          </p:style>
+        </p:cxnSp>
+        <p:cxnSp>
+          <p:nvCxnSpPr>
+            <p:cNvPr id="79" name="Straight Connector 78">
+              <a:extLst>
+                <a:ext uri="{FF2B5EF4-FFF2-40B4-BE49-F238E27FC236}">
+                  <a16:creationId xmlns:a16="http://schemas.microsoft.com/office/drawing/2014/main" id="{50CA631E-9B9B-AEBB-7F7A-9D0D138B4498}"/>
+                </a:ext>
+              </a:extLst>
+            </p:cNvPr>
+            <p:cNvCxnSpPr>
+              <a:cxnSpLocks/>
+            </p:cNvCxnSpPr>
+            <p:nvPr/>
+          </p:nvCxnSpPr>
+          <p:spPr>
+            <a:xfrm>
+              <a:off x="8490466" y="4859040"/>
+              <a:ext cx="0" cy="383666"/>
+            </a:xfrm>
+            <a:prstGeom prst="line">
+              <a:avLst/>
+            </a:prstGeom>
+            <a:ln w="38100">
+              <a:solidFill>
+                <a:srgbClr val="C00000">
+                  <a:alpha val="48565"/>
+                </a:srgbClr>
+              </a:solidFill>
+              <a:prstDash val="sysDot"/>
+            </a:ln>
+          </p:spPr>
+          <p:style>
+            <a:lnRef idx="2">
+              <a:schemeClr val="accent1"/>
+            </a:lnRef>
+            <a:fillRef idx="0">
+              <a:schemeClr val="accent1"/>
+            </a:fillRef>
+            <a:effectRef idx="1">
+              <a:schemeClr val="accent1"/>
+            </a:effectRef>
+            <a:fontRef idx="minor">
+              <a:schemeClr val="tx1"/>
+            </a:fontRef>
+          </p:style>
+        </p:cxnSp>
+        <p:sp>
+          <p:nvSpPr>
+            <p:cNvPr id="84" name="Freeform 83">
+              <a:extLst>
+                <a:ext uri="{FF2B5EF4-FFF2-40B4-BE49-F238E27FC236}">
+                  <a16:creationId xmlns:a16="http://schemas.microsoft.com/office/drawing/2014/main" id="{FE3D0911-EAC7-38FC-7B2D-38D7B13F9C54}"/>
+                </a:ext>
+              </a:extLst>
+            </p:cNvPr>
+            <p:cNvSpPr/>
+            <p:nvPr/>
+          </p:nvSpPr>
+          <p:spPr>
+            <a:xfrm>
+              <a:off x="7131802" y="5502938"/>
+              <a:ext cx="190851" cy="165139"/>
+            </a:xfrm>
+            <a:custGeom>
+              <a:avLst/>
+              <a:gdLst>
+                <a:gd name="connsiteX0" fmla="*/ 69981 w 503444"/>
+                <a:gd name="connsiteY0" fmla="*/ 0 h 407268"/>
+                <a:gd name="connsiteX1" fmla="*/ 10748 w 503444"/>
+                <a:gd name="connsiteY1" fmla="*/ 236930 h 407268"/>
+                <a:gd name="connsiteX2" fmla="*/ 262486 w 503444"/>
+                <a:gd name="connsiteY2" fmla="*/ 407223 h 407268"/>
+                <a:gd name="connsiteX3" fmla="*/ 495713 w 503444"/>
+                <a:gd name="connsiteY3" fmla="*/ 251738 h 407268"/>
+                <a:gd name="connsiteX4" fmla="*/ 425375 w 503444"/>
+                <a:gd name="connsiteY4" fmla="*/ 44425 h 407268"/>
+                <a:gd name="connsiteX5" fmla="*/ 206956 w 503444"/>
+                <a:gd name="connsiteY5" fmla="*/ 70339 h 407268"/>
+                <a:gd name="connsiteX6" fmla="*/ 173637 w 503444"/>
+                <a:gd name="connsiteY6" fmla="*/ 144379 h 407268"/>
+                <a:gd name="connsiteX7" fmla="*/ 181041 w 503444"/>
+                <a:gd name="connsiteY7" fmla="*/ 262844 h 407268"/>
+                <a:gd name="connsiteX8" fmla="*/ 343930 w 503444"/>
+                <a:gd name="connsiteY8" fmla="*/ 192506 h 407268"/>
+                <a:gd name="connsiteX9" fmla="*/ 288400 w 503444"/>
+                <a:gd name="connsiteY9" fmla="*/ 155485 h 407268"/>
+              </a:gdLst>
+              <a:ahLst/>
+              <a:cxnLst>
+                <a:cxn ang="0">
+                  <a:pos x="connsiteX0" y="connsiteY0"/>
+                </a:cxn>
+                <a:cxn ang="0">
+                  <a:pos x="connsiteX1" y="connsiteY1"/>
+                </a:cxn>
+                <a:cxn ang="0">
+                  <a:pos x="connsiteX2" y="connsiteY2"/>
+                </a:cxn>
+                <a:cxn ang="0">
+                  <a:pos x="connsiteX3" y="connsiteY3"/>
+                </a:cxn>
+                <a:cxn ang="0">
+                  <a:pos x="connsiteX4" y="connsiteY4"/>
+                </a:cxn>
+                <a:cxn ang="0">
+                  <a:pos x="connsiteX5" y="connsiteY5"/>
+                </a:cxn>
+                <a:cxn ang="0">
+                  <a:pos x="connsiteX6" y="connsiteY6"/>
+                </a:cxn>
+                <a:cxn ang="0">
+                  <a:pos x="connsiteX7" y="connsiteY7"/>
+                </a:cxn>
+                <a:cxn ang="0">
+                  <a:pos x="connsiteX8" y="connsiteY8"/>
+                </a:cxn>
+                <a:cxn ang="0">
+                  <a:pos x="connsiteX9" y="connsiteY9"/>
+                </a:cxn>
+              </a:cxnLst>
+              <a:rect l="l" t="t" r="r" b="b"/>
+              <a:pathLst>
+                <a:path w="503444" h="407268">
+                  <a:moveTo>
+                    <a:pt x="69981" y="0"/>
+                  </a:moveTo>
+                  <a:cubicBezTo>
+                    <a:pt x="24322" y="84530"/>
+                    <a:pt x="-21336" y="169060"/>
+                    <a:pt x="10748" y="236930"/>
+                  </a:cubicBezTo>
+                  <a:cubicBezTo>
+                    <a:pt x="42832" y="304800"/>
+                    <a:pt x="181659" y="404755"/>
+                    <a:pt x="262486" y="407223"/>
+                  </a:cubicBezTo>
+                  <a:cubicBezTo>
+                    <a:pt x="343313" y="409691"/>
+                    <a:pt x="468565" y="312204"/>
+                    <a:pt x="495713" y="251738"/>
+                  </a:cubicBezTo>
+                  <a:cubicBezTo>
+                    <a:pt x="522861" y="191272"/>
+                    <a:pt x="473501" y="74658"/>
+                    <a:pt x="425375" y="44425"/>
+                  </a:cubicBezTo>
+                  <a:cubicBezTo>
+                    <a:pt x="377249" y="14192"/>
+                    <a:pt x="248912" y="53680"/>
+                    <a:pt x="206956" y="70339"/>
+                  </a:cubicBezTo>
+                  <a:cubicBezTo>
+                    <a:pt x="165000" y="86998"/>
+                    <a:pt x="177956" y="112295"/>
+                    <a:pt x="173637" y="144379"/>
+                  </a:cubicBezTo>
+                  <a:cubicBezTo>
+                    <a:pt x="169318" y="176463"/>
+                    <a:pt x="152659" y="254823"/>
+                    <a:pt x="181041" y="262844"/>
+                  </a:cubicBezTo>
+                  <a:cubicBezTo>
+                    <a:pt x="209423" y="270865"/>
+                    <a:pt x="326037" y="210399"/>
+                    <a:pt x="343930" y="192506"/>
+                  </a:cubicBezTo>
+                  <a:cubicBezTo>
+                    <a:pt x="361823" y="174613"/>
+                    <a:pt x="302591" y="156102"/>
+                    <a:pt x="288400" y="155485"/>
+                  </a:cubicBezTo>
+                </a:path>
+              </a:pathLst>
+            </a:custGeom>
+            <a:noFill/>
+            <a:ln>
+              <a:solidFill>
+                <a:srgbClr val="00B0F0"/>
+              </a:solidFill>
+            </a:ln>
+          </p:spPr>
+          <p:style>
+            <a:lnRef idx="2">
+              <a:schemeClr val="accent1">
+                <a:shade val="15000"/>
+              </a:schemeClr>
+            </a:lnRef>
+            <a:fillRef idx="1">
+              <a:schemeClr val="accent1"/>
+            </a:fillRef>
+            <a:effectRef idx="0">
+              <a:schemeClr val="accent1"/>
+            </a:effectRef>
+            <a:fontRef idx="minor">
+              <a:schemeClr val="lt1"/>
+            </a:fontRef>
+          </p:style>
+          <p:txBody>
+            <a:bodyPr rtlCol="0" anchor="ctr"/>
+            <a:lstStyle/>
+            <a:p>
+              <a:pPr algn="ctr"/>
+              <a:endParaRPr lang="en-US"/>
+            </a:p>
+          </p:txBody>
+        </p:sp>
+        <p:sp>
+          <p:nvSpPr>
+            <p:cNvPr id="85" name="Freeform 84">
+              <a:extLst>
+                <a:ext uri="{FF2B5EF4-FFF2-40B4-BE49-F238E27FC236}">
+                  <a16:creationId xmlns:a16="http://schemas.microsoft.com/office/drawing/2014/main" id="{7F20C2A3-9330-A4EE-507F-636BDAEBC75B}"/>
+                </a:ext>
+              </a:extLst>
+            </p:cNvPr>
+            <p:cNvSpPr/>
+            <p:nvPr/>
+          </p:nvSpPr>
+          <p:spPr>
+            <a:xfrm rot="5203966">
+              <a:off x="7341523" y="5366837"/>
+              <a:ext cx="190851" cy="165139"/>
+            </a:xfrm>
+            <a:custGeom>
+              <a:avLst/>
+              <a:gdLst>
+                <a:gd name="connsiteX0" fmla="*/ 69981 w 503444"/>
+                <a:gd name="connsiteY0" fmla="*/ 0 h 407268"/>
+                <a:gd name="connsiteX1" fmla="*/ 10748 w 503444"/>
+                <a:gd name="connsiteY1" fmla="*/ 236930 h 407268"/>
+                <a:gd name="connsiteX2" fmla="*/ 262486 w 503444"/>
+                <a:gd name="connsiteY2" fmla="*/ 407223 h 407268"/>
+                <a:gd name="connsiteX3" fmla="*/ 495713 w 503444"/>
+                <a:gd name="connsiteY3" fmla="*/ 251738 h 407268"/>
+                <a:gd name="connsiteX4" fmla="*/ 425375 w 503444"/>
+                <a:gd name="connsiteY4" fmla="*/ 44425 h 407268"/>
+                <a:gd name="connsiteX5" fmla="*/ 206956 w 503444"/>
+                <a:gd name="connsiteY5" fmla="*/ 70339 h 407268"/>
+                <a:gd name="connsiteX6" fmla="*/ 173637 w 503444"/>
+                <a:gd name="connsiteY6" fmla="*/ 144379 h 407268"/>
+                <a:gd name="connsiteX7" fmla="*/ 181041 w 503444"/>
+                <a:gd name="connsiteY7" fmla="*/ 262844 h 407268"/>
+                <a:gd name="connsiteX8" fmla="*/ 343930 w 503444"/>
+                <a:gd name="connsiteY8" fmla="*/ 192506 h 407268"/>
+                <a:gd name="connsiteX9" fmla="*/ 288400 w 503444"/>
+                <a:gd name="connsiteY9" fmla="*/ 155485 h 407268"/>
+              </a:gdLst>
+              <a:ahLst/>
+              <a:cxnLst>
+                <a:cxn ang="0">
+                  <a:pos x="connsiteX0" y="connsiteY0"/>
+                </a:cxn>
+                <a:cxn ang="0">
+                  <a:pos x="connsiteX1" y="connsiteY1"/>
+                </a:cxn>
+                <a:cxn ang="0">
+                  <a:pos x="connsiteX2" y="connsiteY2"/>
+                </a:cxn>
+                <a:cxn ang="0">
+                  <a:pos x="connsiteX3" y="connsiteY3"/>
+                </a:cxn>
+                <a:cxn ang="0">
+                  <a:pos x="connsiteX4" y="connsiteY4"/>
+                </a:cxn>
+                <a:cxn ang="0">
+                  <a:pos x="connsiteX5" y="connsiteY5"/>
+                </a:cxn>
+                <a:cxn ang="0">
+                  <a:pos x="connsiteX6" y="connsiteY6"/>
+                </a:cxn>
+                <a:cxn ang="0">
+                  <a:pos x="connsiteX7" y="connsiteY7"/>
+                </a:cxn>
+                <a:cxn ang="0">
+                  <a:pos x="connsiteX8" y="connsiteY8"/>
+                </a:cxn>
+                <a:cxn ang="0">
+                  <a:pos x="connsiteX9" y="connsiteY9"/>
+                </a:cxn>
+              </a:cxnLst>
+              <a:rect l="l" t="t" r="r" b="b"/>
+              <a:pathLst>
+                <a:path w="503444" h="407268">
+                  <a:moveTo>
+                    <a:pt x="69981" y="0"/>
+                  </a:moveTo>
+                  <a:cubicBezTo>
+                    <a:pt x="24322" y="84530"/>
+                    <a:pt x="-21336" y="169060"/>
+                    <a:pt x="10748" y="236930"/>
+                  </a:cubicBezTo>
+                  <a:cubicBezTo>
+                    <a:pt x="42832" y="304800"/>
+                    <a:pt x="181659" y="404755"/>
+                    <a:pt x="262486" y="407223"/>
+                  </a:cubicBezTo>
+                  <a:cubicBezTo>
+                    <a:pt x="343313" y="409691"/>
+                    <a:pt x="468565" y="312204"/>
+                    <a:pt x="495713" y="251738"/>
+                  </a:cubicBezTo>
+                  <a:cubicBezTo>
+                    <a:pt x="522861" y="191272"/>
+                    <a:pt x="473501" y="74658"/>
+                    <a:pt x="425375" y="44425"/>
+                  </a:cubicBezTo>
+                  <a:cubicBezTo>
+                    <a:pt x="377249" y="14192"/>
+                    <a:pt x="248912" y="53680"/>
+                    <a:pt x="206956" y="70339"/>
+                  </a:cubicBezTo>
+                  <a:cubicBezTo>
+                    <a:pt x="165000" y="86998"/>
+                    <a:pt x="177956" y="112295"/>
+                    <a:pt x="173637" y="144379"/>
+                  </a:cubicBezTo>
+                  <a:cubicBezTo>
+                    <a:pt x="169318" y="176463"/>
+                    <a:pt x="152659" y="254823"/>
+                    <a:pt x="181041" y="262844"/>
+                  </a:cubicBezTo>
+                  <a:cubicBezTo>
+                    <a:pt x="209423" y="270865"/>
+                    <a:pt x="326037" y="210399"/>
+                    <a:pt x="343930" y="192506"/>
+                  </a:cubicBezTo>
+                  <a:cubicBezTo>
+                    <a:pt x="361823" y="174613"/>
+                    <a:pt x="302591" y="156102"/>
+                    <a:pt x="288400" y="155485"/>
+                  </a:cubicBezTo>
+                </a:path>
+              </a:pathLst>
+            </a:custGeom>
+            <a:noFill/>
+            <a:ln>
+              <a:solidFill>
+                <a:srgbClr val="00B0F0"/>
+              </a:solidFill>
+            </a:ln>
+          </p:spPr>
+          <p:style>
+            <a:lnRef idx="2">
+              <a:schemeClr val="accent1">
+                <a:shade val="15000"/>
+              </a:schemeClr>
+            </a:lnRef>
+            <a:fillRef idx="1">
+              <a:schemeClr val="accent1"/>
+            </a:fillRef>
+            <a:effectRef idx="0">
+              <a:schemeClr val="accent1"/>
+            </a:effectRef>
+            <a:fontRef idx="minor">
+              <a:schemeClr val="lt1"/>
+            </a:fontRef>
+          </p:style>
+          <p:txBody>
+            <a:bodyPr rtlCol="0" anchor="ctr"/>
+            <a:lstStyle/>
+            <a:p>
+              <a:pPr algn="ctr"/>
+              <a:endParaRPr lang="en-US"/>
+            </a:p>
+          </p:txBody>
+        </p:sp>
+        <p:sp>
+          <p:nvSpPr>
+            <p:cNvPr id="86" name="Freeform 85">
+              <a:extLst>
+                <a:ext uri="{FF2B5EF4-FFF2-40B4-BE49-F238E27FC236}">
+                  <a16:creationId xmlns:a16="http://schemas.microsoft.com/office/drawing/2014/main" id="{F6FBA395-6E0E-713B-85C8-1D31C9CDF84D}"/>
+                </a:ext>
+              </a:extLst>
+            </p:cNvPr>
+            <p:cNvSpPr/>
+            <p:nvPr/>
+          </p:nvSpPr>
+          <p:spPr>
+            <a:xfrm rot="17958055">
+              <a:off x="6961708" y="5699562"/>
+              <a:ext cx="190851" cy="165139"/>
+            </a:xfrm>
+            <a:custGeom>
+              <a:avLst/>
+              <a:gdLst>
+                <a:gd name="connsiteX0" fmla="*/ 69981 w 503444"/>
+                <a:gd name="connsiteY0" fmla="*/ 0 h 407268"/>
+                <a:gd name="connsiteX1" fmla="*/ 10748 w 503444"/>
+                <a:gd name="connsiteY1" fmla="*/ 236930 h 407268"/>
+                <a:gd name="connsiteX2" fmla="*/ 262486 w 503444"/>
+                <a:gd name="connsiteY2" fmla="*/ 407223 h 407268"/>
+                <a:gd name="connsiteX3" fmla="*/ 495713 w 503444"/>
+                <a:gd name="connsiteY3" fmla="*/ 251738 h 407268"/>
+                <a:gd name="connsiteX4" fmla="*/ 425375 w 503444"/>
+                <a:gd name="connsiteY4" fmla="*/ 44425 h 407268"/>
+                <a:gd name="connsiteX5" fmla="*/ 206956 w 503444"/>
+                <a:gd name="connsiteY5" fmla="*/ 70339 h 407268"/>
+                <a:gd name="connsiteX6" fmla="*/ 173637 w 503444"/>
+                <a:gd name="connsiteY6" fmla="*/ 144379 h 407268"/>
+                <a:gd name="connsiteX7" fmla="*/ 181041 w 503444"/>
+                <a:gd name="connsiteY7" fmla="*/ 262844 h 407268"/>
+                <a:gd name="connsiteX8" fmla="*/ 343930 w 503444"/>
+                <a:gd name="connsiteY8" fmla="*/ 192506 h 407268"/>
+                <a:gd name="connsiteX9" fmla="*/ 288400 w 503444"/>
+                <a:gd name="connsiteY9" fmla="*/ 155485 h 407268"/>
+              </a:gdLst>
+              <a:ahLst/>
+              <a:cxnLst>
+                <a:cxn ang="0">
+                  <a:pos x="connsiteX0" y="connsiteY0"/>
+                </a:cxn>
+                <a:cxn ang="0">
+                  <a:pos x="connsiteX1" y="connsiteY1"/>
+                </a:cxn>
+                <a:cxn ang="0">
+                  <a:pos x="connsiteX2" y="connsiteY2"/>
+                </a:cxn>
+                <a:cxn ang="0">
+                  <a:pos x="connsiteX3" y="connsiteY3"/>
+                </a:cxn>
+                <a:cxn ang="0">
+                  <a:pos x="connsiteX4" y="connsiteY4"/>
+                </a:cxn>
+                <a:cxn ang="0">
+                  <a:pos x="connsiteX5" y="connsiteY5"/>
+                </a:cxn>
+                <a:cxn ang="0">
+                  <a:pos x="connsiteX6" y="connsiteY6"/>
+                </a:cxn>
+                <a:cxn ang="0">
+                  <a:pos x="connsiteX7" y="connsiteY7"/>
+                </a:cxn>
+                <a:cxn ang="0">
+                  <a:pos x="connsiteX8" y="connsiteY8"/>
+                </a:cxn>
+                <a:cxn ang="0">
+                  <a:pos x="connsiteX9" y="connsiteY9"/>
+                </a:cxn>
+              </a:cxnLst>
+              <a:rect l="l" t="t" r="r" b="b"/>
+              <a:pathLst>
+                <a:path w="503444" h="407268">
+                  <a:moveTo>
+                    <a:pt x="69981" y="0"/>
+                  </a:moveTo>
+                  <a:cubicBezTo>
+                    <a:pt x="24322" y="84530"/>
+                    <a:pt x="-21336" y="169060"/>
+                    <a:pt x="10748" y="236930"/>
+                  </a:cubicBezTo>
+                  <a:cubicBezTo>
+                    <a:pt x="42832" y="304800"/>
+                    <a:pt x="181659" y="404755"/>
+                    <a:pt x="262486" y="407223"/>
+                  </a:cubicBezTo>
+                  <a:cubicBezTo>
+                    <a:pt x="343313" y="409691"/>
+                    <a:pt x="468565" y="312204"/>
+                    <a:pt x="495713" y="251738"/>
+                  </a:cubicBezTo>
+                  <a:cubicBezTo>
+                    <a:pt x="522861" y="191272"/>
+                    <a:pt x="473501" y="74658"/>
+                    <a:pt x="425375" y="44425"/>
+                  </a:cubicBezTo>
+                  <a:cubicBezTo>
+                    <a:pt x="377249" y="14192"/>
+                    <a:pt x="248912" y="53680"/>
+                    <a:pt x="206956" y="70339"/>
+                  </a:cubicBezTo>
+                  <a:cubicBezTo>
+                    <a:pt x="165000" y="86998"/>
+                    <a:pt x="177956" y="112295"/>
+                    <a:pt x="173637" y="144379"/>
+                  </a:cubicBezTo>
+                  <a:cubicBezTo>
+                    <a:pt x="169318" y="176463"/>
+                    <a:pt x="152659" y="254823"/>
+                    <a:pt x="181041" y="262844"/>
+                  </a:cubicBezTo>
+                  <a:cubicBezTo>
+                    <a:pt x="209423" y="270865"/>
+                    <a:pt x="326037" y="210399"/>
+                    <a:pt x="343930" y="192506"/>
+                  </a:cubicBezTo>
+                  <a:cubicBezTo>
+                    <a:pt x="361823" y="174613"/>
+                    <a:pt x="302591" y="156102"/>
+                    <a:pt x="288400" y="155485"/>
+                  </a:cubicBezTo>
+                </a:path>
+              </a:pathLst>
+            </a:custGeom>
+            <a:noFill/>
+            <a:ln>
+              <a:solidFill>
+                <a:srgbClr val="00B0F0"/>
+              </a:solidFill>
+            </a:ln>
+          </p:spPr>
+          <p:style>
+            <a:lnRef idx="2">
+              <a:schemeClr val="accent1">
+                <a:shade val="15000"/>
+              </a:schemeClr>
+            </a:lnRef>
+            <a:fillRef idx="1">
+              <a:schemeClr val="accent1"/>
+            </a:fillRef>
+            <a:effectRef idx="0">
+              <a:schemeClr val="accent1"/>
+            </a:effectRef>
+            <a:fontRef idx="minor">
+              <a:schemeClr val="lt1"/>
+            </a:fontRef>
+          </p:style>
+          <p:txBody>
+            <a:bodyPr rtlCol="0" anchor="ctr"/>
+            <a:lstStyle/>
+            <a:p>
+              <a:pPr algn="ctr"/>
+              <a:endParaRPr lang="en-US"/>
+            </a:p>
+          </p:txBody>
+        </p:sp>
+        <p:sp>
+          <p:nvSpPr>
+            <p:cNvPr id="87" name="Freeform 86">
+              <a:extLst>
+                <a:ext uri="{FF2B5EF4-FFF2-40B4-BE49-F238E27FC236}">
+                  <a16:creationId xmlns:a16="http://schemas.microsoft.com/office/drawing/2014/main" id="{28A61DA6-9B31-B4B4-30DA-6BCB6C0AF0F5}"/>
+                </a:ext>
+              </a:extLst>
+            </p:cNvPr>
+            <p:cNvSpPr/>
+            <p:nvPr/>
+          </p:nvSpPr>
+          <p:spPr>
+            <a:xfrm rot="13496133">
+              <a:off x="7240438" y="5715837"/>
+              <a:ext cx="190851" cy="165139"/>
+            </a:xfrm>
+            <a:custGeom>
+              <a:avLst/>
+              <a:gdLst>
+                <a:gd name="connsiteX0" fmla="*/ 69981 w 503444"/>
+                <a:gd name="connsiteY0" fmla="*/ 0 h 407268"/>
+                <a:gd name="connsiteX1" fmla="*/ 10748 w 503444"/>
+                <a:gd name="connsiteY1" fmla="*/ 236930 h 407268"/>
+                <a:gd name="connsiteX2" fmla="*/ 262486 w 503444"/>
+                <a:gd name="connsiteY2" fmla="*/ 407223 h 407268"/>
+                <a:gd name="connsiteX3" fmla="*/ 495713 w 503444"/>
+                <a:gd name="connsiteY3" fmla="*/ 251738 h 407268"/>
+                <a:gd name="connsiteX4" fmla="*/ 425375 w 503444"/>
+                <a:gd name="connsiteY4" fmla="*/ 44425 h 407268"/>
+                <a:gd name="connsiteX5" fmla="*/ 206956 w 503444"/>
+                <a:gd name="connsiteY5" fmla="*/ 70339 h 407268"/>
+                <a:gd name="connsiteX6" fmla="*/ 173637 w 503444"/>
+                <a:gd name="connsiteY6" fmla="*/ 144379 h 407268"/>
+                <a:gd name="connsiteX7" fmla="*/ 181041 w 503444"/>
+                <a:gd name="connsiteY7" fmla="*/ 262844 h 407268"/>
+                <a:gd name="connsiteX8" fmla="*/ 343930 w 503444"/>
+                <a:gd name="connsiteY8" fmla="*/ 192506 h 407268"/>
+                <a:gd name="connsiteX9" fmla="*/ 288400 w 503444"/>
+                <a:gd name="connsiteY9" fmla="*/ 155485 h 407268"/>
+              </a:gdLst>
+              <a:ahLst/>
+              <a:cxnLst>
+                <a:cxn ang="0">
+                  <a:pos x="connsiteX0" y="connsiteY0"/>
+                </a:cxn>
+                <a:cxn ang="0">
+                  <a:pos x="connsiteX1" y="connsiteY1"/>
+                </a:cxn>
+                <a:cxn ang="0">
+                  <a:pos x="connsiteX2" y="connsiteY2"/>
+                </a:cxn>
+                <a:cxn ang="0">
+                  <a:pos x="connsiteX3" y="connsiteY3"/>
+                </a:cxn>
+                <a:cxn ang="0">
+                  <a:pos x="connsiteX4" y="connsiteY4"/>
+                </a:cxn>
+                <a:cxn ang="0">
+                  <a:pos x="connsiteX5" y="connsiteY5"/>
+                </a:cxn>
+                <a:cxn ang="0">
+                  <a:pos x="connsiteX6" y="connsiteY6"/>
+                </a:cxn>
+                <a:cxn ang="0">
+                  <a:pos x="connsiteX7" y="connsiteY7"/>
+                </a:cxn>
+                <a:cxn ang="0">
+                  <a:pos x="connsiteX8" y="connsiteY8"/>
+                </a:cxn>
+                <a:cxn ang="0">
+                  <a:pos x="connsiteX9" y="connsiteY9"/>
+                </a:cxn>
+              </a:cxnLst>
+              <a:rect l="l" t="t" r="r" b="b"/>
+              <a:pathLst>
+                <a:path w="503444" h="407268">
+                  <a:moveTo>
+                    <a:pt x="69981" y="0"/>
+                  </a:moveTo>
+                  <a:cubicBezTo>
+                    <a:pt x="24322" y="84530"/>
+                    <a:pt x="-21336" y="169060"/>
+                    <a:pt x="10748" y="236930"/>
+                  </a:cubicBezTo>
+                  <a:cubicBezTo>
+                    <a:pt x="42832" y="304800"/>
+                    <a:pt x="181659" y="404755"/>
+                    <a:pt x="262486" y="407223"/>
+                  </a:cubicBezTo>
+                  <a:cubicBezTo>
+                    <a:pt x="343313" y="409691"/>
+                    <a:pt x="468565" y="312204"/>
+                    <a:pt x="495713" y="251738"/>
+                  </a:cubicBezTo>
+                  <a:cubicBezTo>
+                    <a:pt x="522861" y="191272"/>
+                    <a:pt x="473501" y="74658"/>
+                    <a:pt x="425375" y="44425"/>
+                  </a:cubicBezTo>
+                  <a:cubicBezTo>
+                    <a:pt x="377249" y="14192"/>
+                    <a:pt x="248912" y="53680"/>
+                    <a:pt x="206956" y="70339"/>
+                  </a:cubicBezTo>
+                  <a:cubicBezTo>
+                    <a:pt x="165000" y="86998"/>
+                    <a:pt x="177956" y="112295"/>
+                    <a:pt x="173637" y="144379"/>
+                  </a:cubicBezTo>
+                  <a:cubicBezTo>
+                    <a:pt x="169318" y="176463"/>
+                    <a:pt x="152659" y="254823"/>
+                    <a:pt x="181041" y="262844"/>
+                  </a:cubicBezTo>
+                  <a:cubicBezTo>
+                    <a:pt x="209423" y="270865"/>
+                    <a:pt x="326037" y="210399"/>
+                    <a:pt x="343930" y="192506"/>
+                  </a:cubicBezTo>
+                  <a:cubicBezTo>
+                    <a:pt x="361823" y="174613"/>
+                    <a:pt x="302591" y="156102"/>
+                    <a:pt x="288400" y="155485"/>
+                  </a:cubicBezTo>
+                </a:path>
+              </a:pathLst>
+            </a:custGeom>
+            <a:noFill/>
+            <a:ln>
+              <a:solidFill>
+                <a:srgbClr val="00B0F0"/>
+              </a:solidFill>
+            </a:ln>
+          </p:spPr>
+          <p:style>
+            <a:lnRef idx="2">
+              <a:schemeClr val="accent1">
+                <a:shade val="15000"/>
+              </a:schemeClr>
+            </a:lnRef>
+            <a:fillRef idx="1">
+              <a:schemeClr val="accent1"/>
+            </a:fillRef>
+            <a:effectRef idx="0">
+              <a:schemeClr val="accent1"/>
+            </a:effectRef>
+            <a:fontRef idx="minor">
+              <a:schemeClr val="lt1"/>
+            </a:fontRef>
+          </p:style>
+          <p:txBody>
+            <a:bodyPr rtlCol="0" anchor="ctr"/>
+            <a:lstStyle/>
+            <a:p>
+              <a:pPr algn="ctr"/>
+              <a:endParaRPr lang="en-US"/>
+            </a:p>
+          </p:txBody>
+        </p:sp>
+        <p:sp>
+          <p:nvSpPr>
+            <p:cNvPr id="92" name="TextBox 91">
+              <a:extLst>
+                <a:ext uri="{FF2B5EF4-FFF2-40B4-BE49-F238E27FC236}">
+                  <a16:creationId xmlns:a16="http://schemas.microsoft.com/office/drawing/2014/main" id="{24206BEA-37B4-10C0-53A8-3FAFC377D051}"/>
+                </a:ext>
+              </a:extLst>
+            </p:cNvPr>
+            <p:cNvSpPr txBox="1"/>
+            <p:nvPr/>
+          </p:nvSpPr>
+          <p:spPr>
+            <a:xfrm>
+              <a:off x="2087818" y="2721388"/>
+              <a:ext cx="1441129" cy="461665"/>
+            </a:xfrm>
+            <a:prstGeom prst="rect">
+              <a:avLst/>
+            </a:prstGeom>
+            <a:noFill/>
+          </p:spPr>
+          <p:txBody>
+            <a:bodyPr wrap="square" rtlCol="0">
+              <a:spAutoFit/>
+            </a:bodyPr>
+            <a:lstStyle/>
+            <a:p>
+              <a:pPr algn="ctr"/>
+              <a:r>
+                <a:rPr lang="en-US" sz="2400" dirty="0"/>
+                <a:t>Bay side</a:t>
+              </a:r>
+            </a:p>
+          </p:txBody>
+        </p:sp>
+        <p:sp>
+          <p:nvSpPr>
+            <p:cNvPr id="93" name="TextBox 92">
+              <a:extLst>
+                <a:ext uri="{FF2B5EF4-FFF2-40B4-BE49-F238E27FC236}">
+                  <a16:creationId xmlns:a16="http://schemas.microsoft.com/office/drawing/2014/main" id="{599F929A-BE97-0E85-E262-9553B1DE1D36}"/>
+                </a:ext>
+              </a:extLst>
+            </p:cNvPr>
+            <p:cNvSpPr txBox="1"/>
+            <p:nvPr/>
+          </p:nvSpPr>
+          <p:spPr>
+            <a:xfrm>
+              <a:off x="7732577" y="3932554"/>
+              <a:ext cx="1515777" cy="461665"/>
+            </a:xfrm>
+            <a:prstGeom prst="rect">
+              <a:avLst/>
+            </a:prstGeom>
+            <a:noFill/>
+          </p:spPr>
+          <p:txBody>
+            <a:bodyPr wrap="square" rtlCol="0">
+              <a:spAutoFit/>
+            </a:bodyPr>
+            <a:lstStyle/>
+            <a:p>
+              <a:pPr algn="ctr"/>
+              <a:r>
+                <a:rPr lang="en-US" sz="2400" dirty="0"/>
+                <a:t>River side</a:t>
+              </a:r>
+            </a:p>
+          </p:txBody>
+        </p:sp>
+        <p:sp>
+          <p:nvSpPr>
+            <p:cNvPr id="94" name="TextBox 93">
+              <a:extLst>
+                <a:ext uri="{FF2B5EF4-FFF2-40B4-BE49-F238E27FC236}">
+                  <a16:creationId xmlns:a16="http://schemas.microsoft.com/office/drawing/2014/main" id="{F84E6282-0AC0-23B7-B17C-6798705DAC55}"/>
+                </a:ext>
+              </a:extLst>
+            </p:cNvPr>
+            <p:cNvSpPr txBox="1"/>
+            <p:nvPr/>
+          </p:nvSpPr>
+          <p:spPr>
+            <a:xfrm>
+              <a:off x="3449535" y="4960012"/>
+              <a:ext cx="1021277" cy="523220"/>
+            </a:xfrm>
+            <a:prstGeom prst="rect">
+              <a:avLst/>
+            </a:prstGeom>
+            <a:noFill/>
+          </p:spPr>
+          <p:txBody>
+            <a:bodyPr wrap="square" rtlCol="0">
+              <a:spAutoFit/>
+            </a:bodyPr>
+            <a:lstStyle/>
+            <a:p>
+              <a:pPr algn="r"/>
+              <a:r>
+                <a:rPr lang="en-US" sz="1400" dirty="0">
+                  <a:solidFill>
+                    <a:schemeClr val="accent1"/>
+                  </a:solidFill>
+                </a:rPr>
+                <a:t>Fixed</a:t>
+              </a:r>
+              <a:r>
+                <a:rPr lang="en-US" sz="1400" dirty="0"/>
+                <a:t> </a:t>
+              </a:r>
+              <a:r>
+                <a:rPr lang="en-US" sz="1400" dirty="0">
+                  <a:solidFill>
+                    <a:schemeClr val="accent1"/>
+                  </a:solidFill>
+                </a:rPr>
+                <a:t>sluicegate</a:t>
+              </a:r>
+            </a:p>
+          </p:txBody>
+        </p:sp>
+        <p:cxnSp>
+          <p:nvCxnSpPr>
+            <p:cNvPr id="96" name="Straight Arrow Connector 95">
+              <a:extLst>
+                <a:ext uri="{FF2B5EF4-FFF2-40B4-BE49-F238E27FC236}">
+                  <a16:creationId xmlns:a16="http://schemas.microsoft.com/office/drawing/2014/main" id="{6C2879B0-69CE-F267-1C42-1694A31A5278}"/>
+                </a:ext>
+              </a:extLst>
+            </p:cNvPr>
+            <p:cNvCxnSpPr>
+              <a:cxnSpLocks/>
+            </p:cNvCxnSpPr>
+            <p:nvPr/>
+          </p:nvCxnSpPr>
+          <p:spPr>
+            <a:xfrm flipH="1">
+              <a:off x="3479331" y="5117169"/>
+              <a:ext cx="418221" cy="0"/>
+            </a:xfrm>
+            <a:prstGeom prst="straightConnector1">
+              <a:avLst/>
+            </a:prstGeom>
+            <a:ln>
+              <a:tailEnd type="triangle"/>
+            </a:ln>
+          </p:spPr>
+          <p:style>
+            <a:lnRef idx="2">
+              <a:schemeClr val="accent1"/>
+            </a:lnRef>
+            <a:fillRef idx="0">
+              <a:schemeClr val="accent1"/>
+            </a:fillRef>
+            <a:effectRef idx="1">
+              <a:schemeClr val="accent1"/>
+            </a:effectRef>
+            <a:fontRef idx="minor">
+              <a:schemeClr val="tx1"/>
+            </a:fontRef>
+          </p:style>
+        </p:cxnSp>
+        <p:sp>
+          <p:nvSpPr>
+            <p:cNvPr id="100" name="TextBox 99">
+              <a:extLst>
+                <a:ext uri="{FF2B5EF4-FFF2-40B4-BE49-F238E27FC236}">
+                  <a16:creationId xmlns:a16="http://schemas.microsoft.com/office/drawing/2014/main" id="{D6ECCD60-10FA-1C18-BBCF-8849377E4E25}"/>
+                </a:ext>
+              </a:extLst>
+            </p:cNvPr>
+            <p:cNvSpPr txBox="1"/>
+            <p:nvPr/>
+          </p:nvSpPr>
+          <p:spPr>
+            <a:xfrm>
+              <a:off x="8516084" y="5639127"/>
+              <a:ext cx="612061" cy="523220"/>
+            </a:xfrm>
+            <a:prstGeom prst="rect">
+              <a:avLst/>
+            </a:prstGeom>
+            <a:noFill/>
+          </p:spPr>
+          <p:txBody>
+            <a:bodyPr wrap="square" rtlCol="0">
+              <a:spAutoFit/>
+            </a:bodyPr>
+            <a:lstStyle/>
+            <a:p>
+              <a:r>
+                <a:rPr lang="en-US" sz="1400" dirty="0">
+                  <a:solidFill>
+                    <a:schemeClr val="accent1"/>
+                  </a:solidFill>
+                </a:rPr>
+                <a:t>Fixed</a:t>
+              </a:r>
+              <a:r>
+                <a:rPr lang="en-US" sz="1400" dirty="0"/>
+                <a:t> </a:t>
+              </a:r>
+              <a:r>
+                <a:rPr lang="en-US" sz="1400" dirty="0">
+                  <a:solidFill>
+                    <a:schemeClr val="accent1"/>
+                  </a:solidFill>
+                </a:rPr>
+                <a:t>weir</a:t>
+              </a:r>
+            </a:p>
+          </p:txBody>
+        </p:sp>
+        <p:cxnSp>
+          <p:nvCxnSpPr>
+            <p:cNvPr id="101" name="Straight Arrow Connector 100">
+              <a:extLst>
+                <a:ext uri="{FF2B5EF4-FFF2-40B4-BE49-F238E27FC236}">
+                  <a16:creationId xmlns:a16="http://schemas.microsoft.com/office/drawing/2014/main" id="{04E0D044-7CDD-5B13-0F43-1DED088952B0}"/>
+                </a:ext>
+              </a:extLst>
+            </p:cNvPr>
+            <p:cNvCxnSpPr>
+              <a:cxnSpLocks/>
+            </p:cNvCxnSpPr>
+            <p:nvPr/>
+          </p:nvCxnSpPr>
+          <p:spPr>
+            <a:xfrm>
+              <a:off x="9059653" y="5798406"/>
+              <a:ext cx="317048" cy="0"/>
+            </a:xfrm>
+            <a:prstGeom prst="straightConnector1">
+              <a:avLst/>
+            </a:prstGeom>
+            <a:ln>
+              <a:tailEnd type="triangle"/>
+            </a:ln>
+          </p:spPr>
+          <p:style>
+            <a:lnRef idx="2">
+              <a:schemeClr val="accent1"/>
+            </a:lnRef>
+            <a:fillRef idx="0">
+              <a:schemeClr val="accent1"/>
+            </a:fillRef>
+            <a:effectRef idx="1">
+              <a:schemeClr val="accent1"/>
+            </a:effectRef>
+            <a:fontRef idx="minor">
+              <a:schemeClr val="tx1"/>
+            </a:fontRef>
+          </p:style>
+        </p:cxnSp>
+        <p:sp>
+          <p:nvSpPr>
+            <p:cNvPr id="106" name="TextBox 105">
+              <a:extLst>
+                <a:ext uri="{FF2B5EF4-FFF2-40B4-BE49-F238E27FC236}">
+                  <a16:creationId xmlns:a16="http://schemas.microsoft.com/office/drawing/2014/main" id="{6B582142-9733-4844-A57E-B41738D2A745}"/>
+                </a:ext>
+              </a:extLst>
+            </p:cNvPr>
+            <p:cNvSpPr txBox="1"/>
+            <p:nvPr/>
+          </p:nvSpPr>
+          <p:spPr>
+            <a:xfrm>
+              <a:off x="2254769" y="6246547"/>
+              <a:ext cx="1021277" cy="307777"/>
+            </a:xfrm>
+            <a:prstGeom prst="rect">
+              <a:avLst/>
+            </a:prstGeom>
+            <a:noFill/>
+          </p:spPr>
+          <p:txBody>
+            <a:bodyPr wrap="square" rtlCol="0">
+              <a:spAutoFit/>
+            </a:bodyPr>
+            <a:lstStyle/>
+            <a:p>
+              <a:pPr algn="r"/>
+              <a:r>
+                <a:rPr lang="en-US" sz="1400" dirty="0">
+                  <a:solidFill>
+                    <a:srgbClr val="00B0F0"/>
+                  </a:solidFill>
+                </a:rPr>
+                <a:t>Head tank</a:t>
+              </a:r>
+            </a:p>
+          </p:txBody>
+        </p:sp>
+        <p:sp>
+          <p:nvSpPr>
+            <p:cNvPr id="107" name="TextBox 106">
+              <a:extLst>
+                <a:ext uri="{FF2B5EF4-FFF2-40B4-BE49-F238E27FC236}">
+                  <a16:creationId xmlns:a16="http://schemas.microsoft.com/office/drawing/2014/main" id="{0C95ED1E-1697-527F-3AFF-D8E085DCAE3B}"/>
+                </a:ext>
+              </a:extLst>
+            </p:cNvPr>
+            <p:cNvSpPr txBox="1"/>
+            <p:nvPr/>
+          </p:nvSpPr>
+          <p:spPr>
+            <a:xfrm>
+              <a:off x="4259119" y="6260360"/>
+              <a:ext cx="1732709" cy="307777"/>
+            </a:xfrm>
+            <a:prstGeom prst="rect">
+              <a:avLst/>
+            </a:prstGeom>
+            <a:noFill/>
+          </p:spPr>
+          <p:txBody>
+            <a:bodyPr wrap="square" rtlCol="0">
+              <a:spAutoFit/>
+            </a:bodyPr>
+            <a:lstStyle/>
+            <a:p>
+              <a:pPr algn="r"/>
+              <a:r>
+                <a:rPr lang="en-US" sz="1400" dirty="0">
+                  <a:solidFill>
+                    <a:srgbClr val="00B0F0"/>
+                  </a:solidFill>
+                </a:rPr>
+                <a:t>Supercritical region</a:t>
+              </a:r>
+            </a:p>
+          </p:txBody>
+        </p:sp>
+        <p:sp>
+          <p:nvSpPr>
+            <p:cNvPr id="108" name="TextBox 107">
+              <a:extLst>
+                <a:ext uri="{FF2B5EF4-FFF2-40B4-BE49-F238E27FC236}">
+                  <a16:creationId xmlns:a16="http://schemas.microsoft.com/office/drawing/2014/main" id="{6CF37683-E3AE-0668-D30B-EA6FE541F708}"/>
+                </a:ext>
+              </a:extLst>
+            </p:cNvPr>
+            <p:cNvSpPr txBox="1"/>
+            <p:nvPr/>
+          </p:nvSpPr>
+          <p:spPr>
+            <a:xfrm>
+              <a:off x="7480491" y="6283234"/>
+              <a:ext cx="1732709" cy="307777"/>
+            </a:xfrm>
+            <a:prstGeom prst="rect">
+              <a:avLst/>
+            </a:prstGeom>
+            <a:noFill/>
+          </p:spPr>
+          <p:txBody>
+            <a:bodyPr wrap="square" rtlCol="0">
+              <a:spAutoFit/>
+            </a:bodyPr>
+            <a:lstStyle/>
+            <a:p>
+              <a:pPr algn="r"/>
+              <a:r>
+                <a:rPr lang="en-US" sz="1400" dirty="0">
+                  <a:solidFill>
+                    <a:srgbClr val="00B0F0"/>
+                  </a:solidFill>
+                </a:rPr>
+                <a:t>Subcritical region</a:t>
+              </a:r>
+            </a:p>
+          </p:txBody>
+        </p:sp>
+        <p:sp>
+          <p:nvSpPr>
+            <p:cNvPr id="109" name="TextBox 108">
+              <a:extLst>
+                <a:ext uri="{FF2B5EF4-FFF2-40B4-BE49-F238E27FC236}">
+                  <a16:creationId xmlns:a16="http://schemas.microsoft.com/office/drawing/2014/main" id="{9A74941F-7FE3-F5C4-AB2C-072CB175D681}"/>
+                </a:ext>
+              </a:extLst>
+            </p:cNvPr>
+            <p:cNvSpPr txBox="1"/>
+            <p:nvPr/>
+          </p:nvSpPr>
+          <p:spPr>
+            <a:xfrm>
+              <a:off x="9479539" y="6286201"/>
+              <a:ext cx="1247756" cy="307777"/>
+            </a:xfrm>
+            <a:prstGeom prst="rect">
+              <a:avLst/>
+            </a:prstGeom>
+            <a:noFill/>
+          </p:spPr>
+          <p:txBody>
+            <a:bodyPr wrap="square" rtlCol="0">
+              <a:spAutoFit/>
+            </a:bodyPr>
+            <a:lstStyle/>
+            <a:p>
+              <a:pPr algn="ctr"/>
+              <a:r>
+                <a:rPr lang="en-US" sz="1400" dirty="0">
+                  <a:solidFill>
+                    <a:srgbClr val="00B0F0"/>
+                  </a:solidFill>
+                </a:rPr>
+                <a:t>Tailwater tank</a:t>
+              </a:r>
+            </a:p>
+          </p:txBody>
+        </p:sp>
+        <p:sp>
+          <p:nvSpPr>
+            <p:cNvPr id="110" name="TextBox 109">
+              <a:extLst>
+                <a:ext uri="{FF2B5EF4-FFF2-40B4-BE49-F238E27FC236}">
+                  <a16:creationId xmlns:a16="http://schemas.microsoft.com/office/drawing/2014/main" id="{7B03789E-81DA-94F8-191D-89A9546ACADE}"/>
+                </a:ext>
+              </a:extLst>
+            </p:cNvPr>
+            <p:cNvSpPr txBox="1"/>
+            <p:nvPr/>
+          </p:nvSpPr>
+          <p:spPr>
+            <a:xfrm>
+              <a:off x="3829684" y="3932555"/>
+              <a:ext cx="2480666" cy="461665"/>
+            </a:xfrm>
+            <a:prstGeom prst="rect">
+              <a:avLst/>
+            </a:prstGeom>
+            <a:noFill/>
+          </p:spPr>
+          <p:txBody>
+            <a:bodyPr wrap="square" rtlCol="0">
+              <a:spAutoFit/>
+            </a:bodyPr>
+            <a:lstStyle/>
+            <a:p>
+              <a:pPr algn="ctr"/>
+              <a:r>
+                <a:rPr lang="en-US" sz="2400" dirty="0"/>
+                <a:t>Inside the culvert</a:t>
+              </a:r>
+            </a:p>
+          </p:txBody>
+        </p:sp>
+        <p:sp>
+          <p:nvSpPr>
+            <p:cNvPr id="111" name="TextBox 110">
+              <a:extLst>
+                <a:ext uri="{FF2B5EF4-FFF2-40B4-BE49-F238E27FC236}">
+                  <a16:creationId xmlns:a16="http://schemas.microsoft.com/office/drawing/2014/main" id="{4742DBD4-0ECA-EF9C-8181-5BF56FE51FA1}"/>
+                </a:ext>
+              </a:extLst>
+            </p:cNvPr>
+            <p:cNvSpPr txBox="1"/>
+            <p:nvPr/>
+          </p:nvSpPr>
+          <p:spPr>
+            <a:xfrm>
+              <a:off x="6622138" y="6218828"/>
+              <a:ext cx="970490" cy="523220"/>
+            </a:xfrm>
+            <a:prstGeom prst="rect">
+              <a:avLst/>
+            </a:prstGeom>
+            <a:noFill/>
+          </p:spPr>
+          <p:txBody>
+            <a:bodyPr wrap="square" rtlCol="0">
+              <a:spAutoFit/>
+            </a:bodyPr>
+            <a:lstStyle/>
+            <a:p>
+              <a:pPr algn="ctr"/>
+              <a:r>
+                <a:rPr lang="en-US" sz="1400" dirty="0">
+                  <a:solidFill>
+                    <a:srgbClr val="00B0F0"/>
+                  </a:solidFill>
+                </a:rPr>
+                <a:t>Hydraulic jump</a:t>
+              </a:r>
+            </a:p>
+          </p:txBody>
+        </p:sp>
+        <p:sp>
+          <p:nvSpPr>
+            <p:cNvPr id="113" name="Right Arrow 112">
+              <a:extLst>
+                <a:ext uri="{FF2B5EF4-FFF2-40B4-BE49-F238E27FC236}">
+                  <a16:creationId xmlns:a16="http://schemas.microsoft.com/office/drawing/2014/main" id="{C65AB482-2287-9449-2F32-D5DA32527F31}"/>
+                </a:ext>
+              </a:extLst>
+            </p:cNvPr>
+            <p:cNvSpPr/>
+            <p:nvPr/>
+          </p:nvSpPr>
+          <p:spPr>
+            <a:xfrm>
+              <a:off x="1774288" y="5708273"/>
+              <a:ext cx="381000" cy="317780"/>
+            </a:xfrm>
+            <a:prstGeom prst="rightArrow">
+              <a:avLst/>
+            </a:prstGeom>
             <a:solidFill>
               <a:srgbClr val="00B0F0"/>
             </a:solidFill>
-          </a:ln>
-        </p:spPr>
-        <p:style>
-          <a:lnRef idx="2">
-            <a:schemeClr val="accent1"/>
-          </a:lnRef>
-          <a:fillRef idx="0">
-            <a:schemeClr val="accent1"/>
-          </a:fillRef>
-          <a:effectRef idx="1">
-            <a:schemeClr val="accent1"/>
-          </a:effectRef>
-          <a:fontRef idx="minor">
-            <a:schemeClr val="tx1"/>
-          </a:fontRef>
-        </p:style>
-      </p:cxnSp>
-      <p:cxnSp>
-        <p:nvCxnSpPr>
-          <p:cNvPr id="43" name="Straight Connector 42">
-            <a:extLst>
-              <a:ext uri="{FF2B5EF4-FFF2-40B4-BE49-F238E27FC236}">
-                <a16:creationId xmlns:a16="http://schemas.microsoft.com/office/drawing/2014/main" id="{DDF95888-5E5B-428B-A3D5-D5D08EEA9C79}"/>
-              </a:ext>
-            </a:extLst>
-          </p:cNvPr>
-          <p:cNvCxnSpPr>
-            <a:cxnSpLocks/>
-          </p:cNvCxnSpPr>
-          <p:nvPr/>
-        </p:nvCxnSpPr>
-        <p:spPr>
-          <a:xfrm>
-            <a:off x="4649670" y="5887570"/>
-            <a:ext cx="1860332" cy="0"/>
-          </a:xfrm>
-          <a:prstGeom prst="line">
-            <a:avLst/>
-          </a:prstGeom>
-          <a:ln w="28575">
+            <a:ln>
+              <a:noFill/>
+            </a:ln>
+          </p:spPr>
+          <p:style>
+            <a:lnRef idx="2">
+              <a:schemeClr val="accent1">
+                <a:shade val="15000"/>
+              </a:schemeClr>
+            </a:lnRef>
+            <a:fillRef idx="1">
+              <a:schemeClr val="accent1"/>
+            </a:fillRef>
+            <a:effectRef idx="0">
+              <a:schemeClr val="accent1"/>
+            </a:effectRef>
+            <a:fontRef idx="minor">
+              <a:schemeClr val="lt1"/>
+            </a:fontRef>
+          </p:style>
+          <p:txBody>
+            <a:bodyPr rtlCol="0" anchor="ctr"/>
+            <a:lstStyle/>
+            <a:p>
+              <a:pPr algn="ctr"/>
+              <a:endParaRPr lang="en-US"/>
+            </a:p>
+          </p:txBody>
+        </p:sp>
+        <p:sp>
+          <p:nvSpPr>
+            <p:cNvPr id="115" name="Right Arrow 114">
+              <a:extLst>
+                <a:ext uri="{FF2B5EF4-FFF2-40B4-BE49-F238E27FC236}">
+                  <a16:creationId xmlns:a16="http://schemas.microsoft.com/office/drawing/2014/main" id="{DB512DC6-6362-4803-BECD-DAB0E44AAD8F}"/>
+                </a:ext>
+              </a:extLst>
+            </p:cNvPr>
+            <p:cNvSpPr/>
+            <p:nvPr/>
+          </p:nvSpPr>
+          <p:spPr>
+            <a:xfrm>
+              <a:off x="10656936" y="5780597"/>
+              <a:ext cx="381000" cy="317780"/>
+            </a:xfrm>
+            <a:prstGeom prst="rightArrow">
+              <a:avLst/>
+            </a:prstGeom>
             <a:solidFill>
               <a:srgbClr val="00B0F0"/>
             </a:solidFill>
-          </a:ln>
-        </p:spPr>
-        <p:style>
-          <a:lnRef idx="2">
-            <a:schemeClr val="accent1"/>
-          </a:lnRef>
-          <a:fillRef idx="0">
-            <a:schemeClr val="accent1"/>
-          </a:fillRef>
-          <a:effectRef idx="1">
-            <a:schemeClr val="accent1"/>
-          </a:effectRef>
-          <a:fontRef idx="minor">
-            <a:schemeClr val="tx1"/>
-          </a:fontRef>
-        </p:style>
-      </p:cxnSp>
-      <p:sp>
-        <p:nvSpPr>
-          <p:cNvPr id="51" name="Freeform 50">
-            <a:extLst>
-              <a:ext uri="{FF2B5EF4-FFF2-40B4-BE49-F238E27FC236}">
-                <a16:creationId xmlns:a16="http://schemas.microsoft.com/office/drawing/2014/main" id="{F1865E88-425B-AEBB-B19C-CA6F9DA095E1}"/>
-              </a:ext>
-            </a:extLst>
-          </p:cNvPr>
-          <p:cNvSpPr/>
+            <a:ln>
+              <a:noFill/>
+            </a:ln>
+          </p:spPr>
+          <p:style>
+            <a:lnRef idx="2">
+              <a:schemeClr val="accent1">
+                <a:shade val="15000"/>
+              </a:schemeClr>
+            </a:lnRef>
+            <a:fillRef idx="1">
+              <a:schemeClr val="accent1"/>
+            </a:fillRef>
+            <a:effectRef idx="0">
+              <a:schemeClr val="accent1"/>
+            </a:effectRef>
+            <a:fontRef idx="minor">
+              <a:schemeClr val="lt1"/>
+            </a:fontRef>
+          </p:style>
+          <p:txBody>
+            <a:bodyPr rtlCol="0" anchor="ctr"/>
+            <a:lstStyle/>
+            <a:p>
+              <a:pPr algn="ctr"/>
+              <a:endParaRPr lang="en-US" dirty="0"/>
+            </a:p>
+          </p:txBody>
+        </p:sp>
+        <p:sp>
+          <p:nvSpPr>
+            <p:cNvPr id="118" name="Cross 117">
+              <a:extLst>
+                <a:ext uri="{FF2B5EF4-FFF2-40B4-BE49-F238E27FC236}">
+                  <a16:creationId xmlns:a16="http://schemas.microsoft.com/office/drawing/2014/main" id="{AEC7CA1E-1CD9-28C7-74DA-095F0560FDFC}"/>
+                </a:ext>
+              </a:extLst>
+            </p:cNvPr>
+            <p:cNvSpPr/>
+            <p:nvPr/>
+          </p:nvSpPr>
+          <p:spPr>
+            <a:xfrm>
+              <a:off x="8946370" y="5354518"/>
+              <a:ext cx="200150" cy="204970"/>
+            </a:xfrm>
+            <a:prstGeom prst="plus">
+              <a:avLst/>
+            </a:prstGeom>
+            <a:solidFill>
+              <a:schemeClr val="accent2"/>
+            </a:solidFill>
+            <a:ln>
+              <a:noFill/>
+            </a:ln>
+          </p:spPr>
+          <p:style>
+            <a:lnRef idx="2">
+              <a:schemeClr val="accent1">
+                <a:shade val="15000"/>
+              </a:schemeClr>
+            </a:lnRef>
+            <a:fillRef idx="1">
+              <a:schemeClr val="accent1"/>
+            </a:fillRef>
+            <a:effectRef idx="0">
+              <a:schemeClr val="accent1"/>
+            </a:effectRef>
+            <a:fontRef idx="minor">
+              <a:schemeClr val="lt1"/>
+            </a:fontRef>
+          </p:style>
+          <p:txBody>
+            <a:bodyPr rtlCol="0" anchor="ctr"/>
+            <a:lstStyle/>
+            <a:p>
+              <a:pPr algn="ctr"/>
+              <a:endParaRPr lang="en-US"/>
+            </a:p>
+          </p:txBody>
+        </p:sp>
+        <p:cxnSp>
+          <p:nvCxnSpPr>
+            <p:cNvPr id="120" name="Straight Connector 119">
+              <a:extLst>
+                <a:ext uri="{FF2B5EF4-FFF2-40B4-BE49-F238E27FC236}">
+                  <a16:creationId xmlns:a16="http://schemas.microsoft.com/office/drawing/2014/main" id="{6927437C-375C-5187-5029-3112DDE1FE8B}"/>
+                </a:ext>
+              </a:extLst>
+            </p:cNvPr>
+            <p:cNvCxnSpPr>
+              <a:cxnSpLocks/>
+              <a:stCxn id="118" idx="0"/>
+            </p:cNvCxnSpPr>
+            <p:nvPr/>
+          </p:nvCxnSpPr>
+          <p:spPr>
+            <a:xfrm flipV="1">
+              <a:off x="9046445" y="4736467"/>
+              <a:ext cx="0" cy="618051"/>
+            </a:xfrm>
+            <a:prstGeom prst="line">
+              <a:avLst/>
+            </a:prstGeom>
+            <a:ln w="28575">
+              <a:solidFill>
+                <a:schemeClr val="accent2"/>
+              </a:solidFill>
+            </a:ln>
+          </p:spPr>
+          <p:style>
+            <a:lnRef idx="2">
+              <a:schemeClr val="accent1"/>
+            </a:lnRef>
+            <a:fillRef idx="0">
+              <a:schemeClr val="accent1"/>
+            </a:fillRef>
+            <a:effectRef idx="1">
+              <a:schemeClr val="accent1"/>
+            </a:effectRef>
+            <a:fontRef idx="minor">
+              <a:schemeClr val="tx1"/>
+            </a:fontRef>
+          </p:style>
+        </p:cxnSp>
+        <p:sp>
+          <p:nvSpPr>
+            <p:cNvPr id="122" name="TextBox 121">
+              <a:extLst>
+                <a:ext uri="{FF2B5EF4-FFF2-40B4-BE49-F238E27FC236}">
+                  <a16:creationId xmlns:a16="http://schemas.microsoft.com/office/drawing/2014/main" id="{0A851409-F0B2-394C-0363-D1224ECD04CE}"/>
+                </a:ext>
+              </a:extLst>
+            </p:cNvPr>
+            <p:cNvSpPr txBox="1"/>
+            <p:nvPr/>
+          </p:nvSpPr>
+          <p:spPr>
+            <a:xfrm>
+              <a:off x="753010" y="5570186"/>
+              <a:ext cx="1021277" cy="523220"/>
+            </a:xfrm>
+            <a:prstGeom prst="rect">
+              <a:avLst/>
+            </a:prstGeom>
+            <a:noFill/>
+          </p:spPr>
+          <p:txBody>
+            <a:bodyPr wrap="square" rtlCol="0">
+              <a:spAutoFit/>
+            </a:bodyPr>
+            <a:lstStyle/>
+            <a:p>
+              <a:pPr algn="r"/>
+              <a:r>
+                <a:rPr lang="en-US" sz="1400" dirty="0">
+                  <a:solidFill>
+                    <a:srgbClr val="00B0F0"/>
+                  </a:solidFill>
+                </a:rPr>
+                <a:t>Water is pumped in</a:t>
+              </a:r>
+            </a:p>
+          </p:txBody>
+        </p:sp>
+        <p:sp>
+          <p:nvSpPr>
+            <p:cNvPr id="123" name="TextBox 122">
+              <a:extLst>
+                <a:ext uri="{FF2B5EF4-FFF2-40B4-BE49-F238E27FC236}">
+                  <a16:creationId xmlns:a16="http://schemas.microsoft.com/office/drawing/2014/main" id="{0892CF0D-F3CA-203A-E8EC-7A6E02EABA8B}"/>
+                </a:ext>
+              </a:extLst>
+            </p:cNvPr>
+            <p:cNvSpPr txBox="1"/>
+            <p:nvPr/>
+          </p:nvSpPr>
+          <p:spPr>
+            <a:xfrm>
+              <a:off x="11044538" y="5695608"/>
+              <a:ext cx="1021277" cy="523220"/>
+            </a:xfrm>
+            <a:prstGeom prst="rect">
+              <a:avLst/>
+            </a:prstGeom>
+            <a:noFill/>
+          </p:spPr>
+          <p:txBody>
+            <a:bodyPr wrap="square" rtlCol="0">
+              <a:spAutoFit/>
+            </a:bodyPr>
+            <a:lstStyle/>
+            <a:p>
+              <a:r>
+                <a:rPr lang="en-US" sz="1400" dirty="0">
+                  <a:solidFill>
+                    <a:srgbClr val="00B0F0"/>
+                  </a:solidFill>
+                </a:rPr>
+                <a:t>Water flows out</a:t>
+              </a:r>
+            </a:p>
+          </p:txBody>
+        </p:sp>
+      </p:grpSp>
+      <p:grpSp>
+        <p:nvGrpSpPr>
+          <p:cNvPr id="131" name="Group 130">
+            <a:extLst>
+              <a:ext uri="{FF2B5EF4-FFF2-40B4-BE49-F238E27FC236}">
+                <a16:creationId xmlns:a16="http://schemas.microsoft.com/office/drawing/2014/main" id="{C967DDB7-59AD-396D-E060-D4BF5A34C4EA}"/>
+              </a:ext>
+            </a:extLst>
+          </p:cNvPr>
+          <p:cNvGrpSpPr/>
           <p:nvPr/>
-        </p:nvSpPr>
-        <p:spPr>
+        </p:nvGrpSpPr>
+        <p:grpSpPr>
           <a:xfrm>
-            <a:off x="3351460" y="5749159"/>
-            <a:ext cx="1325680" cy="147261"/>
+            <a:off x="8829967" y="1680346"/>
+            <a:ext cx="3055284" cy="2183449"/>
+            <a:chOff x="8925339" y="1639957"/>
+            <a:chExt cx="3055284" cy="2183449"/>
           </a:xfrm>
-          <a:custGeom>
-            <a:avLst/>
-            <a:gdLst>
-              <a:gd name="connsiteX0" fmla="*/ 0 w 1325680"/>
-              <a:gd name="connsiteY0" fmla="*/ 0 h 147261"/>
-              <a:gd name="connsiteX1" fmla="*/ 367357 w 1325680"/>
-              <a:gd name="connsiteY1" fmla="*/ 135762 h 147261"/>
-              <a:gd name="connsiteX2" fmla="*/ 1325680 w 1325680"/>
-              <a:gd name="connsiteY2" fmla="*/ 139755 h 147261"/>
-            </a:gdLst>
-            <a:ahLst/>
-            <a:cxnLst>
-              <a:cxn ang="0">
-                <a:pos x="connsiteX0" y="connsiteY0"/>
-              </a:cxn>
-              <a:cxn ang="0">
-                <a:pos x="connsiteX1" y="connsiteY1"/>
-              </a:cxn>
-              <a:cxn ang="0">
-                <a:pos x="connsiteX2" y="connsiteY2"/>
-              </a:cxn>
-            </a:cxnLst>
-            <a:rect l="l" t="t" r="r" b="b"/>
-            <a:pathLst>
-              <a:path w="1325680" h="147261">
-                <a:moveTo>
-                  <a:pt x="0" y="0"/>
-                </a:moveTo>
-                <a:cubicBezTo>
-                  <a:pt x="73205" y="56234"/>
-                  <a:pt x="146410" y="112469"/>
-                  <a:pt x="367357" y="135762"/>
-                </a:cubicBezTo>
-                <a:cubicBezTo>
-                  <a:pt x="588304" y="159055"/>
-                  <a:pt x="1325680" y="139755"/>
-                  <a:pt x="1325680" y="139755"/>
-                </a:cubicBezTo>
-              </a:path>
-            </a:pathLst>
-          </a:custGeom>
-          <a:noFill/>
-          <a:ln w="28575">
+        </p:grpSpPr>
+        <p:sp>
+          <p:nvSpPr>
+            <p:cNvPr id="129" name="Rectangle 128">
+              <a:extLst>
+                <a:ext uri="{FF2B5EF4-FFF2-40B4-BE49-F238E27FC236}">
+                  <a16:creationId xmlns:a16="http://schemas.microsoft.com/office/drawing/2014/main" id="{501C889D-F175-5DF9-123A-A075B681018F}"/>
+                </a:ext>
+              </a:extLst>
+            </p:cNvPr>
+            <p:cNvSpPr/>
+            <p:nvPr/>
+          </p:nvSpPr>
+          <p:spPr>
+            <a:xfrm>
+              <a:off x="9059653" y="1823777"/>
+              <a:ext cx="2920970" cy="1999629"/>
+            </a:xfrm>
+            <a:prstGeom prst="rect">
+              <a:avLst/>
+            </a:prstGeom>
+            <a:noFill/>
+          </p:spPr>
+          <p:style>
+            <a:lnRef idx="2">
+              <a:schemeClr val="accent1">
+                <a:shade val="15000"/>
+              </a:schemeClr>
+            </a:lnRef>
+            <a:fillRef idx="1">
+              <a:schemeClr val="accent1"/>
+            </a:fillRef>
+            <a:effectRef idx="0">
+              <a:schemeClr val="accent1"/>
+            </a:effectRef>
+            <a:fontRef idx="minor">
+              <a:schemeClr val="lt1"/>
+            </a:fontRef>
+          </p:style>
+          <p:txBody>
+            <a:bodyPr rtlCol="0" anchor="ctr"/>
+            <a:lstStyle/>
+            <a:p>
+              <a:pPr algn="ctr"/>
+              <a:endParaRPr lang="en-US" dirty="0"/>
+            </a:p>
+          </p:txBody>
+        </p:sp>
+        <p:sp>
+          <p:nvSpPr>
+            <p:cNvPr id="88" name="Regular Pentagon 87">
+              <a:extLst>
+                <a:ext uri="{FF2B5EF4-FFF2-40B4-BE49-F238E27FC236}">
+                  <a16:creationId xmlns:a16="http://schemas.microsoft.com/office/drawing/2014/main" id="{7D1F892A-96E7-8A9F-E13A-26CA2BD5CD2F}"/>
+                </a:ext>
+              </a:extLst>
+            </p:cNvPr>
+            <p:cNvSpPr/>
+            <p:nvPr/>
+          </p:nvSpPr>
+          <p:spPr>
+            <a:xfrm rot="2125004">
+              <a:off x="9180978" y="2326588"/>
+              <a:ext cx="302322" cy="272245"/>
+            </a:xfrm>
+            <a:prstGeom prst="pentagon">
+              <a:avLst/>
+            </a:prstGeom>
             <a:solidFill>
-              <a:srgbClr val="00B0F0"/>
+              <a:srgbClr val="FF0000"/>
             </a:solidFill>
-          </a:ln>
-        </p:spPr>
-        <p:style>
-          <a:lnRef idx="2">
-            <a:schemeClr val="accent1">
-              <a:shade val="15000"/>
-            </a:schemeClr>
-          </a:lnRef>
-          <a:fillRef idx="1">
-            <a:schemeClr val="accent1"/>
-          </a:fillRef>
-          <a:effectRef idx="0">
-            <a:schemeClr val="accent1"/>
-          </a:effectRef>
-          <a:fontRef idx="minor">
-            <a:schemeClr val="lt1"/>
-          </a:fontRef>
-        </p:style>
-        <p:txBody>
-          <a:bodyPr rtlCol="0" anchor="ctr"/>
-          <a:lstStyle/>
-          <a:p>
-            <a:pPr algn="ctr"/>
-            <a:endParaRPr lang="en-US"/>
-          </a:p>
-        </p:txBody>
-      </p:sp>
-      <p:cxnSp>
-        <p:nvCxnSpPr>
-          <p:cNvPr id="53" name="Straight Connector 52">
-            <a:extLst>
-              <a:ext uri="{FF2B5EF4-FFF2-40B4-BE49-F238E27FC236}">
-                <a16:creationId xmlns:a16="http://schemas.microsoft.com/office/drawing/2014/main" id="{FCDBE607-937A-B94C-4EAC-3D85578D3299}"/>
-              </a:ext>
-            </a:extLst>
-          </p:cNvPr>
-          <p:cNvCxnSpPr>
-            <a:cxnSpLocks/>
-            <a:stCxn id="56" idx="4"/>
-          </p:cNvCxnSpPr>
-          <p:nvPr/>
-        </p:nvCxnSpPr>
-        <p:spPr>
-          <a:xfrm flipV="1">
-            <a:off x="7704766" y="5242813"/>
-            <a:ext cx="1774773" cy="108"/>
-          </a:xfrm>
-          <a:prstGeom prst="line">
-            <a:avLst/>
-          </a:prstGeom>
-          <a:ln w="28575">
+            <a:ln>
+              <a:solidFill>
+                <a:srgbClr val="C00000"/>
+              </a:solidFill>
+            </a:ln>
+          </p:spPr>
+          <p:style>
+            <a:lnRef idx="2">
+              <a:schemeClr val="accent1">
+                <a:shade val="15000"/>
+              </a:schemeClr>
+            </a:lnRef>
+            <a:fillRef idx="1">
+              <a:schemeClr val="accent1"/>
+            </a:fillRef>
+            <a:effectRef idx="0">
+              <a:schemeClr val="accent1"/>
+            </a:effectRef>
+            <a:fontRef idx="minor">
+              <a:schemeClr val="lt1"/>
+            </a:fontRef>
+          </p:style>
+          <p:txBody>
+            <a:bodyPr rtlCol="0" anchor="ctr"/>
+            <a:lstStyle/>
+            <a:p>
+              <a:pPr algn="ctr"/>
+              <a:endParaRPr lang="en-US"/>
+            </a:p>
+          </p:txBody>
+        </p:sp>
+        <p:cxnSp>
+          <p:nvCxnSpPr>
+            <p:cNvPr id="89" name="Straight Connector 88">
+              <a:extLst>
+                <a:ext uri="{FF2B5EF4-FFF2-40B4-BE49-F238E27FC236}">
+                  <a16:creationId xmlns:a16="http://schemas.microsoft.com/office/drawing/2014/main" id="{31FBED90-7767-A442-3169-6FF0343D889A}"/>
+                </a:ext>
+              </a:extLst>
+            </p:cNvPr>
+            <p:cNvCxnSpPr>
+              <a:cxnSpLocks/>
+            </p:cNvCxnSpPr>
+            <p:nvPr/>
+          </p:nvCxnSpPr>
+          <p:spPr>
+            <a:xfrm>
+              <a:off x="9331107" y="2649858"/>
+              <a:ext cx="0" cy="267977"/>
+            </a:xfrm>
+            <a:prstGeom prst="line">
+              <a:avLst/>
+            </a:prstGeom>
+            <a:ln w="38100">
+              <a:solidFill>
+                <a:srgbClr val="C00000">
+                  <a:alpha val="48565"/>
+                </a:srgbClr>
+              </a:solidFill>
+              <a:prstDash val="sysDot"/>
+            </a:ln>
+          </p:spPr>
+          <p:style>
+            <a:lnRef idx="2">
+              <a:schemeClr val="accent1"/>
+            </a:lnRef>
+            <a:fillRef idx="0">
+              <a:schemeClr val="accent1"/>
+            </a:fillRef>
+            <a:effectRef idx="1">
+              <a:schemeClr val="accent1"/>
+            </a:effectRef>
+            <a:fontRef idx="minor">
+              <a:schemeClr val="tx1"/>
+            </a:fontRef>
+          </p:style>
+        </p:cxnSp>
+        <p:sp>
+          <p:nvSpPr>
+            <p:cNvPr id="91" name="TextBox 90">
+              <a:extLst>
+                <a:ext uri="{FF2B5EF4-FFF2-40B4-BE49-F238E27FC236}">
+                  <a16:creationId xmlns:a16="http://schemas.microsoft.com/office/drawing/2014/main" id="{A870C19D-23C1-41CE-2257-106ADDC7FE74}"/>
+                </a:ext>
+              </a:extLst>
+            </p:cNvPr>
+            <p:cNvSpPr txBox="1"/>
+            <p:nvPr/>
+          </p:nvSpPr>
+          <p:spPr>
+            <a:xfrm>
+              <a:off x="9492869" y="2278145"/>
+              <a:ext cx="2441688" cy="646331"/>
+            </a:xfrm>
+            <a:prstGeom prst="rect">
+              <a:avLst/>
+            </a:prstGeom>
+            <a:noFill/>
+          </p:spPr>
+          <p:txBody>
+            <a:bodyPr wrap="square" rtlCol="0">
+              <a:spAutoFit/>
+            </a:bodyPr>
+            <a:lstStyle/>
+            <a:p>
+              <a:r>
+                <a:rPr lang="en-US" dirty="0">
+                  <a:solidFill>
+                    <a:srgbClr val="C00000"/>
+                  </a:solidFill>
+                </a:rPr>
+                <a:t>Ultrasonic sensor to measure water height</a:t>
+              </a:r>
+            </a:p>
+          </p:txBody>
+        </p:sp>
+        <p:sp>
+          <p:nvSpPr>
+            <p:cNvPr id="124" name="Cross 123">
+              <a:extLst>
+                <a:ext uri="{FF2B5EF4-FFF2-40B4-BE49-F238E27FC236}">
+                  <a16:creationId xmlns:a16="http://schemas.microsoft.com/office/drawing/2014/main" id="{8FD432B5-00A9-4F28-CF42-7CB75DD825C6}"/>
+                </a:ext>
+              </a:extLst>
+            </p:cNvPr>
+            <p:cNvSpPr/>
+            <p:nvPr/>
+          </p:nvSpPr>
+          <p:spPr>
+            <a:xfrm>
+              <a:off x="9231032" y="3408133"/>
+              <a:ext cx="200150" cy="204970"/>
+            </a:xfrm>
+            <a:prstGeom prst="plus">
+              <a:avLst/>
+            </a:prstGeom>
             <a:solidFill>
-              <a:srgbClr val="00B0F0"/>
+              <a:schemeClr val="accent2"/>
             </a:solidFill>
-          </a:ln>
-        </p:spPr>
-        <p:style>
-          <a:lnRef idx="2">
-            <a:schemeClr val="accent1"/>
-          </a:lnRef>
-          <a:fillRef idx="0">
-            <a:schemeClr val="accent1"/>
-          </a:fillRef>
-          <a:effectRef idx="1">
-            <a:schemeClr val="accent1"/>
-          </a:effectRef>
-          <a:fontRef idx="minor">
-            <a:schemeClr val="tx1"/>
-          </a:fontRef>
-        </p:style>
-      </p:cxnSp>
-      <p:sp>
-        <p:nvSpPr>
-          <p:cNvPr id="56" name="Freeform 55">
-            <a:extLst>
-              <a:ext uri="{FF2B5EF4-FFF2-40B4-BE49-F238E27FC236}">
-                <a16:creationId xmlns:a16="http://schemas.microsoft.com/office/drawing/2014/main" id="{D5CF0242-BC71-129E-36A8-7398B22B18C2}"/>
-              </a:ext>
-            </a:extLst>
-          </p:cNvPr>
-          <p:cNvSpPr/>
-          <p:nvPr/>
-        </p:nvSpPr>
-        <p:spPr>
-          <a:xfrm>
-            <a:off x="6510001" y="5242921"/>
-            <a:ext cx="1194765" cy="644649"/>
-          </a:xfrm>
-          <a:custGeom>
-            <a:avLst/>
-            <a:gdLst>
-              <a:gd name="connsiteX0" fmla="*/ 0 w 1195754"/>
-              <a:gd name="connsiteY0" fmla="*/ 638457 h 638457"/>
-              <a:gd name="connsiteX1" fmla="*/ 292175 w 1195754"/>
-              <a:gd name="connsiteY1" fmla="*/ 568118 h 638457"/>
-              <a:gd name="connsiteX2" fmla="*/ 611404 w 1195754"/>
-              <a:gd name="connsiteY2" fmla="*/ 221836 h 638457"/>
-              <a:gd name="connsiteX3" fmla="*/ 941453 w 1195754"/>
-              <a:gd name="connsiteY3" fmla="*/ 32464 h 638457"/>
-              <a:gd name="connsiteX4" fmla="*/ 1195754 w 1195754"/>
-              <a:gd name="connsiteY4" fmla="*/ 0 h 638457"/>
-            </a:gdLst>
-            <a:ahLst/>
-            <a:cxnLst>
-              <a:cxn ang="0">
-                <a:pos x="connsiteX0" y="connsiteY0"/>
-              </a:cxn>
-              <a:cxn ang="0">
-                <a:pos x="connsiteX1" y="connsiteY1"/>
-              </a:cxn>
-              <a:cxn ang="0">
-                <a:pos x="connsiteX2" y="connsiteY2"/>
-              </a:cxn>
-              <a:cxn ang="0">
-                <a:pos x="connsiteX3" y="connsiteY3"/>
-              </a:cxn>
-              <a:cxn ang="0">
-                <a:pos x="connsiteX4" y="connsiteY4"/>
-              </a:cxn>
-            </a:cxnLst>
-            <a:rect l="l" t="t" r="r" b="b"/>
-            <a:pathLst>
-              <a:path w="1195754" h="638457">
-                <a:moveTo>
-                  <a:pt x="0" y="638457"/>
-                </a:moveTo>
-                <a:cubicBezTo>
-                  <a:pt x="95137" y="638006"/>
-                  <a:pt x="190274" y="637555"/>
-                  <a:pt x="292175" y="568118"/>
-                </a:cubicBezTo>
-                <a:cubicBezTo>
-                  <a:pt x="394076" y="498681"/>
-                  <a:pt x="503191" y="311112"/>
-                  <a:pt x="611404" y="221836"/>
-                </a:cubicBezTo>
-                <a:cubicBezTo>
-                  <a:pt x="719617" y="132560"/>
-                  <a:pt x="844061" y="69437"/>
-                  <a:pt x="941453" y="32464"/>
-                </a:cubicBezTo>
-                <a:cubicBezTo>
-                  <a:pt x="1038845" y="-4509"/>
-                  <a:pt x="1091148" y="5411"/>
-                  <a:pt x="1195754" y="0"/>
-                </a:cubicBezTo>
-              </a:path>
-            </a:pathLst>
-          </a:custGeom>
-          <a:noFill/>
-          <a:ln w="28575">
-            <a:solidFill>
-              <a:srgbClr val="00B0F0"/>
-            </a:solidFill>
-          </a:ln>
-        </p:spPr>
-        <p:style>
-          <a:lnRef idx="2">
-            <a:schemeClr val="accent1">
-              <a:shade val="15000"/>
-            </a:schemeClr>
-          </a:lnRef>
-          <a:fillRef idx="1">
-            <a:schemeClr val="accent1"/>
-          </a:fillRef>
-          <a:effectRef idx="0">
-            <a:schemeClr val="accent1"/>
-          </a:effectRef>
-          <a:fontRef idx="minor">
-            <a:schemeClr val="lt1"/>
-          </a:fontRef>
-        </p:style>
-        <p:txBody>
-          <a:bodyPr rtlCol="0" anchor="ctr"/>
-          <a:lstStyle/>
-          <a:p>
-            <a:pPr algn="ctr"/>
-            <a:endParaRPr lang="en-US"/>
-          </a:p>
-        </p:txBody>
-      </p:sp>
-      <p:cxnSp>
-        <p:nvCxnSpPr>
-          <p:cNvPr id="59" name="Straight Connector 58">
-            <a:extLst>
-              <a:ext uri="{FF2B5EF4-FFF2-40B4-BE49-F238E27FC236}">
-                <a16:creationId xmlns:a16="http://schemas.microsoft.com/office/drawing/2014/main" id="{37F42143-E5F4-E111-3AF1-C60F050F004E}"/>
-              </a:ext>
-            </a:extLst>
-          </p:cNvPr>
-          <p:cNvCxnSpPr>
-            <a:cxnSpLocks/>
-            <a:stCxn id="63" idx="3"/>
-          </p:cNvCxnSpPr>
-          <p:nvPr/>
-        </p:nvCxnSpPr>
-        <p:spPr>
-          <a:xfrm>
-            <a:off x="9764341" y="5419841"/>
-            <a:ext cx="769547" cy="2440"/>
-          </a:xfrm>
-          <a:prstGeom prst="line">
-            <a:avLst/>
-          </a:prstGeom>
-          <a:ln w="28575">
-            <a:solidFill>
-              <a:srgbClr val="00B0F0"/>
-            </a:solidFill>
-          </a:ln>
-        </p:spPr>
-        <p:style>
-          <a:lnRef idx="2">
-            <a:schemeClr val="accent1"/>
-          </a:lnRef>
-          <a:fillRef idx="0">
-            <a:schemeClr val="accent1"/>
-          </a:fillRef>
-          <a:effectRef idx="1">
-            <a:schemeClr val="accent1"/>
-          </a:effectRef>
-          <a:fontRef idx="minor">
-            <a:schemeClr val="tx1"/>
-          </a:fontRef>
-        </p:style>
-      </p:cxnSp>
-      <p:sp>
-        <p:nvSpPr>
-          <p:cNvPr id="63" name="Freeform 62">
-            <a:extLst>
-              <a:ext uri="{FF2B5EF4-FFF2-40B4-BE49-F238E27FC236}">
-                <a16:creationId xmlns:a16="http://schemas.microsoft.com/office/drawing/2014/main" id="{46D3AF2C-9B2C-408F-591A-BA40C87B00EA}"/>
-              </a:ext>
-            </a:extLst>
-          </p:cNvPr>
-          <p:cNvSpPr/>
-          <p:nvPr/>
-        </p:nvSpPr>
-        <p:spPr>
-          <a:xfrm>
-            <a:off x="9462733" y="5242706"/>
-            <a:ext cx="301608" cy="179575"/>
-          </a:xfrm>
-          <a:custGeom>
-            <a:avLst/>
-            <a:gdLst>
-              <a:gd name="connsiteX0" fmla="*/ 0 w 301608"/>
-              <a:gd name="connsiteY0" fmla="*/ 0 h 179575"/>
-              <a:gd name="connsiteX1" fmla="*/ 119686 w 301608"/>
-              <a:gd name="connsiteY1" fmla="*/ 52662 h 179575"/>
-              <a:gd name="connsiteX2" fmla="*/ 210647 w 301608"/>
-              <a:gd name="connsiteY2" fmla="*/ 167560 h 179575"/>
-              <a:gd name="connsiteX3" fmla="*/ 301608 w 301608"/>
-              <a:gd name="connsiteY3" fmla="*/ 177135 h 179575"/>
-            </a:gdLst>
-            <a:ahLst/>
-            <a:cxnLst>
-              <a:cxn ang="0">
-                <a:pos x="connsiteX0" y="connsiteY0"/>
-              </a:cxn>
-              <a:cxn ang="0">
-                <a:pos x="connsiteX1" y="connsiteY1"/>
-              </a:cxn>
-              <a:cxn ang="0">
-                <a:pos x="connsiteX2" y="connsiteY2"/>
-              </a:cxn>
-              <a:cxn ang="0">
-                <a:pos x="connsiteX3" y="connsiteY3"/>
-              </a:cxn>
-            </a:cxnLst>
-            <a:rect l="l" t="t" r="r" b="b"/>
-            <a:pathLst>
-              <a:path w="301608" h="179575">
-                <a:moveTo>
-                  <a:pt x="0" y="0"/>
-                </a:moveTo>
-                <a:cubicBezTo>
-                  <a:pt x="42289" y="12367"/>
-                  <a:pt x="84578" y="24735"/>
-                  <a:pt x="119686" y="52662"/>
-                </a:cubicBezTo>
-                <a:cubicBezTo>
-                  <a:pt x="154794" y="80589"/>
-                  <a:pt x="180327" y="146815"/>
-                  <a:pt x="210647" y="167560"/>
-                </a:cubicBezTo>
-                <a:cubicBezTo>
-                  <a:pt x="240967" y="188305"/>
-                  <a:pt x="179529" y="175539"/>
-                  <a:pt x="301608" y="177135"/>
-                </a:cubicBezTo>
-              </a:path>
-            </a:pathLst>
-          </a:custGeom>
-          <a:noFill/>
-          <a:ln w="28575">
-            <a:solidFill>
-              <a:srgbClr val="00B0F0"/>
-            </a:solidFill>
-          </a:ln>
-        </p:spPr>
-        <p:style>
-          <a:lnRef idx="2">
-            <a:schemeClr val="accent1">
-              <a:shade val="15000"/>
-            </a:schemeClr>
-          </a:lnRef>
-          <a:fillRef idx="1">
-            <a:schemeClr val="accent1"/>
-          </a:fillRef>
-          <a:effectRef idx="0">
-            <a:schemeClr val="accent1"/>
-          </a:effectRef>
-          <a:fontRef idx="minor">
-            <a:schemeClr val="lt1"/>
-          </a:fontRef>
-        </p:style>
-        <p:txBody>
-          <a:bodyPr rtlCol="0" anchor="ctr"/>
-          <a:lstStyle/>
-          <a:p>
-            <a:pPr algn="ctr"/>
-            <a:endParaRPr lang="en-US"/>
-          </a:p>
-        </p:txBody>
-      </p:sp>
-      <p:sp>
-        <p:nvSpPr>
-          <p:cNvPr id="65" name="Triangle 64">
-            <a:extLst>
-              <a:ext uri="{FF2B5EF4-FFF2-40B4-BE49-F238E27FC236}">
-                <a16:creationId xmlns:a16="http://schemas.microsoft.com/office/drawing/2014/main" id="{BDB81825-146D-00A3-8447-7D7AABD99B7A}"/>
-              </a:ext>
-            </a:extLst>
-          </p:cNvPr>
-          <p:cNvSpPr/>
-          <p:nvPr/>
-        </p:nvSpPr>
-        <p:spPr>
-          <a:xfrm rot="10800000">
-            <a:off x="2459755" y="4015407"/>
-            <a:ext cx="149301" cy="103627"/>
-          </a:xfrm>
-          <a:prstGeom prst="triangle">
-            <a:avLst/>
-          </a:prstGeom>
-          <a:noFill/>
-          <a:ln>
-            <a:solidFill>
-              <a:srgbClr val="00B0F0"/>
-            </a:solidFill>
-          </a:ln>
-        </p:spPr>
-        <p:style>
-          <a:lnRef idx="2">
-            <a:schemeClr val="accent1">
-              <a:shade val="15000"/>
-            </a:schemeClr>
-          </a:lnRef>
-          <a:fillRef idx="1">
-            <a:schemeClr val="accent1"/>
-          </a:fillRef>
-          <a:effectRef idx="0">
-            <a:schemeClr val="accent1"/>
-          </a:effectRef>
-          <a:fontRef idx="minor">
-            <a:schemeClr val="lt1"/>
-          </a:fontRef>
-        </p:style>
-        <p:txBody>
-          <a:bodyPr rtlCol="0" anchor="ctr"/>
-          <a:lstStyle/>
-          <a:p>
-            <a:pPr algn="ctr"/>
-            <a:endParaRPr lang="en-US"/>
-          </a:p>
-        </p:txBody>
-      </p:sp>
-      <p:sp>
-        <p:nvSpPr>
-          <p:cNvPr id="66" name="Triangle 65">
-            <a:extLst>
-              <a:ext uri="{FF2B5EF4-FFF2-40B4-BE49-F238E27FC236}">
-                <a16:creationId xmlns:a16="http://schemas.microsoft.com/office/drawing/2014/main" id="{CA9207D7-4EBA-92F1-413D-424A6DE6CB24}"/>
-              </a:ext>
-            </a:extLst>
-          </p:cNvPr>
-          <p:cNvSpPr/>
-          <p:nvPr/>
-        </p:nvSpPr>
-        <p:spPr>
-          <a:xfrm rot="10800000">
-            <a:off x="3959499" y="5780597"/>
-            <a:ext cx="149301" cy="103343"/>
-          </a:xfrm>
-          <a:prstGeom prst="triangle">
-            <a:avLst/>
-          </a:prstGeom>
-          <a:noFill/>
-          <a:ln>
-            <a:solidFill>
-              <a:srgbClr val="00B0F0"/>
-            </a:solidFill>
-          </a:ln>
-        </p:spPr>
-        <p:style>
-          <a:lnRef idx="2">
-            <a:schemeClr val="accent1">
-              <a:shade val="15000"/>
-            </a:schemeClr>
-          </a:lnRef>
-          <a:fillRef idx="1">
-            <a:schemeClr val="accent1"/>
-          </a:fillRef>
-          <a:effectRef idx="0">
-            <a:schemeClr val="accent1"/>
-          </a:effectRef>
-          <a:fontRef idx="minor">
-            <a:schemeClr val="lt1"/>
-          </a:fontRef>
-        </p:style>
-        <p:txBody>
-          <a:bodyPr rtlCol="0" anchor="ctr"/>
-          <a:lstStyle/>
-          <a:p>
-            <a:pPr algn="ctr"/>
-            <a:endParaRPr lang="en-US"/>
-          </a:p>
-        </p:txBody>
-      </p:sp>
-      <p:sp>
-        <p:nvSpPr>
-          <p:cNvPr id="67" name="Triangle 66">
-            <a:extLst>
-              <a:ext uri="{FF2B5EF4-FFF2-40B4-BE49-F238E27FC236}">
-                <a16:creationId xmlns:a16="http://schemas.microsoft.com/office/drawing/2014/main" id="{AF13D2B3-E59B-97E5-0CAD-7F4DB4DD63B6}"/>
-              </a:ext>
-            </a:extLst>
-          </p:cNvPr>
-          <p:cNvSpPr/>
-          <p:nvPr/>
-        </p:nvSpPr>
-        <p:spPr>
-          <a:xfrm rot="10800000">
-            <a:off x="7835413" y="5136437"/>
-            <a:ext cx="149301" cy="93157"/>
-          </a:xfrm>
-          <a:prstGeom prst="triangle">
-            <a:avLst/>
-          </a:prstGeom>
-          <a:noFill/>
-          <a:ln>
-            <a:solidFill>
-              <a:srgbClr val="00B0F0"/>
-            </a:solidFill>
-          </a:ln>
-        </p:spPr>
-        <p:style>
-          <a:lnRef idx="2">
-            <a:schemeClr val="accent1">
-              <a:shade val="15000"/>
-            </a:schemeClr>
-          </a:lnRef>
-          <a:fillRef idx="1">
-            <a:schemeClr val="accent1"/>
-          </a:fillRef>
-          <a:effectRef idx="0">
-            <a:schemeClr val="accent1"/>
-          </a:effectRef>
-          <a:fontRef idx="minor">
-            <a:schemeClr val="lt1"/>
-          </a:fontRef>
-        </p:style>
-        <p:txBody>
-          <a:bodyPr rtlCol="0" anchor="ctr"/>
-          <a:lstStyle/>
-          <a:p>
-            <a:pPr algn="ctr"/>
-            <a:endParaRPr lang="en-US"/>
-          </a:p>
-        </p:txBody>
-      </p:sp>
-      <p:sp>
-        <p:nvSpPr>
-          <p:cNvPr id="68" name="Regular Pentagon 67">
-            <a:extLst>
-              <a:ext uri="{FF2B5EF4-FFF2-40B4-BE49-F238E27FC236}">
-                <a16:creationId xmlns:a16="http://schemas.microsoft.com/office/drawing/2014/main" id="{4F00517E-AEAC-6C96-0C77-14555F2193B4}"/>
-              </a:ext>
-            </a:extLst>
-          </p:cNvPr>
-          <p:cNvSpPr/>
-          <p:nvPr/>
-        </p:nvSpPr>
-        <p:spPr>
-          <a:xfrm rot="2125004">
-            <a:off x="2659972" y="3238178"/>
-            <a:ext cx="302322" cy="272245"/>
-          </a:xfrm>
-          <a:prstGeom prst="pentagon">
-            <a:avLst/>
-          </a:prstGeom>
-          <a:solidFill>
-            <a:srgbClr val="FF0000"/>
-          </a:solidFill>
-          <a:ln>
-            <a:solidFill>
-              <a:srgbClr val="C00000"/>
-            </a:solidFill>
-          </a:ln>
-        </p:spPr>
-        <p:style>
-          <a:lnRef idx="2">
-            <a:schemeClr val="accent1">
-              <a:shade val="15000"/>
-            </a:schemeClr>
-          </a:lnRef>
-          <a:fillRef idx="1">
-            <a:schemeClr val="accent1"/>
-          </a:fillRef>
-          <a:effectRef idx="0">
-            <a:schemeClr val="accent1"/>
-          </a:effectRef>
-          <a:fontRef idx="minor">
-            <a:schemeClr val="lt1"/>
-          </a:fontRef>
-        </p:style>
-        <p:txBody>
-          <a:bodyPr rtlCol="0" anchor="ctr"/>
-          <a:lstStyle/>
-          <a:p>
-            <a:pPr algn="ctr"/>
-            <a:endParaRPr lang="en-US"/>
-          </a:p>
-        </p:txBody>
-      </p:sp>
-      <p:sp>
-        <p:nvSpPr>
-          <p:cNvPr id="69" name="Regular Pentagon 68">
-            <a:extLst>
-              <a:ext uri="{FF2B5EF4-FFF2-40B4-BE49-F238E27FC236}">
-                <a16:creationId xmlns:a16="http://schemas.microsoft.com/office/drawing/2014/main" id="{28DAA753-79AA-E8F9-9919-8F4998F7A2F0}"/>
-              </a:ext>
-            </a:extLst>
-          </p:cNvPr>
-          <p:cNvSpPr/>
-          <p:nvPr/>
-        </p:nvSpPr>
-        <p:spPr>
-          <a:xfrm rot="2125004">
-            <a:off x="4643664" y="4536610"/>
-            <a:ext cx="302322" cy="272245"/>
-          </a:xfrm>
-          <a:prstGeom prst="pentagon">
-            <a:avLst/>
-          </a:prstGeom>
-          <a:solidFill>
-            <a:srgbClr val="FF0000"/>
-          </a:solidFill>
-          <a:ln>
-            <a:solidFill>
-              <a:srgbClr val="C00000"/>
-            </a:solidFill>
-          </a:ln>
-        </p:spPr>
-        <p:style>
-          <a:lnRef idx="2">
-            <a:schemeClr val="accent1">
-              <a:shade val="15000"/>
-            </a:schemeClr>
-          </a:lnRef>
-          <a:fillRef idx="1">
-            <a:schemeClr val="accent1"/>
-          </a:fillRef>
-          <a:effectRef idx="0">
-            <a:schemeClr val="accent1"/>
-          </a:effectRef>
-          <a:fontRef idx="minor">
-            <a:schemeClr val="lt1"/>
-          </a:fontRef>
-        </p:style>
-        <p:txBody>
-          <a:bodyPr rtlCol="0" anchor="ctr"/>
-          <a:lstStyle/>
-          <a:p>
-            <a:pPr algn="ctr"/>
-            <a:endParaRPr lang="en-US"/>
-          </a:p>
-        </p:txBody>
-      </p:sp>
-      <p:sp>
-        <p:nvSpPr>
-          <p:cNvPr id="70" name="Regular Pentagon 69">
-            <a:extLst>
-              <a:ext uri="{FF2B5EF4-FFF2-40B4-BE49-F238E27FC236}">
-                <a16:creationId xmlns:a16="http://schemas.microsoft.com/office/drawing/2014/main" id="{17B8F875-2560-3235-BFDF-1E16AFA8C840}"/>
-              </a:ext>
-            </a:extLst>
-          </p:cNvPr>
-          <p:cNvSpPr/>
-          <p:nvPr/>
-        </p:nvSpPr>
-        <p:spPr>
-          <a:xfrm rot="2125004">
-            <a:off x="8340337" y="4536612"/>
-            <a:ext cx="302322" cy="272245"/>
-          </a:xfrm>
-          <a:prstGeom prst="pentagon">
-            <a:avLst/>
-          </a:prstGeom>
-          <a:solidFill>
-            <a:srgbClr val="FF0000"/>
-          </a:solidFill>
-          <a:ln>
-            <a:solidFill>
-              <a:srgbClr val="C00000"/>
-            </a:solidFill>
-          </a:ln>
-        </p:spPr>
-        <p:style>
-          <a:lnRef idx="2">
-            <a:schemeClr val="accent1">
-              <a:shade val="15000"/>
-            </a:schemeClr>
-          </a:lnRef>
-          <a:fillRef idx="1">
-            <a:schemeClr val="accent1"/>
-          </a:fillRef>
-          <a:effectRef idx="0">
-            <a:schemeClr val="accent1"/>
-          </a:effectRef>
-          <a:fontRef idx="minor">
-            <a:schemeClr val="lt1"/>
-          </a:fontRef>
-        </p:style>
-        <p:txBody>
-          <a:bodyPr rtlCol="0" anchor="ctr"/>
-          <a:lstStyle/>
-          <a:p>
-            <a:pPr algn="ctr"/>
-            <a:endParaRPr lang="en-US"/>
-          </a:p>
-        </p:txBody>
-      </p:sp>
-      <p:cxnSp>
-        <p:nvCxnSpPr>
-          <p:cNvPr id="72" name="Straight Connector 71">
-            <a:extLst>
-              <a:ext uri="{FF2B5EF4-FFF2-40B4-BE49-F238E27FC236}">
-                <a16:creationId xmlns:a16="http://schemas.microsoft.com/office/drawing/2014/main" id="{9ED195A9-8FFF-6D68-35CE-8F18D6E1C89F}"/>
-              </a:ext>
-            </a:extLst>
-          </p:cNvPr>
-          <p:cNvCxnSpPr>
-            <a:cxnSpLocks/>
-            <a:stCxn id="68" idx="4"/>
-          </p:cNvCxnSpPr>
-          <p:nvPr/>
-        </p:nvCxnSpPr>
-        <p:spPr>
-          <a:xfrm>
-            <a:off x="2808383" y="3539374"/>
-            <a:ext cx="2063" cy="590367"/>
-          </a:xfrm>
-          <a:prstGeom prst="line">
-            <a:avLst/>
-          </a:prstGeom>
-          <a:ln w="38100">
-            <a:solidFill>
-              <a:srgbClr val="C00000">
-                <a:alpha val="48565"/>
-              </a:srgbClr>
-            </a:solidFill>
-            <a:prstDash val="sysDot"/>
-          </a:ln>
-        </p:spPr>
-        <p:style>
-          <a:lnRef idx="2">
-            <a:schemeClr val="accent1"/>
-          </a:lnRef>
-          <a:fillRef idx="0">
-            <a:schemeClr val="accent1"/>
-          </a:fillRef>
-          <a:effectRef idx="1">
-            <a:schemeClr val="accent1"/>
-          </a:effectRef>
-          <a:fontRef idx="minor">
-            <a:schemeClr val="tx1"/>
-          </a:fontRef>
-        </p:style>
-      </p:cxnSp>
-      <p:cxnSp>
-        <p:nvCxnSpPr>
-          <p:cNvPr id="77" name="Straight Connector 76">
-            <a:extLst>
-              <a:ext uri="{FF2B5EF4-FFF2-40B4-BE49-F238E27FC236}">
-                <a16:creationId xmlns:a16="http://schemas.microsoft.com/office/drawing/2014/main" id="{13C478A8-68D4-40A9-946E-A6DAA721F357}"/>
-              </a:ext>
-            </a:extLst>
-          </p:cNvPr>
-          <p:cNvCxnSpPr>
-            <a:cxnSpLocks/>
-          </p:cNvCxnSpPr>
-          <p:nvPr/>
-        </p:nvCxnSpPr>
-        <p:spPr>
-          <a:xfrm>
-            <a:off x="4789964" y="4859040"/>
-            <a:ext cx="1032" cy="1008123"/>
-          </a:xfrm>
-          <a:prstGeom prst="line">
-            <a:avLst/>
-          </a:prstGeom>
-          <a:ln w="38100">
-            <a:solidFill>
-              <a:srgbClr val="C00000">
-                <a:alpha val="48565"/>
-              </a:srgbClr>
-            </a:solidFill>
-            <a:prstDash val="sysDot"/>
-          </a:ln>
-        </p:spPr>
-        <p:style>
-          <a:lnRef idx="2">
-            <a:schemeClr val="accent1"/>
-          </a:lnRef>
-          <a:fillRef idx="0">
-            <a:schemeClr val="accent1"/>
-          </a:fillRef>
-          <a:effectRef idx="1">
-            <a:schemeClr val="accent1"/>
-          </a:effectRef>
-          <a:fontRef idx="minor">
-            <a:schemeClr val="tx1"/>
-          </a:fontRef>
-        </p:style>
-      </p:cxnSp>
-      <p:cxnSp>
-        <p:nvCxnSpPr>
-          <p:cNvPr id="79" name="Straight Connector 78">
-            <a:extLst>
-              <a:ext uri="{FF2B5EF4-FFF2-40B4-BE49-F238E27FC236}">
-                <a16:creationId xmlns:a16="http://schemas.microsoft.com/office/drawing/2014/main" id="{50CA631E-9B9B-AEBB-7F7A-9D0D138B4498}"/>
-              </a:ext>
-            </a:extLst>
-          </p:cNvPr>
-          <p:cNvCxnSpPr>
-            <a:cxnSpLocks/>
-          </p:cNvCxnSpPr>
-          <p:nvPr/>
-        </p:nvCxnSpPr>
-        <p:spPr>
-          <a:xfrm>
-            <a:off x="8490466" y="4859040"/>
-            <a:ext cx="0" cy="383666"/>
-          </a:xfrm>
-          <a:prstGeom prst="line">
-            <a:avLst/>
-          </a:prstGeom>
-          <a:ln w="38100">
-            <a:solidFill>
-              <a:srgbClr val="C00000">
-                <a:alpha val="48565"/>
-              </a:srgbClr>
-            </a:solidFill>
-            <a:prstDash val="sysDot"/>
-          </a:ln>
-        </p:spPr>
-        <p:style>
-          <a:lnRef idx="2">
-            <a:schemeClr val="accent1"/>
-          </a:lnRef>
-          <a:fillRef idx="0">
-            <a:schemeClr val="accent1"/>
-          </a:fillRef>
-          <a:effectRef idx="1">
-            <a:schemeClr val="accent1"/>
-          </a:effectRef>
-          <a:fontRef idx="minor">
-            <a:schemeClr val="tx1"/>
-          </a:fontRef>
-        </p:style>
-      </p:cxnSp>
-      <p:sp>
-        <p:nvSpPr>
-          <p:cNvPr id="84" name="Freeform 83">
-            <a:extLst>
-              <a:ext uri="{FF2B5EF4-FFF2-40B4-BE49-F238E27FC236}">
-                <a16:creationId xmlns:a16="http://schemas.microsoft.com/office/drawing/2014/main" id="{FE3D0911-EAC7-38FC-7B2D-38D7B13F9C54}"/>
-              </a:ext>
-            </a:extLst>
-          </p:cNvPr>
-          <p:cNvSpPr/>
-          <p:nvPr/>
-        </p:nvSpPr>
-        <p:spPr>
-          <a:xfrm>
-            <a:off x="7131802" y="5502938"/>
-            <a:ext cx="190851" cy="165139"/>
-          </a:xfrm>
-          <a:custGeom>
-            <a:avLst/>
-            <a:gdLst>
-              <a:gd name="connsiteX0" fmla="*/ 69981 w 503444"/>
-              <a:gd name="connsiteY0" fmla="*/ 0 h 407268"/>
-              <a:gd name="connsiteX1" fmla="*/ 10748 w 503444"/>
-              <a:gd name="connsiteY1" fmla="*/ 236930 h 407268"/>
-              <a:gd name="connsiteX2" fmla="*/ 262486 w 503444"/>
-              <a:gd name="connsiteY2" fmla="*/ 407223 h 407268"/>
-              <a:gd name="connsiteX3" fmla="*/ 495713 w 503444"/>
-              <a:gd name="connsiteY3" fmla="*/ 251738 h 407268"/>
-              <a:gd name="connsiteX4" fmla="*/ 425375 w 503444"/>
-              <a:gd name="connsiteY4" fmla="*/ 44425 h 407268"/>
-              <a:gd name="connsiteX5" fmla="*/ 206956 w 503444"/>
-              <a:gd name="connsiteY5" fmla="*/ 70339 h 407268"/>
-              <a:gd name="connsiteX6" fmla="*/ 173637 w 503444"/>
-              <a:gd name="connsiteY6" fmla="*/ 144379 h 407268"/>
-              <a:gd name="connsiteX7" fmla="*/ 181041 w 503444"/>
-              <a:gd name="connsiteY7" fmla="*/ 262844 h 407268"/>
-              <a:gd name="connsiteX8" fmla="*/ 343930 w 503444"/>
-              <a:gd name="connsiteY8" fmla="*/ 192506 h 407268"/>
-              <a:gd name="connsiteX9" fmla="*/ 288400 w 503444"/>
-              <a:gd name="connsiteY9" fmla="*/ 155485 h 407268"/>
-            </a:gdLst>
-            <a:ahLst/>
-            <a:cxnLst>
-              <a:cxn ang="0">
-                <a:pos x="connsiteX0" y="connsiteY0"/>
-              </a:cxn>
-              <a:cxn ang="0">
-                <a:pos x="connsiteX1" y="connsiteY1"/>
-              </a:cxn>
-              <a:cxn ang="0">
-                <a:pos x="connsiteX2" y="connsiteY2"/>
-              </a:cxn>
-              <a:cxn ang="0">
-                <a:pos x="connsiteX3" y="connsiteY3"/>
-              </a:cxn>
-              <a:cxn ang="0">
-                <a:pos x="connsiteX4" y="connsiteY4"/>
-              </a:cxn>
-              <a:cxn ang="0">
-                <a:pos x="connsiteX5" y="connsiteY5"/>
-              </a:cxn>
-              <a:cxn ang="0">
-                <a:pos x="connsiteX6" y="connsiteY6"/>
-              </a:cxn>
-              <a:cxn ang="0">
-                <a:pos x="connsiteX7" y="connsiteY7"/>
-              </a:cxn>
-              <a:cxn ang="0">
-                <a:pos x="connsiteX8" y="connsiteY8"/>
-              </a:cxn>
-              <a:cxn ang="0">
-                <a:pos x="connsiteX9" y="connsiteY9"/>
-              </a:cxn>
-            </a:cxnLst>
-            <a:rect l="l" t="t" r="r" b="b"/>
-            <a:pathLst>
-              <a:path w="503444" h="407268">
-                <a:moveTo>
-                  <a:pt x="69981" y="0"/>
-                </a:moveTo>
-                <a:cubicBezTo>
-                  <a:pt x="24322" y="84530"/>
-                  <a:pt x="-21336" y="169060"/>
-                  <a:pt x="10748" y="236930"/>
-                </a:cubicBezTo>
-                <a:cubicBezTo>
-                  <a:pt x="42832" y="304800"/>
-                  <a:pt x="181659" y="404755"/>
-                  <a:pt x="262486" y="407223"/>
-                </a:cubicBezTo>
-                <a:cubicBezTo>
-                  <a:pt x="343313" y="409691"/>
-                  <a:pt x="468565" y="312204"/>
-                  <a:pt x="495713" y="251738"/>
-                </a:cubicBezTo>
-                <a:cubicBezTo>
-                  <a:pt x="522861" y="191272"/>
-                  <a:pt x="473501" y="74658"/>
-                  <a:pt x="425375" y="44425"/>
-                </a:cubicBezTo>
-                <a:cubicBezTo>
-                  <a:pt x="377249" y="14192"/>
-                  <a:pt x="248912" y="53680"/>
-                  <a:pt x="206956" y="70339"/>
-                </a:cubicBezTo>
-                <a:cubicBezTo>
-                  <a:pt x="165000" y="86998"/>
-                  <a:pt x="177956" y="112295"/>
-                  <a:pt x="173637" y="144379"/>
-                </a:cubicBezTo>
-                <a:cubicBezTo>
-                  <a:pt x="169318" y="176463"/>
-                  <a:pt x="152659" y="254823"/>
-                  <a:pt x="181041" y="262844"/>
-                </a:cubicBezTo>
-                <a:cubicBezTo>
-                  <a:pt x="209423" y="270865"/>
-                  <a:pt x="326037" y="210399"/>
-                  <a:pt x="343930" y="192506"/>
-                </a:cubicBezTo>
-                <a:cubicBezTo>
-                  <a:pt x="361823" y="174613"/>
-                  <a:pt x="302591" y="156102"/>
-                  <a:pt x="288400" y="155485"/>
-                </a:cubicBezTo>
-              </a:path>
-            </a:pathLst>
-          </a:custGeom>
-          <a:noFill/>
-          <a:ln>
-            <a:solidFill>
-              <a:srgbClr val="00B0F0"/>
-            </a:solidFill>
-          </a:ln>
-        </p:spPr>
-        <p:style>
-          <a:lnRef idx="2">
-            <a:schemeClr val="accent1">
-              <a:shade val="15000"/>
-            </a:schemeClr>
-          </a:lnRef>
-          <a:fillRef idx="1">
-            <a:schemeClr val="accent1"/>
-          </a:fillRef>
-          <a:effectRef idx="0">
-            <a:schemeClr val="accent1"/>
-          </a:effectRef>
-          <a:fontRef idx="minor">
-            <a:schemeClr val="lt1"/>
-          </a:fontRef>
-        </p:style>
-        <p:txBody>
-          <a:bodyPr rtlCol="0" anchor="ctr"/>
-          <a:lstStyle/>
-          <a:p>
-            <a:pPr algn="ctr"/>
-            <a:endParaRPr lang="en-US"/>
-          </a:p>
-        </p:txBody>
-      </p:sp>
-      <p:sp>
-        <p:nvSpPr>
-          <p:cNvPr id="85" name="Freeform 84">
-            <a:extLst>
-              <a:ext uri="{FF2B5EF4-FFF2-40B4-BE49-F238E27FC236}">
-                <a16:creationId xmlns:a16="http://schemas.microsoft.com/office/drawing/2014/main" id="{7F20C2A3-9330-A4EE-507F-636BDAEBC75B}"/>
-              </a:ext>
-            </a:extLst>
-          </p:cNvPr>
-          <p:cNvSpPr/>
-          <p:nvPr/>
-        </p:nvSpPr>
-        <p:spPr>
-          <a:xfrm rot="5203966">
-            <a:off x="7341523" y="5366837"/>
-            <a:ext cx="190851" cy="165139"/>
-          </a:xfrm>
-          <a:custGeom>
-            <a:avLst/>
-            <a:gdLst>
-              <a:gd name="connsiteX0" fmla="*/ 69981 w 503444"/>
-              <a:gd name="connsiteY0" fmla="*/ 0 h 407268"/>
-              <a:gd name="connsiteX1" fmla="*/ 10748 w 503444"/>
-              <a:gd name="connsiteY1" fmla="*/ 236930 h 407268"/>
-              <a:gd name="connsiteX2" fmla="*/ 262486 w 503444"/>
-              <a:gd name="connsiteY2" fmla="*/ 407223 h 407268"/>
-              <a:gd name="connsiteX3" fmla="*/ 495713 w 503444"/>
-              <a:gd name="connsiteY3" fmla="*/ 251738 h 407268"/>
-              <a:gd name="connsiteX4" fmla="*/ 425375 w 503444"/>
-              <a:gd name="connsiteY4" fmla="*/ 44425 h 407268"/>
-              <a:gd name="connsiteX5" fmla="*/ 206956 w 503444"/>
-              <a:gd name="connsiteY5" fmla="*/ 70339 h 407268"/>
-              <a:gd name="connsiteX6" fmla="*/ 173637 w 503444"/>
-              <a:gd name="connsiteY6" fmla="*/ 144379 h 407268"/>
-              <a:gd name="connsiteX7" fmla="*/ 181041 w 503444"/>
-              <a:gd name="connsiteY7" fmla="*/ 262844 h 407268"/>
-              <a:gd name="connsiteX8" fmla="*/ 343930 w 503444"/>
-              <a:gd name="connsiteY8" fmla="*/ 192506 h 407268"/>
-              <a:gd name="connsiteX9" fmla="*/ 288400 w 503444"/>
-              <a:gd name="connsiteY9" fmla="*/ 155485 h 407268"/>
-            </a:gdLst>
-            <a:ahLst/>
-            <a:cxnLst>
-              <a:cxn ang="0">
-                <a:pos x="connsiteX0" y="connsiteY0"/>
-              </a:cxn>
-              <a:cxn ang="0">
-                <a:pos x="connsiteX1" y="connsiteY1"/>
-              </a:cxn>
-              <a:cxn ang="0">
-                <a:pos x="connsiteX2" y="connsiteY2"/>
-              </a:cxn>
-              <a:cxn ang="0">
-                <a:pos x="connsiteX3" y="connsiteY3"/>
-              </a:cxn>
-              <a:cxn ang="0">
-                <a:pos x="connsiteX4" y="connsiteY4"/>
-              </a:cxn>
-              <a:cxn ang="0">
-                <a:pos x="connsiteX5" y="connsiteY5"/>
-              </a:cxn>
-              <a:cxn ang="0">
-                <a:pos x="connsiteX6" y="connsiteY6"/>
-              </a:cxn>
-              <a:cxn ang="0">
-                <a:pos x="connsiteX7" y="connsiteY7"/>
-              </a:cxn>
-              <a:cxn ang="0">
-                <a:pos x="connsiteX8" y="connsiteY8"/>
-              </a:cxn>
-              <a:cxn ang="0">
-                <a:pos x="connsiteX9" y="connsiteY9"/>
-              </a:cxn>
-            </a:cxnLst>
-            <a:rect l="l" t="t" r="r" b="b"/>
-            <a:pathLst>
-              <a:path w="503444" h="407268">
-                <a:moveTo>
-                  <a:pt x="69981" y="0"/>
-                </a:moveTo>
-                <a:cubicBezTo>
-                  <a:pt x="24322" y="84530"/>
-                  <a:pt x="-21336" y="169060"/>
-                  <a:pt x="10748" y="236930"/>
-                </a:cubicBezTo>
-                <a:cubicBezTo>
-                  <a:pt x="42832" y="304800"/>
-                  <a:pt x="181659" y="404755"/>
-                  <a:pt x="262486" y="407223"/>
-                </a:cubicBezTo>
-                <a:cubicBezTo>
-                  <a:pt x="343313" y="409691"/>
-                  <a:pt x="468565" y="312204"/>
-                  <a:pt x="495713" y="251738"/>
-                </a:cubicBezTo>
-                <a:cubicBezTo>
-                  <a:pt x="522861" y="191272"/>
-                  <a:pt x="473501" y="74658"/>
-                  <a:pt x="425375" y="44425"/>
-                </a:cubicBezTo>
-                <a:cubicBezTo>
-                  <a:pt x="377249" y="14192"/>
-                  <a:pt x="248912" y="53680"/>
-                  <a:pt x="206956" y="70339"/>
-                </a:cubicBezTo>
-                <a:cubicBezTo>
-                  <a:pt x="165000" y="86998"/>
-                  <a:pt x="177956" y="112295"/>
-                  <a:pt x="173637" y="144379"/>
-                </a:cubicBezTo>
-                <a:cubicBezTo>
-                  <a:pt x="169318" y="176463"/>
-                  <a:pt x="152659" y="254823"/>
-                  <a:pt x="181041" y="262844"/>
-                </a:cubicBezTo>
-                <a:cubicBezTo>
-                  <a:pt x="209423" y="270865"/>
-                  <a:pt x="326037" y="210399"/>
-                  <a:pt x="343930" y="192506"/>
-                </a:cubicBezTo>
-                <a:cubicBezTo>
-                  <a:pt x="361823" y="174613"/>
-                  <a:pt x="302591" y="156102"/>
-                  <a:pt x="288400" y="155485"/>
-                </a:cubicBezTo>
-              </a:path>
-            </a:pathLst>
-          </a:custGeom>
-          <a:noFill/>
-          <a:ln>
-            <a:solidFill>
-              <a:srgbClr val="00B0F0"/>
-            </a:solidFill>
-          </a:ln>
-        </p:spPr>
-        <p:style>
-          <a:lnRef idx="2">
-            <a:schemeClr val="accent1">
-              <a:shade val="15000"/>
-            </a:schemeClr>
-          </a:lnRef>
-          <a:fillRef idx="1">
-            <a:schemeClr val="accent1"/>
-          </a:fillRef>
-          <a:effectRef idx="0">
-            <a:schemeClr val="accent1"/>
-          </a:effectRef>
-          <a:fontRef idx="minor">
-            <a:schemeClr val="lt1"/>
-          </a:fontRef>
-        </p:style>
-        <p:txBody>
-          <a:bodyPr rtlCol="0" anchor="ctr"/>
-          <a:lstStyle/>
-          <a:p>
-            <a:pPr algn="ctr"/>
-            <a:endParaRPr lang="en-US"/>
-          </a:p>
-        </p:txBody>
-      </p:sp>
-      <p:sp>
-        <p:nvSpPr>
-          <p:cNvPr id="86" name="Freeform 85">
-            <a:extLst>
-              <a:ext uri="{FF2B5EF4-FFF2-40B4-BE49-F238E27FC236}">
-                <a16:creationId xmlns:a16="http://schemas.microsoft.com/office/drawing/2014/main" id="{F6FBA395-6E0E-713B-85C8-1D31C9CDF84D}"/>
-              </a:ext>
-            </a:extLst>
-          </p:cNvPr>
-          <p:cNvSpPr/>
-          <p:nvPr/>
-        </p:nvSpPr>
-        <p:spPr>
-          <a:xfrm rot="17958055">
-            <a:off x="6961708" y="5699562"/>
-            <a:ext cx="190851" cy="165139"/>
-          </a:xfrm>
-          <a:custGeom>
-            <a:avLst/>
-            <a:gdLst>
-              <a:gd name="connsiteX0" fmla="*/ 69981 w 503444"/>
-              <a:gd name="connsiteY0" fmla="*/ 0 h 407268"/>
-              <a:gd name="connsiteX1" fmla="*/ 10748 w 503444"/>
-              <a:gd name="connsiteY1" fmla="*/ 236930 h 407268"/>
-              <a:gd name="connsiteX2" fmla="*/ 262486 w 503444"/>
-              <a:gd name="connsiteY2" fmla="*/ 407223 h 407268"/>
-              <a:gd name="connsiteX3" fmla="*/ 495713 w 503444"/>
-              <a:gd name="connsiteY3" fmla="*/ 251738 h 407268"/>
-              <a:gd name="connsiteX4" fmla="*/ 425375 w 503444"/>
-              <a:gd name="connsiteY4" fmla="*/ 44425 h 407268"/>
-              <a:gd name="connsiteX5" fmla="*/ 206956 w 503444"/>
-              <a:gd name="connsiteY5" fmla="*/ 70339 h 407268"/>
-              <a:gd name="connsiteX6" fmla="*/ 173637 w 503444"/>
-              <a:gd name="connsiteY6" fmla="*/ 144379 h 407268"/>
-              <a:gd name="connsiteX7" fmla="*/ 181041 w 503444"/>
-              <a:gd name="connsiteY7" fmla="*/ 262844 h 407268"/>
-              <a:gd name="connsiteX8" fmla="*/ 343930 w 503444"/>
-              <a:gd name="connsiteY8" fmla="*/ 192506 h 407268"/>
-              <a:gd name="connsiteX9" fmla="*/ 288400 w 503444"/>
-              <a:gd name="connsiteY9" fmla="*/ 155485 h 407268"/>
-            </a:gdLst>
-            <a:ahLst/>
-            <a:cxnLst>
-              <a:cxn ang="0">
-                <a:pos x="connsiteX0" y="connsiteY0"/>
-              </a:cxn>
-              <a:cxn ang="0">
-                <a:pos x="connsiteX1" y="connsiteY1"/>
-              </a:cxn>
-              <a:cxn ang="0">
-                <a:pos x="connsiteX2" y="connsiteY2"/>
-              </a:cxn>
-              <a:cxn ang="0">
-                <a:pos x="connsiteX3" y="connsiteY3"/>
-              </a:cxn>
-              <a:cxn ang="0">
-                <a:pos x="connsiteX4" y="connsiteY4"/>
-              </a:cxn>
-              <a:cxn ang="0">
-                <a:pos x="connsiteX5" y="connsiteY5"/>
-              </a:cxn>
-              <a:cxn ang="0">
-                <a:pos x="connsiteX6" y="connsiteY6"/>
-              </a:cxn>
-              <a:cxn ang="0">
-                <a:pos x="connsiteX7" y="connsiteY7"/>
-              </a:cxn>
-              <a:cxn ang="0">
-                <a:pos x="connsiteX8" y="connsiteY8"/>
-              </a:cxn>
-              <a:cxn ang="0">
-                <a:pos x="connsiteX9" y="connsiteY9"/>
-              </a:cxn>
-            </a:cxnLst>
-            <a:rect l="l" t="t" r="r" b="b"/>
-            <a:pathLst>
-              <a:path w="503444" h="407268">
-                <a:moveTo>
-                  <a:pt x="69981" y="0"/>
-                </a:moveTo>
-                <a:cubicBezTo>
-                  <a:pt x="24322" y="84530"/>
-                  <a:pt x="-21336" y="169060"/>
-                  <a:pt x="10748" y="236930"/>
-                </a:cubicBezTo>
-                <a:cubicBezTo>
-                  <a:pt x="42832" y="304800"/>
-                  <a:pt x="181659" y="404755"/>
-                  <a:pt x="262486" y="407223"/>
-                </a:cubicBezTo>
-                <a:cubicBezTo>
-                  <a:pt x="343313" y="409691"/>
-                  <a:pt x="468565" y="312204"/>
-                  <a:pt x="495713" y="251738"/>
-                </a:cubicBezTo>
-                <a:cubicBezTo>
-                  <a:pt x="522861" y="191272"/>
-                  <a:pt x="473501" y="74658"/>
-                  <a:pt x="425375" y="44425"/>
-                </a:cubicBezTo>
-                <a:cubicBezTo>
-                  <a:pt x="377249" y="14192"/>
-                  <a:pt x="248912" y="53680"/>
-                  <a:pt x="206956" y="70339"/>
-                </a:cubicBezTo>
-                <a:cubicBezTo>
-                  <a:pt x="165000" y="86998"/>
-                  <a:pt x="177956" y="112295"/>
-                  <a:pt x="173637" y="144379"/>
-                </a:cubicBezTo>
-                <a:cubicBezTo>
-                  <a:pt x="169318" y="176463"/>
-                  <a:pt x="152659" y="254823"/>
-                  <a:pt x="181041" y="262844"/>
-                </a:cubicBezTo>
-                <a:cubicBezTo>
-                  <a:pt x="209423" y="270865"/>
-                  <a:pt x="326037" y="210399"/>
-                  <a:pt x="343930" y="192506"/>
-                </a:cubicBezTo>
-                <a:cubicBezTo>
-                  <a:pt x="361823" y="174613"/>
-                  <a:pt x="302591" y="156102"/>
-                  <a:pt x="288400" y="155485"/>
-                </a:cubicBezTo>
-              </a:path>
-            </a:pathLst>
-          </a:custGeom>
-          <a:noFill/>
-          <a:ln>
-            <a:solidFill>
-              <a:srgbClr val="00B0F0"/>
-            </a:solidFill>
-          </a:ln>
-        </p:spPr>
-        <p:style>
-          <a:lnRef idx="2">
-            <a:schemeClr val="accent1">
-              <a:shade val="15000"/>
-            </a:schemeClr>
-          </a:lnRef>
-          <a:fillRef idx="1">
-            <a:schemeClr val="accent1"/>
-          </a:fillRef>
-          <a:effectRef idx="0">
-            <a:schemeClr val="accent1"/>
-          </a:effectRef>
-          <a:fontRef idx="minor">
-            <a:schemeClr val="lt1"/>
-          </a:fontRef>
-        </p:style>
-        <p:txBody>
-          <a:bodyPr rtlCol="0" anchor="ctr"/>
-          <a:lstStyle/>
-          <a:p>
-            <a:pPr algn="ctr"/>
-            <a:endParaRPr lang="en-US"/>
-          </a:p>
-        </p:txBody>
-      </p:sp>
-      <p:sp>
-        <p:nvSpPr>
-          <p:cNvPr id="87" name="Freeform 86">
-            <a:extLst>
-              <a:ext uri="{FF2B5EF4-FFF2-40B4-BE49-F238E27FC236}">
-                <a16:creationId xmlns:a16="http://schemas.microsoft.com/office/drawing/2014/main" id="{28A61DA6-9B31-B4B4-30DA-6BCB6C0AF0F5}"/>
-              </a:ext>
-            </a:extLst>
-          </p:cNvPr>
-          <p:cNvSpPr/>
-          <p:nvPr/>
-        </p:nvSpPr>
-        <p:spPr>
-          <a:xfrm rot="13496133">
-            <a:off x="7240438" y="5715837"/>
-            <a:ext cx="190851" cy="165139"/>
-          </a:xfrm>
-          <a:custGeom>
-            <a:avLst/>
-            <a:gdLst>
-              <a:gd name="connsiteX0" fmla="*/ 69981 w 503444"/>
-              <a:gd name="connsiteY0" fmla="*/ 0 h 407268"/>
-              <a:gd name="connsiteX1" fmla="*/ 10748 w 503444"/>
-              <a:gd name="connsiteY1" fmla="*/ 236930 h 407268"/>
-              <a:gd name="connsiteX2" fmla="*/ 262486 w 503444"/>
-              <a:gd name="connsiteY2" fmla="*/ 407223 h 407268"/>
-              <a:gd name="connsiteX3" fmla="*/ 495713 w 503444"/>
-              <a:gd name="connsiteY3" fmla="*/ 251738 h 407268"/>
-              <a:gd name="connsiteX4" fmla="*/ 425375 w 503444"/>
-              <a:gd name="connsiteY4" fmla="*/ 44425 h 407268"/>
-              <a:gd name="connsiteX5" fmla="*/ 206956 w 503444"/>
-              <a:gd name="connsiteY5" fmla="*/ 70339 h 407268"/>
-              <a:gd name="connsiteX6" fmla="*/ 173637 w 503444"/>
-              <a:gd name="connsiteY6" fmla="*/ 144379 h 407268"/>
-              <a:gd name="connsiteX7" fmla="*/ 181041 w 503444"/>
-              <a:gd name="connsiteY7" fmla="*/ 262844 h 407268"/>
-              <a:gd name="connsiteX8" fmla="*/ 343930 w 503444"/>
-              <a:gd name="connsiteY8" fmla="*/ 192506 h 407268"/>
-              <a:gd name="connsiteX9" fmla="*/ 288400 w 503444"/>
-              <a:gd name="connsiteY9" fmla="*/ 155485 h 407268"/>
-            </a:gdLst>
-            <a:ahLst/>
-            <a:cxnLst>
-              <a:cxn ang="0">
-                <a:pos x="connsiteX0" y="connsiteY0"/>
-              </a:cxn>
-              <a:cxn ang="0">
-                <a:pos x="connsiteX1" y="connsiteY1"/>
-              </a:cxn>
-              <a:cxn ang="0">
-                <a:pos x="connsiteX2" y="connsiteY2"/>
-              </a:cxn>
-              <a:cxn ang="0">
-                <a:pos x="connsiteX3" y="connsiteY3"/>
-              </a:cxn>
-              <a:cxn ang="0">
-                <a:pos x="connsiteX4" y="connsiteY4"/>
-              </a:cxn>
-              <a:cxn ang="0">
-                <a:pos x="connsiteX5" y="connsiteY5"/>
-              </a:cxn>
-              <a:cxn ang="0">
-                <a:pos x="connsiteX6" y="connsiteY6"/>
-              </a:cxn>
-              <a:cxn ang="0">
-                <a:pos x="connsiteX7" y="connsiteY7"/>
-              </a:cxn>
-              <a:cxn ang="0">
-                <a:pos x="connsiteX8" y="connsiteY8"/>
-              </a:cxn>
-              <a:cxn ang="0">
-                <a:pos x="connsiteX9" y="connsiteY9"/>
-              </a:cxn>
-            </a:cxnLst>
-            <a:rect l="l" t="t" r="r" b="b"/>
-            <a:pathLst>
-              <a:path w="503444" h="407268">
-                <a:moveTo>
-                  <a:pt x="69981" y="0"/>
-                </a:moveTo>
-                <a:cubicBezTo>
-                  <a:pt x="24322" y="84530"/>
-                  <a:pt x="-21336" y="169060"/>
-                  <a:pt x="10748" y="236930"/>
-                </a:cubicBezTo>
-                <a:cubicBezTo>
-                  <a:pt x="42832" y="304800"/>
-                  <a:pt x="181659" y="404755"/>
-                  <a:pt x="262486" y="407223"/>
-                </a:cubicBezTo>
-                <a:cubicBezTo>
-                  <a:pt x="343313" y="409691"/>
-                  <a:pt x="468565" y="312204"/>
-                  <a:pt x="495713" y="251738"/>
-                </a:cubicBezTo>
-                <a:cubicBezTo>
-                  <a:pt x="522861" y="191272"/>
-                  <a:pt x="473501" y="74658"/>
-                  <a:pt x="425375" y="44425"/>
-                </a:cubicBezTo>
-                <a:cubicBezTo>
-                  <a:pt x="377249" y="14192"/>
-                  <a:pt x="248912" y="53680"/>
-                  <a:pt x="206956" y="70339"/>
-                </a:cubicBezTo>
-                <a:cubicBezTo>
-                  <a:pt x="165000" y="86998"/>
-                  <a:pt x="177956" y="112295"/>
-                  <a:pt x="173637" y="144379"/>
-                </a:cubicBezTo>
-                <a:cubicBezTo>
-                  <a:pt x="169318" y="176463"/>
-                  <a:pt x="152659" y="254823"/>
-                  <a:pt x="181041" y="262844"/>
-                </a:cubicBezTo>
-                <a:cubicBezTo>
-                  <a:pt x="209423" y="270865"/>
-                  <a:pt x="326037" y="210399"/>
-                  <a:pt x="343930" y="192506"/>
-                </a:cubicBezTo>
-                <a:cubicBezTo>
-                  <a:pt x="361823" y="174613"/>
-                  <a:pt x="302591" y="156102"/>
-                  <a:pt x="288400" y="155485"/>
-                </a:cubicBezTo>
-              </a:path>
-            </a:pathLst>
-          </a:custGeom>
-          <a:noFill/>
-          <a:ln>
-            <a:solidFill>
-              <a:srgbClr val="00B0F0"/>
-            </a:solidFill>
-          </a:ln>
-        </p:spPr>
-        <p:style>
-          <a:lnRef idx="2">
-            <a:schemeClr val="accent1">
-              <a:shade val="15000"/>
-            </a:schemeClr>
-          </a:lnRef>
-          <a:fillRef idx="1">
-            <a:schemeClr val="accent1"/>
-          </a:fillRef>
-          <a:effectRef idx="0">
-            <a:schemeClr val="accent1"/>
-          </a:effectRef>
-          <a:fontRef idx="minor">
-            <a:schemeClr val="lt1"/>
-          </a:fontRef>
-        </p:style>
-        <p:txBody>
-          <a:bodyPr rtlCol="0" anchor="ctr"/>
-          <a:lstStyle/>
-          <a:p>
-            <a:pPr algn="ctr"/>
-            <a:endParaRPr lang="en-US"/>
-          </a:p>
-        </p:txBody>
-      </p:sp>
-      <p:sp>
-        <p:nvSpPr>
-          <p:cNvPr id="88" name="Regular Pentagon 87">
-            <a:extLst>
-              <a:ext uri="{FF2B5EF4-FFF2-40B4-BE49-F238E27FC236}">
-                <a16:creationId xmlns:a16="http://schemas.microsoft.com/office/drawing/2014/main" id="{7D1F892A-96E7-8A9F-E13A-26CA2BD5CD2F}"/>
-              </a:ext>
-            </a:extLst>
-          </p:cNvPr>
-          <p:cNvSpPr/>
-          <p:nvPr/>
-        </p:nvSpPr>
-        <p:spPr>
-          <a:xfrm rot="2125004">
-            <a:off x="9374289" y="2660010"/>
-            <a:ext cx="302322" cy="272245"/>
-          </a:xfrm>
-          <a:prstGeom prst="pentagon">
-            <a:avLst/>
-          </a:prstGeom>
-          <a:solidFill>
-            <a:srgbClr val="FF0000"/>
-          </a:solidFill>
-          <a:ln>
-            <a:solidFill>
-              <a:srgbClr val="C00000"/>
-            </a:solidFill>
-          </a:ln>
-        </p:spPr>
-        <p:style>
-          <a:lnRef idx="2">
-            <a:schemeClr val="accent1">
-              <a:shade val="15000"/>
-            </a:schemeClr>
-          </a:lnRef>
-          <a:fillRef idx="1">
-            <a:schemeClr val="accent1"/>
-          </a:fillRef>
-          <a:effectRef idx="0">
-            <a:schemeClr val="accent1"/>
-          </a:effectRef>
-          <a:fontRef idx="minor">
-            <a:schemeClr val="lt1"/>
-          </a:fontRef>
-        </p:style>
-        <p:txBody>
-          <a:bodyPr rtlCol="0" anchor="ctr"/>
-          <a:lstStyle/>
-          <a:p>
-            <a:pPr algn="ctr"/>
-            <a:endParaRPr lang="en-US"/>
-          </a:p>
-        </p:txBody>
-      </p:sp>
-      <p:cxnSp>
-        <p:nvCxnSpPr>
-          <p:cNvPr id="89" name="Straight Connector 88">
-            <a:extLst>
-              <a:ext uri="{FF2B5EF4-FFF2-40B4-BE49-F238E27FC236}">
-                <a16:creationId xmlns:a16="http://schemas.microsoft.com/office/drawing/2014/main" id="{31FBED90-7767-A442-3169-6FF0343D889A}"/>
-              </a:ext>
-            </a:extLst>
-          </p:cNvPr>
-          <p:cNvCxnSpPr>
-            <a:cxnSpLocks/>
-          </p:cNvCxnSpPr>
-          <p:nvPr/>
-        </p:nvCxnSpPr>
-        <p:spPr>
-          <a:xfrm>
-            <a:off x="9524418" y="2983280"/>
-            <a:ext cx="0" cy="267977"/>
-          </a:xfrm>
-          <a:prstGeom prst="line">
-            <a:avLst/>
-          </a:prstGeom>
-          <a:ln w="38100">
-            <a:solidFill>
-              <a:srgbClr val="C00000">
-                <a:alpha val="48565"/>
-              </a:srgbClr>
-            </a:solidFill>
-            <a:prstDash val="sysDot"/>
-          </a:ln>
-        </p:spPr>
-        <p:style>
-          <a:lnRef idx="2">
-            <a:schemeClr val="accent1"/>
-          </a:lnRef>
-          <a:fillRef idx="0">
-            <a:schemeClr val="accent1"/>
-          </a:fillRef>
-          <a:effectRef idx="1">
-            <a:schemeClr val="accent1"/>
-          </a:effectRef>
-          <a:fontRef idx="minor">
-            <a:schemeClr val="tx1"/>
-          </a:fontRef>
-        </p:style>
-      </p:cxnSp>
-      <p:sp>
-        <p:nvSpPr>
-          <p:cNvPr id="91" name="TextBox 90">
-            <a:extLst>
-              <a:ext uri="{FF2B5EF4-FFF2-40B4-BE49-F238E27FC236}">
-                <a16:creationId xmlns:a16="http://schemas.microsoft.com/office/drawing/2014/main" id="{A870C19D-23C1-41CE-2257-106ADDC7FE74}"/>
-              </a:ext>
-            </a:extLst>
-          </p:cNvPr>
-          <p:cNvSpPr txBox="1"/>
-          <p:nvPr/>
-        </p:nvSpPr>
-        <p:spPr>
-          <a:xfrm>
-            <a:off x="9686180" y="2611567"/>
-            <a:ext cx="2441688" cy="646331"/>
-          </a:xfrm>
-          <a:prstGeom prst="rect">
-            <a:avLst/>
-          </a:prstGeom>
-          <a:noFill/>
-        </p:spPr>
-        <p:txBody>
-          <a:bodyPr wrap="square" rtlCol="0">
-            <a:spAutoFit/>
-          </a:bodyPr>
-          <a:lstStyle/>
-          <a:p>
-            <a:r>
-              <a:rPr lang="en-US" dirty="0">
-                <a:solidFill>
-                  <a:srgbClr val="C00000"/>
-                </a:solidFill>
-              </a:rPr>
-              <a:t>Ultrasonic sensor to measure water height</a:t>
-            </a:r>
-          </a:p>
-        </p:txBody>
-      </p:sp>
-      <p:sp>
-        <p:nvSpPr>
-          <p:cNvPr id="92" name="TextBox 91">
-            <a:extLst>
-              <a:ext uri="{FF2B5EF4-FFF2-40B4-BE49-F238E27FC236}">
-                <a16:creationId xmlns:a16="http://schemas.microsoft.com/office/drawing/2014/main" id="{24206BEA-37B4-10C0-53A8-3FAFC377D051}"/>
-              </a:ext>
-            </a:extLst>
-          </p:cNvPr>
-          <p:cNvSpPr txBox="1"/>
-          <p:nvPr/>
-        </p:nvSpPr>
-        <p:spPr>
-          <a:xfrm>
-            <a:off x="2087818" y="2721388"/>
-            <a:ext cx="1441129" cy="461665"/>
-          </a:xfrm>
-          <a:prstGeom prst="rect">
-            <a:avLst/>
-          </a:prstGeom>
-          <a:noFill/>
-        </p:spPr>
-        <p:txBody>
-          <a:bodyPr wrap="square" rtlCol="0">
-            <a:spAutoFit/>
-          </a:bodyPr>
-          <a:lstStyle/>
-          <a:p>
-            <a:pPr algn="ctr"/>
-            <a:r>
-              <a:rPr lang="en-US" sz="2400" dirty="0"/>
-              <a:t>Bay side</a:t>
-            </a:r>
-          </a:p>
-        </p:txBody>
-      </p:sp>
-      <p:sp>
-        <p:nvSpPr>
-          <p:cNvPr id="93" name="TextBox 92">
-            <a:extLst>
-              <a:ext uri="{FF2B5EF4-FFF2-40B4-BE49-F238E27FC236}">
-                <a16:creationId xmlns:a16="http://schemas.microsoft.com/office/drawing/2014/main" id="{599F929A-BE97-0E85-E262-9553B1DE1D36}"/>
-              </a:ext>
-            </a:extLst>
-          </p:cNvPr>
-          <p:cNvSpPr txBox="1"/>
-          <p:nvPr/>
-        </p:nvSpPr>
-        <p:spPr>
-          <a:xfrm>
-            <a:off x="7732577" y="3932554"/>
-            <a:ext cx="1515777" cy="461665"/>
-          </a:xfrm>
-          <a:prstGeom prst="rect">
-            <a:avLst/>
-          </a:prstGeom>
-          <a:noFill/>
-        </p:spPr>
-        <p:txBody>
-          <a:bodyPr wrap="square" rtlCol="0">
-            <a:spAutoFit/>
-          </a:bodyPr>
-          <a:lstStyle/>
-          <a:p>
-            <a:pPr algn="ctr"/>
-            <a:r>
-              <a:rPr lang="en-US" sz="2400" dirty="0"/>
-              <a:t>River side</a:t>
-            </a:r>
-          </a:p>
-        </p:txBody>
-      </p:sp>
-      <p:sp>
-        <p:nvSpPr>
-          <p:cNvPr id="94" name="TextBox 93">
-            <a:extLst>
-              <a:ext uri="{FF2B5EF4-FFF2-40B4-BE49-F238E27FC236}">
-                <a16:creationId xmlns:a16="http://schemas.microsoft.com/office/drawing/2014/main" id="{F84E6282-0AC0-23B7-B17C-6798705DAC55}"/>
-              </a:ext>
-            </a:extLst>
-          </p:cNvPr>
-          <p:cNvSpPr txBox="1"/>
-          <p:nvPr/>
-        </p:nvSpPr>
-        <p:spPr>
-          <a:xfrm>
-            <a:off x="3449535" y="4960012"/>
-            <a:ext cx="1021277" cy="523220"/>
-          </a:xfrm>
-          <a:prstGeom prst="rect">
-            <a:avLst/>
-          </a:prstGeom>
-          <a:noFill/>
-        </p:spPr>
-        <p:txBody>
-          <a:bodyPr wrap="square" rtlCol="0">
-            <a:spAutoFit/>
-          </a:bodyPr>
-          <a:lstStyle/>
-          <a:p>
-            <a:pPr algn="r"/>
-            <a:r>
-              <a:rPr lang="en-US" sz="1400" dirty="0">
-                <a:solidFill>
-                  <a:schemeClr val="accent1"/>
-                </a:solidFill>
-              </a:rPr>
-              <a:t>Fixed</a:t>
-            </a:r>
-            <a:r>
-              <a:rPr lang="en-US" sz="1400" dirty="0"/>
-              <a:t> </a:t>
-            </a:r>
-            <a:r>
-              <a:rPr lang="en-US" sz="1400" dirty="0">
-                <a:solidFill>
-                  <a:schemeClr val="accent1"/>
-                </a:solidFill>
-              </a:rPr>
-              <a:t>sluicegate</a:t>
-            </a:r>
-          </a:p>
-        </p:txBody>
-      </p:sp>
-      <p:cxnSp>
-        <p:nvCxnSpPr>
-          <p:cNvPr id="96" name="Straight Arrow Connector 95">
-            <a:extLst>
-              <a:ext uri="{FF2B5EF4-FFF2-40B4-BE49-F238E27FC236}">
-                <a16:creationId xmlns:a16="http://schemas.microsoft.com/office/drawing/2014/main" id="{6C2879B0-69CE-F267-1C42-1694A31A5278}"/>
-              </a:ext>
-            </a:extLst>
-          </p:cNvPr>
-          <p:cNvCxnSpPr>
-            <a:cxnSpLocks/>
-          </p:cNvCxnSpPr>
-          <p:nvPr/>
-        </p:nvCxnSpPr>
-        <p:spPr>
-          <a:xfrm flipH="1">
-            <a:off x="3479331" y="5117169"/>
-            <a:ext cx="418221" cy="0"/>
-          </a:xfrm>
-          <a:prstGeom prst="straightConnector1">
-            <a:avLst/>
-          </a:prstGeom>
-          <a:ln>
-            <a:tailEnd type="triangle"/>
-          </a:ln>
-        </p:spPr>
-        <p:style>
-          <a:lnRef idx="2">
-            <a:schemeClr val="accent1"/>
-          </a:lnRef>
-          <a:fillRef idx="0">
-            <a:schemeClr val="accent1"/>
-          </a:fillRef>
-          <a:effectRef idx="1">
-            <a:schemeClr val="accent1"/>
-          </a:effectRef>
-          <a:fontRef idx="minor">
-            <a:schemeClr val="tx1"/>
-          </a:fontRef>
-        </p:style>
-      </p:cxnSp>
-      <p:sp>
-        <p:nvSpPr>
-          <p:cNvPr id="100" name="TextBox 99">
-            <a:extLst>
-              <a:ext uri="{FF2B5EF4-FFF2-40B4-BE49-F238E27FC236}">
-                <a16:creationId xmlns:a16="http://schemas.microsoft.com/office/drawing/2014/main" id="{D6ECCD60-10FA-1C18-BBCF-8849377E4E25}"/>
-              </a:ext>
-            </a:extLst>
-          </p:cNvPr>
-          <p:cNvSpPr txBox="1"/>
-          <p:nvPr/>
-        </p:nvSpPr>
-        <p:spPr>
-          <a:xfrm>
-            <a:off x="8516084" y="5639127"/>
-            <a:ext cx="612061" cy="523220"/>
-          </a:xfrm>
-          <a:prstGeom prst="rect">
-            <a:avLst/>
-          </a:prstGeom>
-          <a:noFill/>
-        </p:spPr>
-        <p:txBody>
-          <a:bodyPr wrap="square" rtlCol="0">
-            <a:spAutoFit/>
-          </a:bodyPr>
-          <a:lstStyle/>
-          <a:p>
-            <a:r>
-              <a:rPr lang="en-US" sz="1400" dirty="0">
-                <a:solidFill>
-                  <a:schemeClr val="accent1"/>
-                </a:solidFill>
-              </a:rPr>
-              <a:t>Fixed</a:t>
-            </a:r>
-            <a:r>
-              <a:rPr lang="en-US" sz="1400" dirty="0"/>
-              <a:t> </a:t>
-            </a:r>
-            <a:r>
-              <a:rPr lang="en-US" sz="1400" dirty="0">
-                <a:solidFill>
-                  <a:schemeClr val="accent1"/>
-                </a:solidFill>
-              </a:rPr>
-              <a:t>weir</a:t>
-            </a:r>
-          </a:p>
-        </p:txBody>
-      </p:sp>
-      <p:cxnSp>
-        <p:nvCxnSpPr>
-          <p:cNvPr id="101" name="Straight Arrow Connector 100">
-            <a:extLst>
-              <a:ext uri="{FF2B5EF4-FFF2-40B4-BE49-F238E27FC236}">
-                <a16:creationId xmlns:a16="http://schemas.microsoft.com/office/drawing/2014/main" id="{04E0D044-7CDD-5B13-0F43-1DED088952B0}"/>
-              </a:ext>
-            </a:extLst>
-          </p:cNvPr>
-          <p:cNvCxnSpPr>
-            <a:cxnSpLocks/>
-          </p:cNvCxnSpPr>
-          <p:nvPr/>
-        </p:nvCxnSpPr>
-        <p:spPr>
-          <a:xfrm>
-            <a:off x="9059653" y="5798406"/>
-            <a:ext cx="317048" cy="0"/>
-          </a:xfrm>
-          <a:prstGeom prst="straightConnector1">
-            <a:avLst/>
-          </a:prstGeom>
-          <a:ln>
-            <a:tailEnd type="triangle"/>
-          </a:ln>
-        </p:spPr>
-        <p:style>
-          <a:lnRef idx="2">
-            <a:schemeClr val="accent1"/>
-          </a:lnRef>
-          <a:fillRef idx="0">
-            <a:schemeClr val="accent1"/>
-          </a:fillRef>
-          <a:effectRef idx="1">
-            <a:schemeClr val="accent1"/>
-          </a:effectRef>
-          <a:fontRef idx="minor">
-            <a:schemeClr val="tx1"/>
-          </a:fontRef>
-        </p:style>
-      </p:cxnSp>
-      <p:sp>
-        <p:nvSpPr>
-          <p:cNvPr id="106" name="TextBox 105">
-            <a:extLst>
-              <a:ext uri="{FF2B5EF4-FFF2-40B4-BE49-F238E27FC236}">
-                <a16:creationId xmlns:a16="http://schemas.microsoft.com/office/drawing/2014/main" id="{6B582142-9733-4844-A57E-B41738D2A745}"/>
-              </a:ext>
-            </a:extLst>
-          </p:cNvPr>
-          <p:cNvSpPr txBox="1"/>
-          <p:nvPr/>
-        </p:nvSpPr>
-        <p:spPr>
-          <a:xfrm>
-            <a:off x="2254769" y="6246547"/>
-            <a:ext cx="1021277" cy="307777"/>
-          </a:xfrm>
-          <a:prstGeom prst="rect">
-            <a:avLst/>
-          </a:prstGeom>
-          <a:noFill/>
-        </p:spPr>
-        <p:txBody>
-          <a:bodyPr wrap="square" rtlCol="0">
-            <a:spAutoFit/>
-          </a:bodyPr>
-          <a:lstStyle/>
-          <a:p>
-            <a:pPr algn="r"/>
-            <a:r>
-              <a:rPr lang="en-US" sz="1400" dirty="0">
-                <a:solidFill>
-                  <a:srgbClr val="00B0F0"/>
-                </a:solidFill>
-              </a:rPr>
-              <a:t>Head tank</a:t>
-            </a:r>
-          </a:p>
-        </p:txBody>
-      </p:sp>
-      <p:sp>
-        <p:nvSpPr>
-          <p:cNvPr id="107" name="TextBox 106">
-            <a:extLst>
-              <a:ext uri="{FF2B5EF4-FFF2-40B4-BE49-F238E27FC236}">
-                <a16:creationId xmlns:a16="http://schemas.microsoft.com/office/drawing/2014/main" id="{0C95ED1E-1697-527F-3AFF-D8E085DCAE3B}"/>
-              </a:ext>
-            </a:extLst>
-          </p:cNvPr>
-          <p:cNvSpPr txBox="1"/>
-          <p:nvPr/>
-        </p:nvSpPr>
-        <p:spPr>
-          <a:xfrm>
-            <a:off x="4259119" y="6260360"/>
-            <a:ext cx="1732709" cy="307777"/>
-          </a:xfrm>
-          <a:prstGeom prst="rect">
-            <a:avLst/>
-          </a:prstGeom>
-          <a:noFill/>
-        </p:spPr>
-        <p:txBody>
-          <a:bodyPr wrap="square" rtlCol="0">
-            <a:spAutoFit/>
-          </a:bodyPr>
-          <a:lstStyle/>
-          <a:p>
-            <a:pPr algn="r"/>
-            <a:r>
-              <a:rPr lang="en-US" sz="1400" dirty="0">
-                <a:solidFill>
-                  <a:srgbClr val="00B0F0"/>
-                </a:solidFill>
-              </a:rPr>
-              <a:t>Supercritical region</a:t>
-            </a:r>
-          </a:p>
-        </p:txBody>
-      </p:sp>
-      <p:sp>
-        <p:nvSpPr>
-          <p:cNvPr id="108" name="TextBox 107">
-            <a:extLst>
-              <a:ext uri="{FF2B5EF4-FFF2-40B4-BE49-F238E27FC236}">
-                <a16:creationId xmlns:a16="http://schemas.microsoft.com/office/drawing/2014/main" id="{6CF37683-E3AE-0668-D30B-EA6FE541F708}"/>
-              </a:ext>
-            </a:extLst>
-          </p:cNvPr>
-          <p:cNvSpPr txBox="1"/>
-          <p:nvPr/>
-        </p:nvSpPr>
-        <p:spPr>
-          <a:xfrm>
-            <a:off x="7480491" y="6283234"/>
-            <a:ext cx="1732709" cy="307777"/>
-          </a:xfrm>
-          <a:prstGeom prst="rect">
-            <a:avLst/>
-          </a:prstGeom>
-          <a:noFill/>
-        </p:spPr>
-        <p:txBody>
-          <a:bodyPr wrap="square" rtlCol="0">
-            <a:spAutoFit/>
-          </a:bodyPr>
-          <a:lstStyle/>
-          <a:p>
-            <a:pPr algn="r"/>
-            <a:r>
-              <a:rPr lang="en-US" sz="1400" dirty="0">
-                <a:solidFill>
-                  <a:srgbClr val="00B0F0"/>
-                </a:solidFill>
-              </a:rPr>
-              <a:t>Subcritical region</a:t>
-            </a:r>
-          </a:p>
-        </p:txBody>
-      </p:sp>
-      <p:sp>
-        <p:nvSpPr>
-          <p:cNvPr id="109" name="TextBox 108">
-            <a:extLst>
-              <a:ext uri="{FF2B5EF4-FFF2-40B4-BE49-F238E27FC236}">
-                <a16:creationId xmlns:a16="http://schemas.microsoft.com/office/drawing/2014/main" id="{9A74941F-7FE3-F5C4-AB2C-072CB175D681}"/>
-              </a:ext>
-            </a:extLst>
-          </p:cNvPr>
-          <p:cNvSpPr txBox="1"/>
-          <p:nvPr/>
-        </p:nvSpPr>
-        <p:spPr>
-          <a:xfrm>
-            <a:off x="9479539" y="6286201"/>
-            <a:ext cx="1247756" cy="307777"/>
-          </a:xfrm>
-          <a:prstGeom prst="rect">
-            <a:avLst/>
-          </a:prstGeom>
-          <a:noFill/>
-        </p:spPr>
-        <p:txBody>
-          <a:bodyPr wrap="square" rtlCol="0">
-            <a:spAutoFit/>
-          </a:bodyPr>
-          <a:lstStyle/>
-          <a:p>
-            <a:pPr algn="ctr"/>
-            <a:r>
-              <a:rPr lang="en-US" sz="1400" dirty="0">
-                <a:solidFill>
-                  <a:srgbClr val="00B0F0"/>
-                </a:solidFill>
-              </a:rPr>
-              <a:t>Tailwater tank</a:t>
-            </a:r>
-          </a:p>
-        </p:txBody>
-      </p:sp>
-      <p:sp>
-        <p:nvSpPr>
-          <p:cNvPr id="110" name="TextBox 109">
-            <a:extLst>
-              <a:ext uri="{FF2B5EF4-FFF2-40B4-BE49-F238E27FC236}">
-                <a16:creationId xmlns:a16="http://schemas.microsoft.com/office/drawing/2014/main" id="{7B03789E-81DA-94F8-191D-89A9546ACADE}"/>
-              </a:ext>
-            </a:extLst>
-          </p:cNvPr>
-          <p:cNvSpPr txBox="1"/>
-          <p:nvPr/>
-        </p:nvSpPr>
-        <p:spPr>
-          <a:xfrm>
-            <a:off x="3829684" y="3932555"/>
-            <a:ext cx="2480666" cy="461665"/>
-          </a:xfrm>
-          <a:prstGeom prst="rect">
-            <a:avLst/>
-          </a:prstGeom>
-          <a:noFill/>
-        </p:spPr>
-        <p:txBody>
-          <a:bodyPr wrap="square" rtlCol="0">
-            <a:spAutoFit/>
-          </a:bodyPr>
-          <a:lstStyle/>
-          <a:p>
-            <a:pPr algn="ctr"/>
-            <a:r>
-              <a:rPr lang="en-US" sz="2400" dirty="0"/>
-              <a:t>Inside the culvert</a:t>
-            </a:r>
-          </a:p>
-        </p:txBody>
-      </p:sp>
-      <p:sp>
-        <p:nvSpPr>
-          <p:cNvPr id="111" name="TextBox 110">
-            <a:extLst>
-              <a:ext uri="{FF2B5EF4-FFF2-40B4-BE49-F238E27FC236}">
-                <a16:creationId xmlns:a16="http://schemas.microsoft.com/office/drawing/2014/main" id="{4742DBD4-0ECA-EF9C-8181-5BF56FE51FA1}"/>
-              </a:ext>
-            </a:extLst>
-          </p:cNvPr>
-          <p:cNvSpPr txBox="1"/>
-          <p:nvPr/>
-        </p:nvSpPr>
-        <p:spPr>
-          <a:xfrm>
-            <a:off x="6622138" y="6218828"/>
-            <a:ext cx="970490" cy="523220"/>
-          </a:xfrm>
-          <a:prstGeom prst="rect">
-            <a:avLst/>
-          </a:prstGeom>
-          <a:noFill/>
-        </p:spPr>
-        <p:txBody>
-          <a:bodyPr wrap="square" rtlCol="0">
-            <a:spAutoFit/>
-          </a:bodyPr>
-          <a:lstStyle/>
-          <a:p>
-            <a:pPr algn="ctr"/>
-            <a:r>
-              <a:rPr lang="en-US" sz="1400" dirty="0">
-                <a:solidFill>
-                  <a:srgbClr val="00B0F0"/>
-                </a:solidFill>
-              </a:rPr>
-              <a:t>Hydraulic jump</a:t>
-            </a:r>
-          </a:p>
-        </p:txBody>
-      </p:sp>
-      <p:sp>
-        <p:nvSpPr>
-          <p:cNvPr id="113" name="Right Arrow 112">
-            <a:extLst>
-              <a:ext uri="{FF2B5EF4-FFF2-40B4-BE49-F238E27FC236}">
-                <a16:creationId xmlns:a16="http://schemas.microsoft.com/office/drawing/2014/main" id="{C65AB482-2287-9449-2F32-D5DA32527F31}"/>
-              </a:ext>
-            </a:extLst>
-          </p:cNvPr>
-          <p:cNvSpPr/>
-          <p:nvPr/>
-        </p:nvSpPr>
-        <p:spPr>
-          <a:xfrm>
-            <a:off x="1774288" y="5708273"/>
-            <a:ext cx="381000" cy="317780"/>
-          </a:xfrm>
-          <a:prstGeom prst="rightArrow">
-            <a:avLst/>
-          </a:prstGeom>
-          <a:solidFill>
-            <a:srgbClr val="00B0F0"/>
-          </a:solidFill>
-          <a:ln>
+            <a:ln>
+              <a:noFill/>
+            </a:ln>
+          </p:spPr>
+          <p:style>
+            <a:lnRef idx="2">
+              <a:schemeClr val="accent1">
+                <a:shade val="15000"/>
+              </a:schemeClr>
+            </a:lnRef>
+            <a:fillRef idx="1">
+              <a:schemeClr val="accent1"/>
+            </a:fillRef>
+            <a:effectRef idx="0">
+              <a:schemeClr val="accent1"/>
+            </a:effectRef>
+            <a:fontRef idx="minor">
+              <a:schemeClr val="lt1"/>
+            </a:fontRef>
+          </p:style>
+          <p:txBody>
+            <a:bodyPr rtlCol="0" anchor="ctr"/>
+            <a:lstStyle/>
+            <a:p>
+              <a:pPr algn="ctr"/>
+              <a:endParaRPr lang="en-US"/>
+            </a:p>
+          </p:txBody>
+        </p:sp>
+        <p:cxnSp>
+          <p:nvCxnSpPr>
+            <p:cNvPr id="125" name="Straight Connector 124">
+              <a:extLst>
+                <a:ext uri="{FF2B5EF4-FFF2-40B4-BE49-F238E27FC236}">
+                  <a16:creationId xmlns:a16="http://schemas.microsoft.com/office/drawing/2014/main" id="{F2335064-632F-CF67-1AB7-7E0DEE70B326}"/>
+                </a:ext>
+              </a:extLst>
+            </p:cNvPr>
+            <p:cNvCxnSpPr>
+              <a:cxnSpLocks/>
+              <a:stCxn id="124" idx="0"/>
+            </p:cNvCxnSpPr>
+            <p:nvPr/>
+          </p:nvCxnSpPr>
+          <p:spPr>
+            <a:xfrm flipV="1">
+              <a:off x="9331107" y="3155672"/>
+              <a:ext cx="0" cy="252461"/>
+            </a:xfrm>
+            <a:prstGeom prst="line">
+              <a:avLst/>
+            </a:prstGeom>
+            <a:ln w="28575">
+              <a:solidFill>
+                <a:schemeClr val="accent2"/>
+              </a:solidFill>
+            </a:ln>
+          </p:spPr>
+          <p:style>
+            <a:lnRef idx="2">
+              <a:schemeClr val="accent1"/>
+            </a:lnRef>
+            <a:fillRef idx="0">
+              <a:schemeClr val="accent1"/>
+            </a:fillRef>
+            <a:effectRef idx="1">
+              <a:schemeClr val="accent1"/>
+            </a:effectRef>
+            <a:fontRef idx="minor">
+              <a:schemeClr val="tx1"/>
+            </a:fontRef>
+          </p:style>
+        </p:cxnSp>
+        <p:sp>
+          <p:nvSpPr>
+            <p:cNvPr id="127" name="TextBox 126">
+              <a:extLst>
+                <a:ext uri="{FF2B5EF4-FFF2-40B4-BE49-F238E27FC236}">
+                  <a16:creationId xmlns:a16="http://schemas.microsoft.com/office/drawing/2014/main" id="{2E30C07E-07A8-55B6-8B7A-C271CAD2ACF2}"/>
+                </a:ext>
+              </a:extLst>
+            </p:cNvPr>
+            <p:cNvSpPr txBox="1"/>
+            <p:nvPr/>
+          </p:nvSpPr>
+          <p:spPr>
+            <a:xfrm>
+              <a:off x="9538935" y="3048329"/>
+              <a:ext cx="2441688" cy="646331"/>
+            </a:xfrm>
+            <a:prstGeom prst="rect">
+              <a:avLst/>
+            </a:prstGeom>
             <a:noFill/>
-          </a:ln>
-        </p:spPr>
-        <p:style>
-          <a:lnRef idx="2">
-            <a:schemeClr val="accent1">
-              <a:shade val="15000"/>
-            </a:schemeClr>
-          </a:lnRef>
-          <a:fillRef idx="1">
-            <a:schemeClr val="accent1"/>
-          </a:fillRef>
-          <a:effectRef idx="0">
-            <a:schemeClr val="accent1"/>
-          </a:effectRef>
-          <a:fontRef idx="minor">
-            <a:schemeClr val="lt1"/>
-          </a:fontRef>
-        </p:style>
-        <p:txBody>
-          <a:bodyPr rtlCol="0" anchor="ctr"/>
-          <a:lstStyle/>
-          <a:p>
-            <a:pPr algn="ctr"/>
-            <a:endParaRPr lang="en-US"/>
-          </a:p>
-        </p:txBody>
-      </p:sp>
-      <p:sp>
-        <p:nvSpPr>
-          <p:cNvPr id="115" name="Right Arrow 114">
-            <a:extLst>
-              <a:ext uri="{FF2B5EF4-FFF2-40B4-BE49-F238E27FC236}">
-                <a16:creationId xmlns:a16="http://schemas.microsoft.com/office/drawing/2014/main" id="{DB512DC6-6362-4803-BECD-DAB0E44AAD8F}"/>
-              </a:ext>
-            </a:extLst>
-          </p:cNvPr>
-          <p:cNvSpPr/>
-          <p:nvPr/>
-        </p:nvSpPr>
-        <p:spPr>
-          <a:xfrm>
-            <a:off x="10656936" y="5780597"/>
-            <a:ext cx="381000" cy="317780"/>
-          </a:xfrm>
-          <a:prstGeom prst="rightArrow">
-            <a:avLst/>
-          </a:prstGeom>
-          <a:solidFill>
-            <a:srgbClr val="00B0F0"/>
-          </a:solidFill>
-          <a:ln>
+          </p:spPr>
+          <p:txBody>
+            <a:bodyPr wrap="square" rtlCol="0">
+              <a:spAutoFit/>
+            </a:bodyPr>
+            <a:lstStyle/>
+            <a:p>
+              <a:r>
+                <a:rPr lang="en-US" dirty="0">
+                  <a:solidFill>
+                    <a:schemeClr val="accent2"/>
+                  </a:solidFill>
+                </a:rPr>
+                <a:t>ADV to measure water velocity</a:t>
+              </a:r>
+            </a:p>
+          </p:txBody>
+        </p:sp>
+        <p:sp>
+          <p:nvSpPr>
+            <p:cNvPr id="128" name="TextBox 127">
+              <a:extLst>
+                <a:ext uri="{FF2B5EF4-FFF2-40B4-BE49-F238E27FC236}">
+                  <a16:creationId xmlns:a16="http://schemas.microsoft.com/office/drawing/2014/main" id="{115F07A0-91DC-B845-7149-1CD38ECA1C75}"/>
+                </a:ext>
+              </a:extLst>
+            </p:cNvPr>
+            <p:cNvSpPr txBox="1"/>
+            <p:nvPr/>
+          </p:nvSpPr>
+          <p:spPr>
+            <a:xfrm>
+              <a:off x="9046445" y="1834928"/>
+              <a:ext cx="1313868" cy="461665"/>
+            </a:xfrm>
+            <a:prstGeom prst="rect">
+              <a:avLst/>
+            </a:prstGeom>
             <a:noFill/>
-          </a:ln>
-        </p:spPr>
-        <p:style>
-          <a:lnRef idx="2">
-            <a:schemeClr val="accent1">
-              <a:shade val="15000"/>
-            </a:schemeClr>
-          </a:lnRef>
-          <a:fillRef idx="1">
-            <a:schemeClr val="accent1"/>
-          </a:fillRef>
-          <a:effectRef idx="0">
-            <a:schemeClr val="accent1"/>
-          </a:effectRef>
-          <a:fontRef idx="minor">
-            <a:schemeClr val="lt1"/>
-          </a:fontRef>
-        </p:style>
-        <p:txBody>
-          <a:bodyPr rtlCol="0" anchor="ctr"/>
-          <a:lstStyle/>
-          <a:p>
-            <a:pPr algn="ctr"/>
-            <a:endParaRPr lang="en-US" dirty="0"/>
-          </a:p>
-        </p:txBody>
-      </p:sp>
-      <p:sp>
-        <p:nvSpPr>
-          <p:cNvPr id="118" name="Cross 117">
-            <a:extLst>
-              <a:ext uri="{FF2B5EF4-FFF2-40B4-BE49-F238E27FC236}">
-                <a16:creationId xmlns:a16="http://schemas.microsoft.com/office/drawing/2014/main" id="{AEC7CA1E-1CD9-28C7-74DA-095F0560FDFC}"/>
-              </a:ext>
-            </a:extLst>
-          </p:cNvPr>
-          <p:cNvSpPr/>
-          <p:nvPr/>
-        </p:nvSpPr>
-        <p:spPr>
-          <a:xfrm>
-            <a:off x="8946370" y="5354518"/>
-            <a:ext cx="200150" cy="204970"/>
-          </a:xfrm>
-          <a:prstGeom prst="plus">
-            <a:avLst/>
-          </a:prstGeom>
-          <a:solidFill>
-            <a:schemeClr val="accent2"/>
-          </a:solidFill>
-          <a:ln>
+          </p:spPr>
+          <p:txBody>
+            <a:bodyPr wrap="square" rtlCol="0">
+              <a:spAutoFit/>
+            </a:bodyPr>
+            <a:lstStyle/>
+            <a:p>
+              <a:pPr algn="ctr"/>
+              <a:r>
+                <a:rPr lang="en-US" sz="2400" dirty="0"/>
+                <a:t>Sensors</a:t>
+              </a:r>
+            </a:p>
+          </p:txBody>
+        </p:sp>
+        <p:sp>
+          <p:nvSpPr>
+            <p:cNvPr id="130" name="TextBox 129">
+              <a:extLst>
+                <a:ext uri="{FF2B5EF4-FFF2-40B4-BE49-F238E27FC236}">
+                  <a16:creationId xmlns:a16="http://schemas.microsoft.com/office/drawing/2014/main" id="{53A592BC-8420-5C34-CA44-6D1D5EAAAE44}"/>
+                </a:ext>
+              </a:extLst>
+            </p:cNvPr>
+            <p:cNvSpPr txBox="1"/>
+            <p:nvPr/>
+          </p:nvSpPr>
+          <p:spPr>
+            <a:xfrm>
+              <a:off x="8925339" y="1639957"/>
+              <a:ext cx="184731" cy="369332"/>
+            </a:xfrm>
+            <a:prstGeom prst="rect">
+              <a:avLst/>
+            </a:prstGeom>
             <a:noFill/>
-          </a:ln>
-        </p:spPr>
-        <p:style>
-          <a:lnRef idx="2">
-            <a:schemeClr val="accent1">
-              <a:shade val="15000"/>
-            </a:schemeClr>
-          </a:lnRef>
-          <a:fillRef idx="1">
-            <a:schemeClr val="accent1"/>
-          </a:fillRef>
-          <a:effectRef idx="0">
-            <a:schemeClr val="accent1"/>
-          </a:effectRef>
-          <a:fontRef idx="minor">
-            <a:schemeClr val="lt1"/>
-          </a:fontRef>
-        </p:style>
-        <p:txBody>
-          <a:bodyPr rtlCol="0" anchor="ctr"/>
-          <a:lstStyle/>
-          <a:p>
-            <a:pPr algn="ctr"/>
-            <a:endParaRPr lang="en-US"/>
-          </a:p>
-        </p:txBody>
-      </p:sp>
-      <p:cxnSp>
-        <p:nvCxnSpPr>
-          <p:cNvPr id="120" name="Straight Connector 119">
-            <a:extLst>
-              <a:ext uri="{FF2B5EF4-FFF2-40B4-BE49-F238E27FC236}">
-                <a16:creationId xmlns:a16="http://schemas.microsoft.com/office/drawing/2014/main" id="{6927437C-375C-5187-5029-3112DDE1FE8B}"/>
-              </a:ext>
-            </a:extLst>
-          </p:cNvPr>
-          <p:cNvCxnSpPr>
-            <a:cxnSpLocks/>
-            <a:stCxn id="118" idx="0"/>
-          </p:cNvCxnSpPr>
-          <p:nvPr/>
-        </p:nvCxnSpPr>
-        <p:spPr>
-          <a:xfrm flipV="1">
-            <a:off x="9046445" y="4736467"/>
-            <a:ext cx="0" cy="618051"/>
-          </a:xfrm>
-          <a:prstGeom prst="line">
-            <a:avLst/>
-          </a:prstGeom>
-        </p:spPr>
-        <p:style>
-          <a:lnRef idx="2">
-            <a:schemeClr val="accent1"/>
-          </a:lnRef>
-          <a:fillRef idx="0">
-            <a:schemeClr val="accent1"/>
-          </a:fillRef>
-          <a:effectRef idx="1">
-            <a:schemeClr val="accent1"/>
-          </a:effectRef>
-          <a:fontRef idx="minor">
-            <a:schemeClr val="tx1"/>
-          </a:fontRef>
-        </p:style>
-      </p:cxnSp>
+          </p:spPr>
+          <p:txBody>
+            <a:bodyPr wrap="none" rtlCol="0">
+              <a:spAutoFit/>
+            </a:bodyPr>
+            <a:lstStyle/>
+            <a:p>
+              <a:endParaRPr lang="en-US" dirty="0"/>
+            </a:p>
+          </p:txBody>
+        </p:sp>
+      </p:grpSp>
     </p:spTree>
     <p:extLst>
       <p:ext uri="{BB962C8B-B14F-4D97-AF65-F5344CB8AC3E}">
@@ -9412,7 +10917,7 @@
         </p:nvSpPr>
         <p:spPr>
           <a:xfrm>
-            <a:off x="1371599" y="339610"/>
+            <a:off x="423131" y="277599"/>
             <a:ext cx="9895951" cy="1033669"/>
           </a:xfrm>
         </p:spPr>
@@ -9744,7 +11249,7 @@
         <p:cNvPr id="1" name="">
           <a:extLst>
             <a:ext uri="{FF2B5EF4-FFF2-40B4-BE49-F238E27FC236}">
-              <a16:creationId xmlns:a16="http://schemas.microsoft.com/office/drawing/2014/main" id="{01FC3EA8-67C4-000C-26C8-155FE2EBF9E1}"/>
+              <a16:creationId xmlns:a16="http://schemas.microsoft.com/office/drawing/2014/main" id="{A9D043F5-2AE3-6E22-2A2D-0ACF89B9DA75}"/>
             </a:ext>
           </a:extLst>
         </p:cNvPr>
@@ -9764,7 +11269,7 @@
           <p:cNvPr id="8" name="Rectangle 7">
             <a:extLst>
               <a:ext uri="{FF2B5EF4-FFF2-40B4-BE49-F238E27FC236}">
-                <a16:creationId xmlns:a16="http://schemas.microsoft.com/office/drawing/2014/main" id="{C84D3078-7C7B-C090-720C-A6E2A563E1BD}"/>
+                <a16:creationId xmlns:a16="http://schemas.microsoft.com/office/drawing/2014/main" id="{99877708-3BAD-4C10-4F38-B7488BA9346A}"/>
               </a:ext>
               <a:ext uri="{C183D7F6-B498-43B3-948B-1728B52AA6E4}">
                 <adec:decorative xmlns:adec="http://schemas.microsoft.com/office/drawing/2017/decorative" val="1"/>
@@ -9840,7 +11345,7 @@
           <p:cNvPr id="10" name="Rectangle 9">
             <a:extLst>
               <a:ext uri="{FF2B5EF4-FFF2-40B4-BE49-F238E27FC236}">
-                <a16:creationId xmlns:a16="http://schemas.microsoft.com/office/drawing/2014/main" id="{721F3E52-DD28-12FE-0C91-08150E0D8D08}"/>
+                <a16:creationId xmlns:a16="http://schemas.microsoft.com/office/drawing/2014/main" id="{7B469C54-F9B5-4B63-50BF-C110372E4938}"/>
               </a:ext>
               <a:ext uri="{C183D7F6-B498-43B3-948B-1728B52AA6E4}">
                 <adec:decorative xmlns:adec="http://schemas.microsoft.com/office/drawing/2017/decorative" val="1"/>
@@ -9913,7 +11418,7 @@
           <p:cNvPr id="12" name="Rectangle 11">
             <a:extLst>
               <a:ext uri="{FF2B5EF4-FFF2-40B4-BE49-F238E27FC236}">
-                <a16:creationId xmlns:a16="http://schemas.microsoft.com/office/drawing/2014/main" id="{17BB315D-510A-907C-A14A-4726A9121085}"/>
+                <a16:creationId xmlns:a16="http://schemas.microsoft.com/office/drawing/2014/main" id="{D3D87C4D-340A-0579-4EC6-09F36E42CD1C}"/>
               </a:ext>
               <a:ext uri="{C183D7F6-B498-43B3-948B-1728B52AA6E4}">
                 <adec:decorative xmlns:adec="http://schemas.microsoft.com/office/drawing/2017/decorative" val="1"/>
@@ -9989,7 +11494,7 @@
           <p:cNvPr id="14" name="Rectangle 13">
             <a:extLst>
               <a:ext uri="{FF2B5EF4-FFF2-40B4-BE49-F238E27FC236}">
-                <a16:creationId xmlns:a16="http://schemas.microsoft.com/office/drawing/2014/main" id="{428158DA-7788-2A5A-295D-020B98D54B65}"/>
+                <a16:creationId xmlns:a16="http://schemas.microsoft.com/office/drawing/2014/main" id="{4AB2BDA1-D1A7-0CFA-5CFA-9FB84AF942E1}"/>
               </a:ext>
               <a:ext uri="{C183D7F6-B498-43B3-948B-1728B52AA6E4}">
                 <adec:decorative xmlns:adec="http://schemas.microsoft.com/office/drawing/2017/decorative" val="1"/>
@@ -10064,7 +11569,7 @@
           <p:cNvPr id="16" name="Rectangle 15">
             <a:extLst>
               <a:ext uri="{FF2B5EF4-FFF2-40B4-BE49-F238E27FC236}">
-                <a16:creationId xmlns:a16="http://schemas.microsoft.com/office/drawing/2014/main" id="{D7D1F016-04D4-A54E-2E3F-8E01A7A35BE4}"/>
+                <a16:creationId xmlns:a16="http://schemas.microsoft.com/office/drawing/2014/main" id="{0D993B0B-9BC4-1F17-A8D3-50C58224768C}"/>
               </a:ext>
               <a:ext uri="{C183D7F6-B498-43B3-948B-1728B52AA6E4}">
                 <adec:decorative xmlns:adec="http://schemas.microsoft.com/office/drawing/2017/decorative" val="1"/>
@@ -10140,7 +11645,7 @@
           <p:cNvPr id="2" name="Title 1">
             <a:extLst>
               <a:ext uri="{FF2B5EF4-FFF2-40B4-BE49-F238E27FC236}">
-                <a16:creationId xmlns:a16="http://schemas.microsoft.com/office/drawing/2014/main" id="{0CAFAA13-FD85-EA2F-B943-18CC10B1640E}"/>
+                <a16:creationId xmlns:a16="http://schemas.microsoft.com/office/drawing/2014/main" id="{5654F603-05B1-CD63-E038-3056010D9F59}"/>
               </a:ext>
             </a:extLst>
           </p:cNvPr>
@@ -10153,7 +11658,1115 @@
         </p:nvSpPr>
         <p:spPr>
           <a:xfrm>
-            <a:off x="1371599" y="339610"/>
+            <a:off x="459346" y="278535"/>
+            <a:ext cx="11384992" cy="1033669"/>
+          </a:xfrm>
+        </p:spPr>
+        <p:txBody>
+          <a:bodyPr>
+            <a:noAutofit/>
+          </a:bodyPr>
+          <a:lstStyle/>
+          <a:p>
+            <a:r>
+              <a:rPr lang="en-US" sz="4000" dirty="0">
+                <a:solidFill>
+                  <a:srgbClr val="FFFFFF"/>
+                </a:solidFill>
+              </a:rPr>
+              <a:t>First trial – how does discharge change with changing hydraulic head?</a:t>
+            </a:r>
+          </a:p>
+        </p:txBody>
+      </p:sp>
+      <p:pic>
+        <p:nvPicPr>
+          <p:cNvPr id="15" name="Picture 14">
+            <a:extLst>
+              <a:ext uri="{FF2B5EF4-FFF2-40B4-BE49-F238E27FC236}">
+                <a16:creationId xmlns:a16="http://schemas.microsoft.com/office/drawing/2014/main" id="{35B09C03-A58D-AFB9-C96A-3FB899B3DFDD}"/>
+              </a:ext>
+            </a:extLst>
+          </p:cNvPr>
+          <p:cNvPicPr>
+            <a:picLocks noChangeAspect="1"/>
+          </p:cNvPicPr>
+          <p:nvPr/>
+        </p:nvPicPr>
+        <p:blipFill>
+          <a:blip r:embed="rId3"/>
+          <a:stretch>
+            <a:fillRect/>
+          </a:stretch>
+        </p:blipFill>
+        <p:spPr>
+          <a:xfrm>
+            <a:off x="206126" y="1721811"/>
+            <a:ext cx="4963464" cy="5011810"/>
+          </a:xfrm>
+          <a:prstGeom prst="rect">
+            <a:avLst/>
+          </a:prstGeom>
+        </p:spPr>
+      </p:pic>
+      <p:pic>
+        <p:nvPicPr>
+          <p:cNvPr id="25" name="Picture 24">
+            <a:extLst>
+              <a:ext uri="{FF2B5EF4-FFF2-40B4-BE49-F238E27FC236}">
+                <a16:creationId xmlns:a16="http://schemas.microsoft.com/office/drawing/2014/main" id="{729AD597-162C-D0E7-93CB-DDAED6DA362C}"/>
+              </a:ext>
+            </a:extLst>
+          </p:cNvPr>
+          <p:cNvPicPr>
+            <a:picLocks noChangeAspect="1"/>
+          </p:cNvPicPr>
+          <p:nvPr/>
+        </p:nvPicPr>
+        <p:blipFill>
+          <a:blip r:embed="rId4"/>
+          <a:stretch>
+            <a:fillRect/>
+          </a:stretch>
+        </p:blipFill>
+        <p:spPr>
+          <a:xfrm>
+            <a:off x="5375716" y="1721811"/>
+            <a:ext cx="6286197" cy="5020072"/>
+          </a:xfrm>
+          <a:prstGeom prst="rect">
+            <a:avLst/>
+          </a:prstGeom>
+        </p:spPr>
+      </p:pic>
+      <p:sp>
+        <p:nvSpPr>
+          <p:cNvPr id="17" name="TextBox 16">
+            <a:extLst>
+              <a:ext uri="{FF2B5EF4-FFF2-40B4-BE49-F238E27FC236}">
+                <a16:creationId xmlns:a16="http://schemas.microsoft.com/office/drawing/2014/main" id="{27BC8ED4-3868-0691-2656-3053C3D47249}"/>
+              </a:ext>
+            </a:extLst>
+          </p:cNvPr>
+          <p:cNvSpPr txBox="1"/>
+          <p:nvPr/>
+        </p:nvSpPr>
+        <p:spPr>
+          <a:xfrm>
+            <a:off x="7490673" y="2321004"/>
+            <a:ext cx="2045936" cy="1107996"/>
+          </a:xfrm>
+          <a:prstGeom prst="rect">
+            <a:avLst/>
+          </a:prstGeom>
+          <a:noFill/>
+        </p:spPr>
+        <p:txBody>
+          <a:bodyPr wrap="square" rtlCol="0">
+            <a:spAutoFit/>
+          </a:bodyPr>
+          <a:lstStyle/>
+          <a:p>
+            <a:r>
+              <a:rPr lang="en-US" sz="2200" dirty="0">
+                <a:solidFill>
+                  <a:srgbClr val="FF0000"/>
+                </a:solidFill>
+              </a:rPr>
+              <a:t>Note: no hysteresis was observed!</a:t>
+            </a:r>
+          </a:p>
+        </p:txBody>
+      </p:sp>
+      <p:sp>
+        <p:nvSpPr>
+          <p:cNvPr id="18" name="Oval 17">
+            <a:extLst>
+              <a:ext uri="{FF2B5EF4-FFF2-40B4-BE49-F238E27FC236}">
+                <a16:creationId xmlns:a16="http://schemas.microsoft.com/office/drawing/2014/main" id="{4E3B505D-8531-FD37-B749-4A16731A7826}"/>
+              </a:ext>
+            </a:extLst>
+          </p:cNvPr>
+          <p:cNvSpPr/>
+          <p:nvPr/>
+        </p:nvSpPr>
+        <p:spPr>
+          <a:xfrm>
+            <a:off x="8277590" y="5665494"/>
+            <a:ext cx="632095" cy="645405"/>
+          </a:xfrm>
+          <a:prstGeom prst="ellipse">
+            <a:avLst/>
+          </a:prstGeom>
+          <a:noFill/>
+          <a:ln w="28575">
+            <a:solidFill>
+              <a:srgbClr val="FF0000"/>
+            </a:solidFill>
+          </a:ln>
+        </p:spPr>
+        <p:style>
+          <a:lnRef idx="2">
+            <a:schemeClr val="accent1">
+              <a:shade val="15000"/>
+            </a:schemeClr>
+          </a:lnRef>
+          <a:fillRef idx="1">
+            <a:schemeClr val="accent1"/>
+          </a:fillRef>
+          <a:effectRef idx="0">
+            <a:schemeClr val="accent1"/>
+          </a:effectRef>
+          <a:fontRef idx="minor">
+            <a:schemeClr val="lt1"/>
+          </a:fontRef>
+        </p:style>
+        <p:txBody>
+          <a:bodyPr rtlCol="0" anchor="ctr"/>
+          <a:lstStyle/>
+          <a:p>
+            <a:pPr algn="ctr"/>
+            <a:endParaRPr lang="en-US"/>
+          </a:p>
+        </p:txBody>
+      </p:sp>
+      <p:sp>
+        <p:nvSpPr>
+          <p:cNvPr id="22" name="TextBox 21">
+            <a:extLst>
+              <a:ext uri="{FF2B5EF4-FFF2-40B4-BE49-F238E27FC236}">
+                <a16:creationId xmlns:a16="http://schemas.microsoft.com/office/drawing/2014/main" id="{B85414EE-ECD3-E96C-AA96-53EFDD2E5718}"/>
+              </a:ext>
+            </a:extLst>
+          </p:cNvPr>
+          <p:cNvSpPr txBox="1"/>
+          <p:nvPr/>
+        </p:nvSpPr>
+        <p:spPr>
+          <a:xfrm>
+            <a:off x="8982851" y="5273079"/>
+            <a:ext cx="2371914" cy="784830"/>
+          </a:xfrm>
+          <a:prstGeom prst="rect">
+            <a:avLst/>
+          </a:prstGeom>
+          <a:noFill/>
+        </p:spPr>
+        <p:txBody>
+          <a:bodyPr wrap="square" rtlCol="0">
+            <a:spAutoFit/>
+          </a:bodyPr>
+          <a:lstStyle/>
+          <a:p>
+            <a:r>
+              <a:rPr lang="en-US" sz="1500" dirty="0">
+                <a:solidFill>
+                  <a:srgbClr val="FF0000"/>
+                </a:solidFill>
+              </a:rPr>
+              <a:t>Not sure why trial 1 is not consistent with other data points</a:t>
+            </a:r>
+          </a:p>
+        </p:txBody>
+      </p:sp>
+    </p:spTree>
+    <p:extLst>
+      <p:ext uri="{BB962C8B-B14F-4D97-AF65-F5344CB8AC3E}">
+        <p14:creationId xmlns:p14="http://schemas.microsoft.com/office/powerpoint/2010/main" val="3124855086"/>
+      </p:ext>
+    </p:extLst>
+  </p:cSld>
+  <p:clrMapOvr>
+    <a:masterClrMapping/>
+  </p:clrMapOvr>
+</p:sld>
+</file>
+
+<file path=ppt/slides/slide8.xml><?xml version="1.0" encoding="utf-8"?>
+<p:sld xmlns:a="http://schemas.openxmlformats.org/drawingml/2006/main" xmlns:r="http://schemas.openxmlformats.org/officeDocument/2006/relationships" xmlns:p="http://schemas.openxmlformats.org/presentationml/2006/main" show="0">
+  <p:cSld>
+    <p:bg>
+      <p:bgPr>
+        <a:solidFill>
+          <a:schemeClr val="bg1"/>
+        </a:solidFill>
+        <a:effectLst/>
+      </p:bgPr>
+    </p:bg>
+    <p:spTree>
+      <p:nvGrpSpPr>
+        <p:cNvPr id="1" name="">
+          <a:extLst>
+            <a:ext uri="{FF2B5EF4-FFF2-40B4-BE49-F238E27FC236}">
+              <a16:creationId xmlns:a16="http://schemas.microsoft.com/office/drawing/2014/main" id="{C2DB0F28-7E94-461F-E6A1-59F2E6CC9A59}"/>
+            </a:ext>
+          </a:extLst>
+        </p:cNvPr>
+        <p:cNvGrpSpPr/>
+        <p:nvPr/>
+      </p:nvGrpSpPr>
+      <p:grpSpPr>
+        <a:xfrm>
+          <a:off x="0" y="0"/>
+          <a:ext cx="0" cy="0"/>
+          <a:chOff x="0" y="0"/>
+          <a:chExt cx="0" cy="0"/>
+        </a:xfrm>
+      </p:grpSpPr>
+      <p:sp useBgFill="1">
+        <p:nvSpPr>
+          <p:cNvPr id="8" name="Rectangle 7">
+            <a:extLst>
+              <a:ext uri="{FF2B5EF4-FFF2-40B4-BE49-F238E27FC236}">
+                <a16:creationId xmlns:a16="http://schemas.microsoft.com/office/drawing/2014/main" id="{42DB8AAD-4D49-9091-92AF-D844C77CCE6F}"/>
+              </a:ext>
+              <a:ext uri="{C183D7F6-B498-43B3-948B-1728B52AA6E4}">
+                <adec:decorative xmlns:adec="http://schemas.microsoft.com/office/drawing/2017/decorative" val="1"/>
+              </a:ext>
+            </a:extLst>
+          </p:cNvPr>
+          <p:cNvSpPr>
+            <a:spLocks noGrp="1" noRot="1" noChangeAspect="1" noMove="1" noResize="1" noEditPoints="1" noAdjustHandles="1" noChangeArrowheads="1" noChangeShapeType="1" noTextEdit="1"/>
+          </p:cNvSpPr>
+          <p:nvPr>
+            <p:extLst>
+              <p:ext uri="{386F3935-93C4-4BCD-93E2-E3B085C9AB24}">
+                <p16:designElem xmlns:p16="http://schemas.microsoft.com/office/powerpoint/2015/main" val="1"/>
+              </p:ext>
+            </p:extLst>
+          </p:nvPr>
+        </p:nvSpPr>
+        <p:spPr>
+          <a:xfrm>
+            <a:off x="0" y="0"/>
+            <a:ext cx="12192000" cy="6858000"/>
+          </a:xfrm>
+          <a:prstGeom prst="rect">
+            <a:avLst/>
+          </a:prstGeom>
+          <a:ln w="12700" cap="flat" cmpd="sng" algn="ctr">
+            <a:noFill/>
+            <a:prstDash val="solid"/>
+            <a:miter lim="800000"/>
+          </a:ln>
+          <a:effectLst/>
+          <a:extLst>
+            <a:ext uri="{91240B29-F687-4F45-9708-019B960494DF}">
+              <a14:hiddenLine xmlns:a14="http://schemas.microsoft.com/office/drawing/2010/main" w="12700" cap="flat" cmpd="sng" algn="ctr">
+                <a:solidFill>
+                  <a:schemeClr val="accent1">
+                    <a:shade val="50000"/>
+                  </a:schemeClr>
+                </a:solidFill>
+                <a:prstDash val="solid"/>
+                <a:miter lim="800000"/>
+              </a14:hiddenLine>
+            </a:ext>
+          </a:extLst>
+        </p:spPr>
+        <p:style>
+          <a:lnRef idx="2">
+            <a:schemeClr val="accent1">
+              <a:shade val="50000"/>
+            </a:schemeClr>
+          </a:lnRef>
+          <a:fillRef idx="1">
+            <a:schemeClr val="accent1"/>
+          </a:fillRef>
+          <a:effectRef idx="0">
+            <a:schemeClr val="accent1"/>
+          </a:effectRef>
+          <a:fontRef idx="minor">
+            <a:schemeClr val="lt1"/>
+          </a:fontRef>
+        </p:style>
+        <p:txBody>
+          <a:bodyPr rtlCol="0" anchor="ctr"/>
+          <a:lstStyle/>
+          <a:p>
+            <a:pPr algn="ctr"/>
+            <a:endParaRPr lang="en-US"/>
+          </a:p>
+        </p:txBody>
+      </p:sp>
+      <p:sp>
+        <p:nvSpPr>
+          <p:cNvPr id="10" name="Rectangle 9">
+            <a:extLst>
+              <a:ext uri="{FF2B5EF4-FFF2-40B4-BE49-F238E27FC236}">
+                <a16:creationId xmlns:a16="http://schemas.microsoft.com/office/drawing/2014/main" id="{85AF20AF-2662-D6CE-F220-9B356961E0E2}"/>
+              </a:ext>
+              <a:ext uri="{C183D7F6-B498-43B3-948B-1728B52AA6E4}">
+                <adec:decorative xmlns:adec="http://schemas.microsoft.com/office/drawing/2017/decorative" val="1"/>
+              </a:ext>
+            </a:extLst>
+          </p:cNvPr>
+          <p:cNvSpPr>
+            <a:spLocks noGrp="1" noRot="1" noChangeAspect="1" noMove="1" noResize="1" noEditPoints="1" noAdjustHandles="1" noChangeArrowheads="1" noChangeShapeType="1" noTextEdit="1"/>
+          </p:cNvSpPr>
+          <p:nvPr>
+            <p:extLst>
+              <p:ext uri="{386F3935-93C4-4BCD-93E2-E3B085C9AB24}">
+                <p16:designElem xmlns:p16="http://schemas.microsoft.com/office/powerpoint/2015/main" val="1"/>
+              </p:ext>
+            </p:extLst>
+          </p:nvPr>
+        </p:nvSpPr>
+        <p:spPr>
+          <a:xfrm flipH="1">
+            <a:off x="-1" y="-1"/>
+            <a:ext cx="12191998" cy="1590742"/>
+          </a:xfrm>
+          <a:prstGeom prst="rect">
+            <a:avLst/>
+          </a:prstGeom>
+          <a:gradFill>
+            <a:gsLst>
+              <a:gs pos="0">
+                <a:srgbClr val="000000"/>
+              </a:gs>
+              <a:gs pos="100000">
+                <a:schemeClr val="accent1">
+                  <a:lumMod val="75000"/>
+                </a:schemeClr>
+              </a:gs>
+            </a:gsLst>
+            <a:lin ang="8400000" scaled="0"/>
+          </a:gradFill>
+          <a:ln>
+            <a:noFill/>
+          </a:ln>
+        </p:spPr>
+        <p:style>
+          <a:lnRef idx="2">
+            <a:schemeClr val="accent1">
+              <a:shade val="50000"/>
+            </a:schemeClr>
+          </a:lnRef>
+          <a:fillRef idx="1">
+            <a:schemeClr val="accent1"/>
+          </a:fillRef>
+          <a:effectRef idx="0">
+            <a:schemeClr val="accent1"/>
+          </a:effectRef>
+          <a:fontRef idx="minor">
+            <a:schemeClr val="lt1"/>
+          </a:fontRef>
+        </p:style>
+        <p:txBody>
+          <a:bodyPr rtlCol="0" anchor="ctr"/>
+          <a:lstStyle/>
+          <a:p>
+            <a:pPr algn="ctr"/>
+            <a:endParaRPr lang="en-US"/>
+          </a:p>
+        </p:txBody>
+      </p:sp>
+      <p:sp>
+        <p:nvSpPr>
+          <p:cNvPr id="12" name="Rectangle 11">
+            <a:extLst>
+              <a:ext uri="{FF2B5EF4-FFF2-40B4-BE49-F238E27FC236}">
+                <a16:creationId xmlns:a16="http://schemas.microsoft.com/office/drawing/2014/main" id="{598A0D47-9DE7-5664-59CB-57E7B531AB88}"/>
+              </a:ext>
+              <a:ext uri="{C183D7F6-B498-43B3-948B-1728B52AA6E4}">
+                <adec:decorative xmlns:adec="http://schemas.microsoft.com/office/drawing/2017/decorative" val="1"/>
+              </a:ext>
+            </a:extLst>
+          </p:cNvPr>
+          <p:cNvSpPr>
+            <a:spLocks noGrp="1" noRot="1" noChangeAspect="1" noMove="1" noResize="1" noEditPoints="1" noAdjustHandles="1" noChangeArrowheads="1" noChangeShapeType="1" noTextEdit="1"/>
+          </p:cNvSpPr>
+          <p:nvPr>
+            <p:extLst>
+              <p:ext uri="{386F3935-93C4-4BCD-93E2-E3B085C9AB24}">
+                <p16:designElem xmlns:p16="http://schemas.microsoft.com/office/powerpoint/2015/main" val="1"/>
+              </p:ext>
+            </p:extLst>
+          </p:nvPr>
+        </p:nvSpPr>
+        <p:spPr>
+          <a:xfrm rot="10800000" flipH="1">
+            <a:off x="-3" y="0"/>
+            <a:ext cx="8115306" cy="1590742"/>
+          </a:xfrm>
+          <a:prstGeom prst="rect">
+            <a:avLst/>
+          </a:prstGeom>
+          <a:gradFill>
+            <a:gsLst>
+              <a:gs pos="20000">
+                <a:schemeClr val="accent1">
+                  <a:alpha val="0"/>
+                </a:schemeClr>
+              </a:gs>
+              <a:gs pos="100000">
+                <a:schemeClr val="accent1">
+                  <a:lumMod val="50000"/>
+                  <a:alpha val="55000"/>
+                </a:schemeClr>
+              </a:gs>
+            </a:gsLst>
+            <a:lin ang="13800000" scaled="0"/>
+          </a:gradFill>
+          <a:ln>
+            <a:noFill/>
+          </a:ln>
+        </p:spPr>
+        <p:style>
+          <a:lnRef idx="2">
+            <a:schemeClr val="accent1">
+              <a:shade val="50000"/>
+            </a:schemeClr>
+          </a:lnRef>
+          <a:fillRef idx="1">
+            <a:schemeClr val="accent1"/>
+          </a:fillRef>
+          <a:effectRef idx="0">
+            <a:schemeClr val="accent1"/>
+          </a:effectRef>
+          <a:fontRef idx="minor">
+            <a:schemeClr val="lt1"/>
+          </a:fontRef>
+        </p:style>
+        <p:txBody>
+          <a:bodyPr rtlCol="0" anchor="ctr"/>
+          <a:lstStyle/>
+          <a:p>
+            <a:pPr algn="ctr"/>
+            <a:endParaRPr lang="en-US"/>
+          </a:p>
+        </p:txBody>
+      </p:sp>
+      <p:sp>
+        <p:nvSpPr>
+          <p:cNvPr id="14" name="Rectangle 13">
+            <a:extLst>
+              <a:ext uri="{FF2B5EF4-FFF2-40B4-BE49-F238E27FC236}">
+                <a16:creationId xmlns:a16="http://schemas.microsoft.com/office/drawing/2014/main" id="{985013A9-9B39-7F99-077E-9D9BA16197E1}"/>
+              </a:ext>
+              <a:ext uri="{C183D7F6-B498-43B3-948B-1728B52AA6E4}">
+                <adec:decorative xmlns:adec="http://schemas.microsoft.com/office/drawing/2017/decorative" val="1"/>
+              </a:ext>
+            </a:extLst>
+          </p:cNvPr>
+          <p:cNvSpPr>
+            <a:spLocks noGrp="1" noRot="1" noChangeAspect="1" noMove="1" noResize="1" noEditPoints="1" noAdjustHandles="1" noChangeArrowheads="1" noChangeShapeType="1" noTextEdit="1"/>
+          </p:cNvSpPr>
+          <p:nvPr>
+            <p:extLst>
+              <p:ext uri="{386F3935-93C4-4BCD-93E2-E3B085C9AB24}">
+                <p16:designElem xmlns:p16="http://schemas.microsoft.com/office/powerpoint/2015/main" val="1"/>
+              </p:ext>
+            </p:extLst>
+          </p:nvPr>
+        </p:nvSpPr>
+        <p:spPr>
+          <a:xfrm flipH="1">
+            <a:off x="8115299" y="-1"/>
+            <a:ext cx="4076698" cy="1590742"/>
+          </a:xfrm>
+          <a:prstGeom prst="rect">
+            <a:avLst/>
+          </a:prstGeom>
+          <a:gradFill>
+            <a:gsLst>
+              <a:gs pos="0">
+                <a:schemeClr val="accent1">
+                  <a:alpha val="66000"/>
+                </a:schemeClr>
+              </a:gs>
+              <a:gs pos="100000">
+                <a:srgbClr val="000000">
+                  <a:alpha val="30000"/>
+                </a:srgbClr>
+              </a:gs>
+            </a:gsLst>
+            <a:lin ang="13200000" scaled="0"/>
+          </a:gradFill>
+          <a:ln>
+            <a:noFill/>
+          </a:ln>
+        </p:spPr>
+        <p:style>
+          <a:lnRef idx="2">
+            <a:schemeClr val="accent1">
+              <a:shade val="50000"/>
+            </a:schemeClr>
+          </a:lnRef>
+          <a:fillRef idx="1">
+            <a:schemeClr val="accent1"/>
+          </a:fillRef>
+          <a:effectRef idx="0">
+            <a:schemeClr val="accent1"/>
+          </a:effectRef>
+          <a:fontRef idx="minor">
+            <a:schemeClr val="lt1"/>
+          </a:fontRef>
+        </p:style>
+        <p:txBody>
+          <a:bodyPr rtlCol="0" anchor="ctr"/>
+          <a:lstStyle/>
+          <a:p>
+            <a:pPr algn="ctr"/>
+            <a:endParaRPr lang="en-US"/>
+          </a:p>
+        </p:txBody>
+      </p:sp>
+      <p:sp>
+        <p:nvSpPr>
+          <p:cNvPr id="16" name="Rectangle 15">
+            <a:extLst>
+              <a:ext uri="{FF2B5EF4-FFF2-40B4-BE49-F238E27FC236}">
+                <a16:creationId xmlns:a16="http://schemas.microsoft.com/office/drawing/2014/main" id="{7360497E-AA9F-CF59-9AA5-67666E6D22DA}"/>
+              </a:ext>
+              <a:ext uri="{C183D7F6-B498-43B3-948B-1728B52AA6E4}">
+                <adec:decorative xmlns:adec="http://schemas.microsoft.com/office/drawing/2017/decorative" val="1"/>
+              </a:ext>
+            </a:extLst>
+          </p:cNvPr>
+          <p:cNvSpPr>
+            <a:spLocks noGrp="1" noRot="1" noChangeAspect="1" noMove="1" noResize="1" noEditPoints="1" noAdjustHandles="1" noChangeArrowheads="1" noChangeShapeType="1" noTextEdit="1"/>
+          </p:cNvSpPr>
+          <p:nvPr>
+            <p:extLst>
+              <p:ext uri="{386F3935-93C4-4BCD-93E2-E3B085C9AB24}">
+                <p16:designElem xmlns:p16="http://schemas.microsoft.com/office/powerpoint/2015/main" val="1"/>
+              </p:ext>
+            </p:extLst>
+          </p:nvPr>
+        </p:nvSpPr>
+        <p:spPr>
+          <a:xfrm>
+            <a:off x="459350" y="-1"/>
+            <a:ext cx="11732646" cy="1597433"/>
+          </a:xfrm>
+          <a:prstGeom prst="rect">
+            <a:avLst/>
+          </a:prstGeom>
+          <a:gradFill>
+            <a:gsLst>
+              <a:gs pos="50000">
+                <a:srgbClr val="000000">
+                  <a:alpha val="0"/>
+                </a:srgbClr>
+              </a:gs>
+              <a:gs pos="99000">
+                <a:schemeClr val="accent1">
+                  <a:lumMod val="50000"/>
+                  <a:alpha val="52000"/>
+                </a:schemeClr>
+              </a:gs>
+            </a:gsLst>
+            <a:lin ang="16800000" scaled="0"/>
+          </a:gradFill>
+          <a:ln>
+            <a:noFill/>
+          </a:ln>
+        </p:spPr>
+        <p:style>
+          <a:lnRef idx="2">
+            <a:schemeClr val="accent1">
+              <a:shade val="50000"/>
+            </a:schemeClr>
+          </a:lnRef>
+          <a:fillRef idx="1">
+            <a:schemeClr val="accent1"/>
+          </a:fillRef>
+          <a:effectRef idx="0">
+            <a:schemeClr val="accent1"/>
+          </a:effectRef>
+          <a:fontRef idx="minor">
+            <a:schemeClr val="lt1"/>
+          </a:fontRef>
+        </p:style>
+        <p:txBody>
+          <a:bodyPr rtlCol="0" anchor="ctr"/>
+          <a:lstStyle/>
+          <a:p>
+            <a:pPr algn="ctr"/>
+            <a:endParaRPr lang="en-US"/>
+          </a:p>
+        </p:txBody>
+      </p:sp>
+      <p:sp>
+        <p:nvSpPr>
+          <p:cNvPr id="2" name="Title 1">
+            <a:extLst>
+              <a:ext uri="{FF2B5EF4-FFF2-40B4-BE49-F238E27FC236}">
+                <a16:creationId xmlns:a16="http://schemas.microsoft.com/office/drawing/2014/main" id="{9AC421D6-09BF-B232-5FE1-3FA638859579}"/>
+              </a:ext>
+            </a:extLst>
+          </p:cNvPr>
+          <p:cNvSpPr>
+            <a:spLocks noGrp="1"/>
+          </p:cNvSpPr>
+          <p:nvPr>
+            <p:ph type="title"/>
+          </p:nvPr>
+        </p:nvSpPr>
+        <p:spPr>
+          <a:xfrm>
+            <a:off x="459346" y="278535"/>
+            <a:ext cx="11384992" cy="1033669"/>
+          </a:xfrm>
+        </p:spPr>
+        <p:txBody>
+          <a:bodyPr>
+            <a:noAutofit/>
+          </a:bodyPr>
+          <a:lstStyle/>
+          <a:p>
+            <a:r>
+              <a:rPr lang="en-US" sz="4000" dirty="0">
+                <a:solidFill>
+                  <a:srgbClr val="FFFFFF"/>
+                </a:solidFill>
+              </a:rPr>
+              <a:t>Second trial – observe how discharge changes with changing head difference</a:t>
+            </a:r>
+          </a:p>
+        </p:txBody>
+      </p:sp>
+    </p:spTree>
+    <p:extLst>
+      <p:ext uri="{BB962C8B-B14F-4D97-AF65-F5344CB8AC3E}">
+        <p14:creationId xmlns:p14="http://schemas.microsoft.com/office/powerpoint/2010/main" val="531168337"/>
+      </p:ext>
+    </p:extLst>
+  </p:cSld>
+  <p:clrMapOvr>
+    <a:masterClrMapping/>
+  </p:clrMapOvr>
+</p:sld>
+</file>
+
+<file path=ppt/slides/slide9.xml><?xml version="1.0" encoding="utf-8"?>
+<p:sld xmlns:a="http://schemas.openxmlformats.org/drawingml/2006/main" xmlns:r="http://schemas.openxmlformats.org/officeDocument/2006/relationships" xmlns:p="http://schemas.openxmlformats.org/presentationml/2006/main">
+  <p:cSld>
+    <p:bg>
+      <p:bgPr>
+        <a:solidFill>
+          <a:schemeClr val="bg1"/>
+        </a:solidFill>
+        <a:effectLst/>
+      </p:bgPr>
+    </p:bg>
+    <p:spTree>
+      <p:nvGrpSpPr>
+        <p:cNvPr id="1" name="">
+          <a:extLst>
+            <a:ext uri="{FF2B5EF4-FFF2-40B4-BE49-F238E27FC236}">
+              <a16:creationId xmlns:a16="http://schemas.microsoft.com/office/drawing/2014/main" id="{01FC3EA8-67C4-000C-26C8-155FE2EBF9E1}"/>
+            </a:ext>
+          </a:extLst>
+        </p:cNvPr>
+        <p:cNvGrpSpPr/>
+        <p:nvPr/>
+      </p:nvGrpSpPr>
+      <p:grpSpPr>
+        <a:xfrm>
+          <a:off x="0" y="0"/>
+          <a:ext cx="0" cy="0"/>
+          <a:chOff x="0" y="0"/>
+          <a:chExt cx="0" cy="0"/>
+        </a:xfrm>
+      </p:grpSpPr>
+      <p:sp useBgFill="1">
+        <p:nvSpPr>
+          <p:cNvPr id="8" name="Rectangle 7">
+            <a:extLst>
+              <a:ext uri="{FF2B5EF4-FFF2-40B4-BE49-F238E27FC236}">
+                <a16:creationId xmlns:a16="http://schemas.microsoft.com/office/drawing/2014/main" id="{C84D3078-7C7B-C090-720C-A6E2A563E1BD}"/>
+              </a:ext>
+              <a:ext uri="{C183D7F6-B498-43B3-948B-1728B52AA6E4}">
+                <adec:decorative xmlns:adec="http://schemas.microsoft.com/office/drawing/2017/decorative" val="1"/>
+              </a:ext>
+            </a:extLst>
+          </p:cNvPr>
+          <p:cNvSpPr>
+            <a:spLocks noGrp="1" noRot="1" noChangeAspect="1" noMove="1" noResize="1" noEditPoints="1" noAdjustHandles="1" noChangeArrowheads="1" noChangeShapeType="1" noTextEdit="1"/>
+          </p:cNvSpPr>
+          <p:nvPr>
+            <p:extLst>
+              <p:ext uri="{386F3935-93C4-4BCD-93E2-E3B085C9AB24}">
+                <p16:designElem xmlns:p16="http://schemas.microsoft.com/office/powerpoint/2015/main" val="1"/>
+              </p:ext>
+            </p:extLst>
+          </p:nvPr>
+        </p:nvSpPr>
+        <p:spPr>
+          <a:xfrm>
+            <a:off x="0" y="0"/>
+            <a:ext cx="12192000" cy="6858000"/>
+          </a:xfrm>
+          <a:prstGeom prst="rect">
+            <a:avLst/>
+          </a:prstGeom>
+          <a:ln w="12700" cap="flat" cmpd="sng" algn="ctr">
+            <a:noFill/>
+            <a:prstDash val="solid"/>
+            <a:miter lim="800000"/>
+          </a:ln>
+          <a:effectLst/>
+          <a:extLst>
+            <a:ext uri="{91240B29-F687-4F45-9708-019B960494DF}">
+              <a14:hiddenLine xmlns:a14="http://schemas.microsoft.com/office/drawing/2010/main" w="12700" cap="flat" cmpd="sng" algn="ctr">
+                <a:solidFill>
+                  <a:schemeClr val="accent1">
+                    <a:shade val="50000"/>
+                  </a:schemeClr>
+                </a:solidFill>
+                <a:prstDash val="solid"/>
+                <a:miter lim="800000"/>
+              </a14:hiddenLine>
+            </a:ext>
+          </a:extLst>
+        </p:spPr>
+        <p:style>
+          <a:lnRef idx="2">
+            <a:schemeClr val="accent1">
+              <a:shade val="50000"/>
+            </a:schemeClr>
+          </a:lnRef>
+          <a:fillRef idx="1">
+            <a:schemeClr val="accent1"/>
+          </a:fillRef>
+          <a:effectRef idx="0">
+            <a:schemeClr val="accent1"/>
+          </a:effectRef>
+          <a:fontRef idx="minor">
+            <a:schemeClr val="lt1"/>
+          </a:fontRef>
+        </p:style>
+        <p:txBody>
+          <a:bodyPr rtlCol="0" anchor="ctr"/>
+          <a:lstStyle/>
+          <a:p>
+            <a:pPr algn="ctr"/>
+            <a:endParaRPr lang="en-US"/>
+          </a:p>
+        </p:txBody>
+      </p:sp>
+      <p:sp>
+        <p:nvSpPr>
+          <p:cNvPr id="10" name="Rectangle 9">
+            <a:extLst>
+              <a:ext uri="{FF2B5EF4-FFF2-40B4-BE49-F238E27FC236}">
+                <a16:creationId xmlns:a16="http://schemas.microsoft.com/office/drawing/2014/main" id="{721F3E52-DD28-12FE-0C91-08150E0D8D08}"/>
+              </a:ext>
+              <a:ext uri="{C183D7F6-B498-43B3-948B-1728B52AA6E4}">
+                <adec:decorative xmlns:adec="http://schemas.microsoft.com/office/drawing/2017/decorative" val="1"/>
+              </a:ext>
+            </a:extLst>
+          </p:cNvPr>
+          <p:cNvSpPr>
+            <a:spLocks noGrp="1" noRot="1" noChangeAspect="1" noMove="1" noResize="1" noEditPoints="1" noAdjustHandles="1" noChangeArrowheads="1" noChangeShapeType="1" noTextEdit="1"/>
+          </p:cNvSpPr>
+          <p:nvPr>
+            <p:extLst>
+              <p:ext uri="{386F3935-93C4-4BCD-93E2-E3B085C9AB24}">
+                <p16:designElem xmlns:p16="http://schemas.microsoft.com/office/powerpoint/2015/main" val="1"/>
+              </p:ext>
+            </p:extLst>
+          </p:nvPr>
+        </p:nvSpPr>
+        <p:spPr>
+          <a:xfrm flipH="1">
+            <a:off x="-1" y="-1"/>
+            <a:ext cx="12191998" cy="1590742"/>
+          </a:xfrm>
+          <a:prstGeom prst="rect">
+            <a:avLst/>
+          </a:prstGeom>
+          <a:gradFill>
+            <a:gsLst>
+              <a:gs pos="0">
+                <a:srgbClr val="000000"/>
+              </a:gs>
+              <a:gs pos="100000">
+                <a:schemeClr val="accent1">
+                  <a:lumMod val="75000"/>
+                </a:schemeClr>
+              </a:gs>
+            </a:gsLst>
+            <a:lin ang="8400000" scaled="0"/>
+          </a:gradFill>
+          <a:ln>
+            <a:noFill/>
+          </a:ln>
+        </p:spPr>
+        <p:style>
+          <a:lnRef idx="2">
+            <a:schemeClr val="accent1">
+              <a:shade val="50000"/>
+            </a:schemeClr>
+          </a:lnRef>
+          <a:fillRef idx="1">
+            <a:schemeClr val="accent1"/>
+          </a:fillRef>
+          <a:effectRef idx="0">
+            <a:schemeClr val="accent1"/>
+          </a:effectRef>
+          <a:fontRef idx="minor">
+            <a:schemeClr val="lt1"/>
+          </a:fontRef>
+        </p:style>
+        <p:txBody>
+          <a:bodyPr rtlCol="0" anchor="ctr"/>
+          <a:lstStyle/>
+          <a:p>
+            <a:pPr algn="ctr"/>
+            <a:endParaRPr lang="en-US"/>
+          </a:p>
+        </p:txBody>
+      </p:sp>
+      <p:sp>
+        <p:nvSpPr>
+          <p:cNvPr id="12" name="Rectangle 11">
+            <a:extLst>
+              <a:ext uri="{FF2B5EF4-FFF2-40B4-BE49-F238E27FC236}">
+                <a16:creationId xmlns:a16="http://schemas.microsoft.com/office/drawing/2014/main" id="{17BB315D-510A-907C-A14A-4726A9121085}"/>
+              </a:ext>
+              <a:ext uri="{C183D7F6-B498-43B3-948B-1728B52AA6E4}">
+                <adec:decorative xmlns:adec="http://schemas.microsoft.com/office/drawing/2017/decorative" val="1"/>
+              </a:ext>
+            </a:extLst>
+          </p:cNvPr>
+          <p:cNvSpPr>
+            <a:spLocks noGrp="1" noRot="1" noChangeAspect="1" noMove="1" noResize="1" noEditPoints="1" noAdjustHandles="1" noChangeArrowheads="1" noChangeShapeType="1" noTextEdit="1"/>
+          </p:cNvSpPr>
+          <p:nvPr>
+            <p:extLst>
+              <p:ext uri="{386F3935-93C4-4BCD-93E2-E3B085C9AB24}">
+                <p16:designElem xmlns:p16="http://schemas.microsoft.com/office/powerpoint/2015/main" val="1"/>
+              </p:ext>
+            </p:extLst>
+          </p:nvPr>
+        </p:nvSpPr>
+        <p:spPr>
+          <a:xfrm rot="10800000" flipH="1">
+            <a:off x="-3" y="0"/>
+            <a:ext cx="8115306" cy="1590742"/>
+          </a:xfrm>
+          <a:prstGeom prst="rect">
+            <a:avLst/>
+          </a:prstGeom>
+          <a:gradFill>
+            <a:gsLst>
+              <a:gs pos="20000">
+                <a:schemeClr val="accent1">
+                  <a:alpha val="0"/>
+                </a:schemeClr>
+              </a:gs>
+              <a:gs pos="100000">
+                <a:schemeClr val="accent1">
+                  <a:lumMod val="50000"/>
+                  <a:alpha val="55000"/>
+                </a:schemeClr>
+              </a:gs>
+            </a:gsLst>
+            <a:lin ang="13800000" scaled="0"/>
+          </a:gradFill>
+          <a:ln>
+            <a:noFill/>
+          </a:ln>
+        </p:spPr>
+        <p:style>
+          <a:lnRef idx="2">
+            <a:schemeClr val="accent1">
+              <a:shade val="50000"/>
+            </a:schemeClr>
+          </a:lnRef>
+          <a:fillRef idx="1">
+            <a:schemeClr val="accent1"/>
+          </a:fillRef>
+          <a:effectRef idx="0">
+            <a:schemeClr val="accent1"/>
+          </a:effectRef>
+          <a:fontRef idx="minor">
+            <a:schemeClr val="lt1"/>
+          </a:fontRef>
+        </p:style>
+        <p:txBody>
+          <a:bodyPr rtlCol="0" anchor="ctr"/>
+          <a:lstStyle/>
+          <a:p>
+            <a:pPr algn="ctr"/>
+            <a:endParaRPr lang="en-US"/>
+          </a:p>
+        </p:txBody>
+      </p:sp>
+      <p:sp>
+        <p:nvSpPr>
+          <p:cNvPr id="14" name="Rectangle 13">
+            <a:extLst>
+              <a:ext uri="{FF2B5EF4-FFF2-40B4-BE49-F238E27FC236}">
+                <a16:creationId xmlns:a16="http://schemas.microsoft.com/office/drawing/2014/main" id="{428158DA-7788-2A5A-295D-020B98D54B65}"/>
+              </a:ext>
+              <a:ext uri="{C183D7F6-B498-43B3-948B-1728B52AA6E4}">
+                <adec:decorative xmlns:adec="http://schemas.microsoft.com/office/drawing/2017/decorative" val="1"/>
+              </a:ext>
+            </a:extLst>
+          </p:cNvPr>
+          <p:cNvSpPr>
+            <a:spLocks noGrp="1" noRot="1" noChangeAspect="1" noMove="1" noResize="1" noEditPoints="1" noAdjustHandles="1" noChangeArrowheads="1" noChangeShapeType="1" noTextEdit="1"/>
+          </p:cNvSpPr>
+          <p:nvPr>
+            <p:extLst>
+              <p:ext uri="{386F3935-93C4-4BCD-93E2-E3B085C9AB24}">
+                <p16:designElem xmlns:p16="http://schemas.microsoft.com/office/powerpoint/2015/main" val="1"/>
+              </p:ext>
+            </p:extLst>
+          </p:nvPr>
+        </p:nvSpPr>
+        <p:spPr>
+          <a:xfrm flipH="1">
+            <a:off x="8115299" y="-1"/>
+            <a:ext cx="4076698" cy="1590742"/>
+          </a:xfrm>
+          <a:prstGeom prst="rect">
+            <a:avLst/>
+          </a:prstGeom>
+          <a:gradFill>
+            <a:gsLst>
+              <a:gs pos="0">
+                <a:schemeClr val="accent1">
+                  <a:alpha val="66000"/>
+                </a:schemeClr>
+              </a:gs>
+              <a:gs pos="100000">
+                <a:srgbClr val="000000">
+                  <a:alpha val="30000"/>
+                </a:srgbClr>
+              </a:gs>
+            </a:gsLst>
+            <a:lin ang="13200000" scaled="0"/>
+          </a:gradFill>
+          <a:ln>
+            <a:noFill/>
+          </a:ln>
+        </p:spPr>
+        <p:style>
+          <a:lnRef idx="2">
+            <a:schemeClr val="accent1">
+              <a:shade val="50000"/>
+            </a:schemeClr>
+          </a:lnRef>
+          <a:fillRef idx="1">
+            <a:schemeClr val="accent1"/>
+          </a:fillRef>
+          <a:effectRef idx="0">
+            <a:schemeClr val="accent1"/>
+          </a:effectRef>
+          <a:fontRef idx="minor">
+            <a:schemeClr val="lt1"/>
+          </a:fontRef>
+        </p:style>
+        <p:txBody>
+          <a:bodyPr rtlCol="0" anchor="ctr"/>
+          <a:lstStyle/>
+          <a:p>
+            <a:pPr algn="ctr"/>
+            <a:endParaRPr lang="en-US"/>
+          </a:p>
+        </p:txBody>
+      </p:sp>
+      <p:sp>
+        <p:nvSpPr>
+          <p:cNvPr id="16" name="Rectangle 15">
+            <a:extLst>
+              <a:ext uri="{FF2B5EF4-FFF2-40B4-BE49-F238E27FC236}">
+                <a16:creationId xmlns:a16="http://schemas.microsoft.com/office/drawing/2014/main" id="{D7D1F016-04D4-A54E-2E3F-8E01A7A35BE4}"/>
+              </a:ext>
+              <a:ext uri="{C183D7F6-B498-43B3-948B-1728B52AA6E4}">
+                <adec:decorative xmlns:adec="http://schemas.microsoft.com/office/drawing/2017/decorative" val="1"/>
+              </a:ext>
+            </a:extLst>
+          </p:cNvPr>
+          <p:cNvSpPr>
+            <a:spLocks noGrp="1" noRot="1" noChangeAspect="1" noMove="1" noResize="1" noEditPoints="1" noAdjustHandles="1" noChangeArrowheads="1" noChangeShapeType="1" noTextEdit="1"/>
+          </p:cNvSpPr>
+          <p:nvPr>
+            <p:extLst>
+              <p:ext uri="{386F3935-93C4-4BCD-93E2-E3B085C9AB24}">
+                <p16:designElem xmlns:p16="http://schemas.microsoft.com/office/powerpoint/2015/main" val="1"/>
+              </p:ext>
+            </p:extLst>
+          </p:nvPr>
+        </p:nvSpPr>
+        <p:spPr>
+          <a:xfrm>
+            <a:off x="459350" y="-1"/>
+            <a:ext cx="11732646" cy="1597433"/>
+          </a:xfrm>
+          <a:prstGeom prst="rect">
+            <a:avLst/>
+          </a:prstGeom>
+          <a:gradFill>
+            <a:gsLst>
+              <a:gs pos="50000">
+                <a:srgbClr val="000000">
+                  <a:alpha val="0"/>
+                </a:srgbClr>
+              </a:gs>
+              <a:gs pos="99000">
+                <a:schemeClr val="accent1">
+                  <a:lumMod val="50000"/>
+                  <a:alpha val="52000"/>
+                </a:schemeClr>
+              </a:gs>
+            </a:gsLst>
+            <a:lin ang="16800000" scaled="0"/>
+          </a:gradFill>
+          <a:ln>
+            <a:noFill/>
+          </a:ln>
+        </p:spPr>
+        <p:style>
+          <a:lnRef idx="2">
+            <a:schemeClr val="accent1">
+              <a:shade val="50000"/>
+            </a:schemeClr>
+          </a:lnRef>
+          <a:fillRef idx="1">
+            <a:schemeClr val="accent1"/>
+          </a:fillRef>
+          <a:effectRef idx="0">
+            <a:schemeClr val="accent1"/>
+          </a:effectRef>
+          <a:fontRef idx="minor">
+            <a:schemeClr val="lt1"/>
+          </a:fontRef>
+        </p:style>
+        <p:txBody>
+          <a:bodyPr rtlCol="0" anchor="ctr"/>
+          <a:lstStyle/>
+          <a:p>
+            <a:pPr algn="ctr"/>
+            <a:endParaRPr lang="en-US"/>
+          </a:p>
+        </p:txBody>
+      </p:sp>
+      <p:sp>
+        <p:nvSpPr>
+          <p:cNvPr id="2" name="Title 1">
+            <a:extLst>
+              <a:ext uri="{FF2B5EF4-FFF2-40B4-BE49-F238E27FC236}">
+                <a16:creationId xmlns:a16="http://schemas.microsoft.com/office/drawing/2014/main" id="{0CAFAA13-FD85-EA2F-B943-18CC10B1640E}"/>
+              </a:ext>
+            </a:extLst>
+          </p:cNvPr>
+          <p:cNvSpPr>
+            <a:spLocks noGrp="1"/>
+          </p:cNvSpPr>
+          <p:nvPr>
+            <p:ph type="title"/>
+          </p:nvPr>
+        </p:nvSpPr>
+        <p:spPr>
+          <a:xfrm>
+            <a:off x="459346" y="278535"/>
             <a:ext cx="9895951" cy="1033669"/>
           </a:xfrm>
         </p:spPr>
@@ -10630,4 +13243,319 @@
     </a:ext>
   </a:extLst>
 </a:theme>
+</file>
+
+<file path=ppt/theme/theme2.xml><?xml version="1.0" encoding="utf-8"?>
+<a:theme xmlns:a="http://schemas.openxmlformats.org/drawingml/2006/main" name="Office Theme">
+  <a:themeElements>
+    <a:clrScheme name="Office">
+      <a:dk1>
+        <a:sysClr val="windowText" lastClr="000000"/>
+      </a:dk1>
+      <a:lt1>
+        <a:sysClr val="window" lastClr="FFFFFF"/>
+      </a:lt1>
+      <a:dk2>
+        <a:srgbClr val="0E2841"/>
+      </a:dk2>
+      <a:lt2>
+        <a:srgbClr val="E8E8E8"/>
+      </a:lt2>
+      <a:accent1>
+        <a:srgbClr val="156082"/>
+      </a:accent1>
+      <a:accent2>
+        <a:srgbClr val="E97132"/>
+      </a:accent2>
+      <a:accent3>
+        <a:srgbClr val="196B24"/>
+      </a:accent3>
+      <a:accent4>
+        <a:srgbClr val="0F9ED5"/>
+      </a:accent4>
+      <a:accent5>
+        <a:srgbClr val="A02B93"/>
+      </a:accent5>
+      <a:accent6>
+        <a:srgbClr val="4EA72E"/>
+      </a:accent6>
+      <a:hlink>
+        <a:srgbClr val="467886"/>
+      </a:hlink>
+      <a:folHlink>
+        <a:srgbClr val="96607D"/>
+      </a:folHlink>
+    </a:clrScheme>
+    <a:fontScheme name="Office">
+      <a:majorFont>
+        <a:latin typeface="Aptos Display" panose="02110004020202020204"/>
+        <a:ea typeface=""/>
+        <a:cs typeface=""/>
+        <a:font script="Jpan" typeface="游ゴシック Light"/>
+        <a:font script="Hang" typeface="맑은 고딕"/>
+        <a:font script="Hans" typeface="等线 Light"/>
+        <a:font script="Hant" typeface="新細明體"/>
+        <a:font script="Arab" typeface="Times New Roman"/>
+        <a:font script="Hebr" typeface="Times New Roman"/>
+        <a:font script="Thai" typeface="Angsana New"/>
+        <a:font script="Ethi" typeface="Nyala"/>
+        <a:font script="Beng" typeface="Vrinda"/>
+        <a:font script="Gujr" typeface="Shruti"/>
+        <a:font script="Khmr" typeface="MoolBoran"/>
+        <a:font script="Knda" typeface="Tunga"/>
+        <a:font script="Guru" typeface="Raavi"/>
+        <a:font script="Cans" typeface="Euphemia"/>
+        <a:font script="Cher" typeface="Plantagenet Cherokee"/>
+        <a:font script="Yiii" typeface="Microsoft Yi Baiti"/>
+        <a:font script="Tibt" typeface="Microsoft Himalaya"/>
+        <a:font script="Thaa" typeface="MV Boli"/>
+        <a:font script="Deva" typeface="Mangal"/>
+        <a:font script="Telu" typeface="Gautami"/>
+        <a:font script="Taml" typeface="Latha"/>
+        <a:font script="Syrc" typeface="Estrangelo Edessa"/>
+        <a:font script="Orya" typeface="Kalinga"/>
+        <a:font script="Mlym" typeface="Kartika"/>
+        <a:font script="Laoo" typeface="DokChampa"/>
+        <a:font script="Sinh" typeface="Iskoola Pota"/>
+        <a:font script="Mong" typeface="Mongolian Baiti"/>
+        <a:font script="Viet" typeface="Times New Roman"/>
+        <a:font script="Uigh" typeface="Microsoft Uighur"/>
+        <a:font script="Geor" typeface="Sylfaen"/>
+        <a:font script="Armn" typeface="Arial"/>
+        <a:font script="Bugi" typeface="Leelawadee UI"/>
+        <a:font script="Bopo" typeface="Microsoft JhengHei"/>
+        <a:font script="Java" typeface="Javanese Text"/>
+        <a:font script="Lisu" typeface="Segoe UI"/>
+        <a:font script="Mymr" typeface="Myanmar Text"/>
+        <a:font script="Nkoo" typeface="Ebrima"/>
+        <a:font script="Olck" typeface="Nirmala UI"/>
+        <a:font script="Osma" typeface="Ebrima"/>
+        <a:font script="Phag" typeface="Phagspa"/>
+        <a:font script="Syrn" typeface="Estrangelo Edessa"/>
+        <a:font script="Syrj" typeface="Estrangelo Edessa"/>
+        <a:font script="Syre" typeface="Estrangelo Edessa"/>
+        <a:font script="Sora" typeface="Nirmala UI"/>
+        <a:font script="Tale" typeface="Microsoft Tai Le"/>
+        <a:font script="Talu" typeface="Microsoft New Tai Lue"/>
+        <a:font script="Tfng" typeface="Ebrima"/>
+      </a:majorFont>
+      <a:minorFont>
+        <a:latin typeface="Aptos" panose="02110004020202020204"/>
+        <a:ea typeface=""/>
+        <a:cs typeface=""/>
+        <a:font script="Jpan" typeface="游ゴシック"/>
+        <a:font script="Hang" typeface="맑은 고딕"/>
+        <a:font script="Hans" typeface="等线"/>
+        <a:font script="Hant" typeface="新細明體"/>
+        <a:font script="Arab" typeface="Arial"/>
+        <a:font script="Hebr" typeface="Arial"/>
+        <a:font script="Thai" typeface="Cordia New"/>
+        <a:font script="Ethi" typeface="Nyala"/>
+        <a:font script="Beng" typeface="Vrinda"/>
+        <a:font script="Gujr" typeface="Shruti"/>
+        <a:font script="Khmr" typeface="DaunPenh"/>
+        <a:font script="Knda" typeface="Tunga"/>
+        <a:font script="Guru" typeface="Raavi"/>
+        <a:font script="Cans" typeface="Euphemia"/>
+        <a:font script="Cher" typeface="Plantagenet Cherokee"/>
+        <a:font script="Yiii" typeface="Microsoft Yi Baiti"/>
+        <a:font script="Tibt" typeface="Microsoft Himalaya"/>
+        <a:font script="Thaa" typeface="MV Boli"/>
+        <a:font script="Deva" typeface="Mangal"/>
+        <a:font script="Telu" typeface="Gautami"/>
+        <a:font script="Taml" typeface="Latha"/>
+        <a:font script="Syrc" typeface="Estrangelo Edessa"/>
+        <a:font script="Orya" typeface="Kalinga"/>
+        <a:font script="Mlym" typeface="Kartika"/>
+        <a:font script="Laoo" typeface="DokChampa"/>
+        <a:font script="Sinh" typeface="Iskoola Pota"/>
+        <a:font script="Mong" typeface="Mongolian Baiti"/>
+        <a:font script="Viet" typeface="Arial"/>
+        <a:font script="Uigh" typeface="Microsoft Uighur"/>
+        <a:font script="Geor" typeface="Sylfaen"/>
+        <a:font script="Armn" typeface="Arial"/>
+        <a:font script="Bugi" typeface="Leelawadee UI"/>
+        <a:font script="Bopo" typeface="Microsoft JhengHei"/>
+        <a:font script="Java" typeface="Javanese Text"/>
+        <a:font script="Lisu" typeface="Segoe UI"/>
+        <a:font script="Mymr" typeface="Myanmar Text"/>
+        <a:font script="Nkoo" typeface="Ebrima"/>
+        <a:font script="Olck" typeface="Nirmala UI"/>
+        <a:font script="Osma" typeface="Ebrima"/>
+        <a:font script="Phag" typeface="Phagspa"/>
+        <a:font script="Syrn" typeface="Estrangelo Edessa"/>
+        <a:font script="Syrj" typeface="Estrangelo Edessa"/>
+        <a:font script="Syre" typeface="Estrangelo Edessa"/>
+        <a:font script="Sora" typeface="Nirmala UI"/>
+        <a:font script="Tale" typeface="Microsoft Tai Le"/>
+        <a:font script="Talu" typeface="Microsoft New Tai Lue"/>
+        <a:font script="Tfng" typeface="Ebrima"/>
+      </a:minorFont>
+    </a:fontScheme>
+    <a:fmtScheme name="Office">
+      <a:fillStyleLst>
+        <a:solidFill>
+          <a:schemeClr val="phClr"/>
+        </a:solidFill>
+        <a:gradFill rotWithShape="1">
+          <a:gsLst>
+            <a:gs pos="0">
+              <a:schemeClr val="phClr">
+                <a:lumMod val="110000"/>
+                <a:satMod val="105000"/>
+                <a:tint val="67000"/>
+              </a:schemeClr>
+            </a:gs>
+            <a:gs pos="50000">
+              <a:schemeClr val="phClr">
+                <a:lumMod val="105000"/>
+                <a:satMod val="103000"/>
+                <a:tint val="73000"/>
+              </a:schemeClr>
+            </a:gs>
+            <a:gs pos="100000">
+              <a:schemeClr val="phClr">
+                <a:lumMod val="105000"/>
+                <a:satMod val="109000"/>
+                <a:tint val="81000"/>
+              </a:schemeClr>
+            </a:gs>
+          </a:gsLst>
+          <a:lin ang="5400000" scaled="0"/>
+        </a:gradFill>
+        <a:gradFill rotWithShape="1">
+          <a:gsLst>
+            <a:gs pos="0">
+              <a:schemeClr val="phClr">
+                <a:satMod val="103000"/>
+                <a:lumMod val="102000"/>
+                <a:tint val="94000"/>
+              </a:schemeClr>
+            </a:gs>
+            <a:gs pos="50000">
+              <a:schemeClr val="phClr">
+                <a:satMod val="110000"/>
+                <a:lumMod val="100000"/>
+                <a:shade val="100000"/>
+              </a:schemeClr>
+            </a:gs>
+            <a:gs pos="100000">
+              <a:schemeClr val="phClr">
+                <a:lumMod val="99000"/>
+                <a:satMod val="120000"/>
+                <a:shade val="78000"/>
+              </a:schemeClr>
+            </a:gs>
+          </a:gsLst>
+          <a:lin ang="5400000" scaled="0"/>
+        </a:gradFill>
+      </a:fillStyleLst>
+      <a:lnStyleLst>
+        <a:ln w="12700" cap="flat" cmpd="sng" algn="ctr">
+          <a:solidFill>
+            <a:schemeClr val="phClr"/>
+          </a:solidFill>
+          <a:prstDash val="solid"/>
+          <a:miter lim="800000"/>
+        </a:ln>
+        <a:ln w="19050" cap="flat" cmpd="sng" algn="ctr">
+          <a:solidFill>
+            <a:schemeClr val="phClr"/>
+          </a:solidFill>
+          <a:prstDash val="solid"/>
+          <a:miter lim="800000"/>
+        </a:ln>
+        <a:ln w="25400" cap="flat" cmpd="sng" algn="ctr">
+          <a:solidFill>
+            <a:schemeClr val="phClr"/>
+          </a:solidFill>
+          <a:prstDash val="solid"/>
+          <a:miter lim="800000"/>
+        </a:ln>
+      </a:lnStyleLst>
+      <a:effectStyleLst>
+        <a:effectStyle>
+          <a:effectLst/>
+        </a:effectStyle>
+        <a:effectStyle>
+          <a:effectLst/>
+        </a:effectStyle>
+        <a:effectStyle>
+          <a:effectLst>
+            <a:outerShdw blurRad="57150" dist="19050" dir="5400000" algn="ctr" rotWithShape="0">
+              <a:srgbClr val="000000">
+                <a:alpha val="63000"/>
+              </a:srgbClr>
+            </a:outerShdw>
+          </a:effectLst>
+        </a:effectStyle>
+      </a:effectStyleLst>
+      <a:bgFillStyleLst>
+        <a:solidFill>
+          <a:schemeClr val="phClr"/>
+        </a:solidFill>
+        <a:solidFill>
+          <a:schemeClr val="phClr">
+            <a:tint val="95000"/>
+            <a:satMod val="170000"/>
+          </a:schemeClr>
+        </a:solidFill>
+        <a:gradFill rotWithShape="1">
+          <a:gsLst>
+            <a:gs pos="0">
+              <a:schemeClr val="phClr">
+                <a:tint val="93000"/>
+                <a:satMod val="150000"/>
+                <a:shade val="98000"/>
+                <a:lumMod val="102000"/>
+              </a:schemeClr>
+            </a:gs>
+            <a:gs pos="50000">
+              <a:schemeClr val="phClr">
+                <a:tint val="98000"/>
+                <a:satMod val="130000"/>
+                <a:shade val="90000"/>
+                <a:lumMod val="103000"/>
+              </a:schemeClr>
+            </a:gs>
+            <a:gs pos="100000">
+              <a:schemeClr val="phClr">
+                <a:shade val="63000"/>
+                <a:satMod val="120000"/>
+              </a:schemeClr>
+            </a:gs>
+          </a:gsLst>
+          <a:lin ang="5400000" scaled="0"/>
+        </a:gradFill>
+      </a:bgFillStyleLst>
+    </a:fmtScheme>
+  </a:themeElements>
+  <a:objectDefaults>
+    <a:lnDef>
+      <a:spPr/>
+      <a:bodyPr/>
+      <a:lstStyle/>
+      <a:style>
+        <a:lnRef idx="2">
+          <a:schemeClr val="accent1"/>
+        </a:lnRef>
+        <a:fillRef idx="0">
+          <a:schemeClr val="accent1"/>
+        </a:fillRef>
+        <a:effectRef idx="1">
+          <a:schemeClr val="accent1"/>
+        </a:effectRef>
+        <a:fontRef idx="minor">
+          <a:schemeClr val="tx1"/>
+        </a:fontRef>
+      </a:style>
+    </a:lnDef>
+  </a:objectDefaults>
+  <a:extraClrSchemeLst/>
+  <a:extLst>
+    <a:ext uri="{05A4C25C-085E-4340-85A3-A5531E510DB2}">
+      <thm15:themeFamily xmlns:thm15="http://schemas.microsoft.com/office/thememl/2012/main" name="Office Theme" id="{2E142A2C-CD16-42D6-873A-C26D2A0506FA}" vid="{1BDDFF52-6CD6-40A5-AB3C-68EB2F1E4D0A}"/>
+    </a:ext>
+  </a:extLst>
+</a:theme>
 </file>